--- a/public/yantraa-hackathon-deck.pptx
+++ b/public/yantraa-hackathon-deck.pptx
@@ -15,9 +15,12 @@
     <p:sldId id="263" r:id="rId9"/>
     <p:sldId id="264" r:id="rId10"/>
     <p:sldId id="265" r:id="rId11"/>
+    <p:sldId id="266" r:id="rId12"/>
+    <p:sldId id="267" r:id="rId13"/>
+    <p:sldId id="268" r:id="rId14"/>
   </p:sldIdLst>
   <p:notesMasterIdLst>
-    <p:notesMasterId r:id="rId12"/>
+    <p:notesMasterId r:id="rId15"/>
   </p:notesMasterIdLst>
   <p:sldSz cx="12188952" cy="6858000"/>
   <p:notesSz cx="6858000" cy="12188952"/>
@@ -623,6 +626,270 @@
             <a:fld id="{F7021451-1387-4CA6-816F-3879F97B5CBC}" type="slidenum">
               <a:rPr lang="en-US"/>
               <a:t>10</a:t>
+            </a:fld>
+            <a:endParaRPr lang="en-US"/>
+          </a:p>
+        </p:txBody>
+      </p:sp>
+    </p:spTree>
+    <p:extLst>
+      <p:ext uri="{BB962C8B-B14F-4D97-AF65-F5344CB8AC3E}">
+        <p14:creationId xmlns:p14="http://schemas.microsoft.com/office/powerpoint/2010/main" val="1024086991"/>
+      </p:ext>
+    </p:extLst>
+  </p:cSld>
+  <p:clrMapOvr>
+    <a:masterClrMapping/>
+  </p:clrMapOvr>
+</p:notes>
+</file>
+
+<file path=ppt/notesSlides/notesSlide11.xml><?xml version="1.0" encoding="utf-8"?>
+<p:notes xmlns:a="http://schemas.openxmlformats.org/drawingml/2006/main" xmlns:r="http://schemas.openxmlformats.org/officeDocument/2006/relationships" xmlns:p="http://schemas.openxmlformats.org/presentationml/2006/main">
+  <p:cSld>
+    <p:spTree>
+      <p:nvGrpSpPr>
+        <p:cNvPr id="1" name=""/>
+        <p:cNvGrpSpPr/>
+        <p:nvPr/>
+      </p:nvGrpSpPr>
+      <p:grpSpPr>
+        <a:xfrm>
+          <a:off x="0" y="0"/>
+          <a:ext cx="0" cy="0"/>
+          <a:chOff x="0" y="0"/>
+          <a:chExt cx="0" cy="0"/>
+        </a:xfrm>
+      </p:grpSpPr>
+      <p:sp>
+        <p:nvSpPr>
+          <p:cNvPr id="2" name="Slide Image Placeholder 1"/>
+          <p:cNvSpPr>
+            <a:spLocks noGrp="1" noRot="1" noChangeAspect="1"/>
+          </p:cNvSpPr>
+          <p:nvPr>
+            <p:ph type="sldImg"/>
+          </p:nvPr>
+        </p:nvSpPr>
+        <p:spPr/>
+      </p:sp>
+      <p:sp>
+        <p:nvSpPr>
+          <p:cNvPr id="3" name="Notes Placeholder 2"/>
+          <p:cNvSpPr>
+            <a:spLocks noGrp="1"/>
+          </p:cNvSpPr>
+          <p:nvPr>
+            <p:ph type="body" idx="1"/>
+          </p:nvPr>
+        </p:nvSpPr>
+        <p:spPr/>
+        <p:txBody>
+          <a:bodyPr/>
+          <a:lstStyle/>
+          <a:p>
+            <a:r>
+              <a:rPr lang="en-US" dirty="0"/>
+              <a:t/>
+            </a:r>
+            <a:endParaRPr lang="en-US" dirty="0"/>
+          </a:p>
+        </p:txBody>
+      </p:sp>
+      <p:sp>
+        <p:nvSpPr>
+          <p:cNvPr id="4" name="Slide Number Placeholder 3"/>
+          <p:cNvSpPr>
+            <a:spLocks noGrp="1"/>
+          </p:cNvSpPr>
+          <p:nvPr>
+            <p:ph type="sldNum" sz="quarter" idx="10"/>
+          </p:nvPr>
+        </p:nvSpPr>
+        <p:spPr/>
+        <p:txBody>
+          <a:bodyPr/>
+          <a:lstStyle/>
+          <a:p>
+            <a:fld id="{F7021451-1387-4CA6-816F-3879F97B5CBC}" type="slidenum">
+              <a:rPr lang="en-US"/>
+              <a:t>11</a:t>
+            </a:fld>
+            <a:endParaRPr lang="en-US"/>
+          </a:p>
+        </p:txBody>
+      </p:sp>
+    </p:spTree>
+    <p:extLst>
+      <p:ext uri="{BB962C8B-B14F-4D97-AF65-F5344CB8AC3E}">
+        <p14:creationId xmlns:p14="http://schemas.microsoft.com/office/powerpoint/2010/main" val="1024086991"/>
+      </p:ext>
+    </p:extLst>
+  </p:cSld>
+  <p:clrMapOvr>
+    <a:masterClrMapping/>
+  </p:clrMapOvr>
+</p:notes>
+</file>
+
+<file path=ppt/notesSlides/notesSlide12.xml><?xml version="1.0" encoding="utf-8"?>
+<p:notes xmlns:a="http://schemas.openxmlformats.org/drawingml/2006/main" xmlns:r="http://schemas.openxmlformats.org/officeDocument/2006/relationships" xmlns:p="http://schemas.openxmlformats.org/presentationml/2006/main">
+  <p:cSld>
+    <p:spTree>
+      <p:nvGrpSpPr>
+        <p:cNvPr id="1" name=""/>
+        <p:cNvGrpSpPr/>
+        <p:nvPr/>
+      </p:nvGrpSpPr>
+      <p:grpSpPr>
+        <a:xfrm>
+          <a:off x="0" y="0"/>
+          <a:ext cx="0" cy="0"/>
+          <a:chOff x="0" y="0"/>
+          <a:chExt cx="0" cy="0"/>
+        </a:xfrm>
+      </p:grpSpPr>
+      <p:sp>
+        <p:nvSpPr>
+          <p:cNvPr id="2" name="Slide Image Placeholder 1"/>
+          <p:cNvSpPr>
+            <a:spLocks noGrp="1" noRot="1" noChangeAspect="1"/>
+          </p:cNvSpPr>
+          <p:nvPr>
+            <p:ph type="sldImg"/>
+          </p:nvPr>
+        </p:nvSpPr>
+        <p:spPr/>
+      </p:sp>
+      <p:sp>
+        <p:nvSpPr>
+          <p:cNvPr id="3" name="Notes Placeholder 2"/>
+          <p:cNvSpPr>
+            <a:spLocks noGrp="1"/>
+          </p:cNvSpPr>
+          <p:nvPr>
+            <p:ph type="body" idx="1"/>
+          </p:nvPr>
+        </p:nvSpPr>
+        <p:spPr/>
+        <p:txBody>
+          <a:bodyPr/>
+          <a:lstStyle/>
+          <a:p>
+            <a:r>
+              <a:rPr lang="en-US" dirty="0"/>
+              <a:t/>
+            </a:r>
+            <a:endParaRPr lang="en-US" dirty="0"/>
+          </a:p>
+        </p:txBody>
+      </p:sp>
+      <p:sp>
+        <p:nvSpPr>
+          <p:cNvPr id="4" name="Slide Number Placeholder 3"/>
+          <p:cNvSpPr>
+            <a:spLocks noGrp="1"/>
+          </p:cNvSpPr>
+          <p:nvPr>
+            <p:ph type="sldNum" sz="quarter" idx="10"/>
+          </p:nvPr>
+        </p:nvSpPr>
+        <p:spPr/>
+        <p:txBody>
+          <a:bodyPr/>
+          <a:lstStyle/>
+          <a:p>
+            <a:fld id="{F7021451-1387-4CA6-816F-3879F97B5CBC}" type="slidenum">
+              <a:rPr lang="en-US"/>
+              <a:t>12</a:t>
+            </a:fld>
+            <a:endParaRPr lang="en-US"/>
+          </a:p>
+        </p:txBody>
+      </p:sp>
+    </p:spTree>
+    <p:extLst>
+      <p:ext uri="{BB962C8B-B14F-4D97-AF65-F5344CB8AC3E}">
+        <p14:creationId xmlns:p14="http://schemas.microsoft.com/office/powerpoint/2010/main" val="1024086991"/>
+      </p:ext>
+    </p:extLst>
+  </p:cSld>
+  <p:clrMapOvr>
+    <a:masterClrMapping/>
+  </p:clrMapOvr>
+</p:notes>
+</file>
+
+<file path=ppt/notesSlides/notesSlide13.xml><?xml version="1.0" encoding="utf-8"?>
+<p:notes xmlns:a="http://schemas.openxmlformats.org/drawingml/2006/main" xmlns:r="http://schemas.openxmlformats.org/officeDocument/2006/relationships" xmlns:p="http://schemas.openxmlformats.org/presentationml/2006/main">
+  <p:cSld>
+    <p:spTree>
+      <p:nvGrpSpPr>
+        <p:cNvPr id="1" name=""/>
+        <p:cNvGrpSpPr/>
+        <p:nvPr/>
+      </p:nvGrpSpPr>
+      <p:grpSpPr>
+        <a:xfrm>
+          <a:off x="0" y="0"/>
+          <a:ext cx="0" cy="0"/>
+          <a:chOff x="0" y="0"/>
+          <a:chExt cx="0" cy="0"/>
+        </a:xfrm>
+      </p:grpSpPr>
+      <p:sp>
+        <p:nvSpPr>
+          <p:cNvPr id="2" name="Slide Image Placeholder 1"/>
+          <p:cNvSpPr>
+            <a:spLocks noGrp="1" noRot="1" noChangeAspect="1"/>
+          </p:cNvSpPr>
+          <p:nvPr>
+            <p:ph type="sldImg"/>
+          </p:nvPr>
+        </p:nvSpPr>
+        <p:spPr/>
+      </p:sp>
+      <p:sp>
+        <p:nvSpPr>
+          <p:cNvPr id="3" name="Notes Placeholder 2"/>
+          <p:cNvSpPr>
+            <a:spLocks noGrp="1"/>
+          </p:cNvSpPr>
+          <p:nvPr>
+            <p:ph type="body" idx="1"/>
+          </p:nvPr>
+        </p:nvSpPr>
+        <p:spPr/>
+        <p:txBody>
+          <a:bodyPr/>
+          <a:lstStyle/>
+          <a:p>
+            <a:r>
+              <a:rPr lang="en-US" dirty="0"/>
+              <a:t/>
+            </a:r>
+            <a:endParaRPr lang="en-US" dirty="0"/>
+          </a:p>
+        </p:txBody>
+      </p:sp>
+      <p:sp>
+        <p:nvSpPr>
+          <p:cNvPr id="4" name="Slide Number Placeholder 3"/>
+          <p:cNvSpPr>
+            <a:spLocks noGrp="1"/>
+          </p:cNvSpPr>
+          <p:nvPr>
+            <p:ph type="sldNum" sz="quarter" idx="10"/>
+          </p:nvPr>
+        </p:nvSpPr>
+        <p:spPr/>
+        <p:txBody>
+          <a:bodyPr/>
+          <a:lstStyle/>
+          <a:p>
+            <a:fld id="{F7021451-1387-4CA6-816F-3879F97B5CBC}" type="slidenum">
+              <a:rPr lang="en-US"/>
+              <a:t>13</a:t>
             </a:fld>
             <a:endParaRPr lang="en-US"/>
           </a:p>
@@ -2861,6 +3128,4412 @@
                 <a:ea typeface="Consolas" pitchFamily="34" charset="-122"/>
                 <a:cs typeface="Consolas" pitchFamily="34" charset="-120"/>
               </a:rPr>
+              <a:t>IMPACT</a:t>
+            </a:r>
+            <a:endParaRPr lang="en-US" sz="1200" dirty="0"/>
+          </a:p>
+        </p:txBody>
+      </p:sp>
+      <p:sp>
+        <p:nvSpPr>
+          <p:cNvPr id="20" name="Text 18"/>
+          <p:cNvSpPr/>
+          <p:nvPr/>
+        </p:nvSpPr>
+        <p:spPr>
+          <a:xfrm>
+            <a:off x="822960" y="969264"/>
+            <a:ext cx="10543032" cy="914400"/>
+          </a:xfrm>
+          <a:prstGeom prst="rect">
+            <a:avLst/>
+          </a:prstGeom>
+          <a:noFill/>
+          <a:ln/>
+        </p:spPr>
+        <p:txBody>
+          <a:bodyPr wrap="square" rtlCol="0" anchor="ctr"/>
+          <a:lstStyle/>
+          <a:p>
+            <a:pPr algn="l" indent="0" marL="0">
+              <a:buNone/>
+            </a:pPr>
+            <a:r>
+              <a:rPr lang="en-US" sz="3400" b="1" dirty="0">
+                <a:solidFill>
+                  <a:srgbClr val="F4F6F8"/>
+                </a:solidFill>
+                <a:latin typeface="Arial" pitchFamily="34" charset="0"/>
+                <a:ea typeface="Arial" pitchFamily="34" charset="-122"/>
+                <a:cs typeface="Arial" pitchFamily="34" charset="-120"/>
+              </a:rPr>
+              <a:t>Who it’s for &amp; why it matters</a:t>
+            </a:r>
+            <a:endParaRPr lang="en-US" sz="3400" dirty="0"/>
+          </a:p>
+        </p:txBody>
+      </p:sp>
+      <p:sp>
+        <p:nvSpPr>
+          <p:cNvPr id="21" name="Text 19"/>
+          <p:cNvSpPr/>
+          <p:nvPr/>
+        </p:nvSpPr>
+        <p:spPr>
+          <a:xfrm>
+            <a:off x="822960" y="2286000"/>
+            <a:ext cx="4572000" cy="320040"/>
+          </a:xfrm>
+          <a:prstGeom prst="rect">
+            <a:avLst/>
+          </a:prstGeom>
+          <a:noFill/>
+          <a:ln/>
+        </p:spPr>
+        <p:txBody>
+          <a:bodyPr wrap="square" rtlCol="0" anchor="ctr"/>
+          <a:lstStyle/>
+          <a:p>
+            <a:pPr indent="0" marL="0">
+              <a:buNone/>
+            </a:pPr>
+            <a:r>
+              <a:rPr lang="en-US" sz="1300" b="1" spc="200" kern="0" dirty="0">
+                <a:solidFill>
+                  <a:srgbClr val="FF2D2D"/>
+                </a:solidFill>
+                <a:latin typeface="Consolas" pitchFamily="34" charset="0"/>
+                <a:ea typeface="Consolas" pitchFamily="34" charset="-122"/>
+                <a:cs typeface="Consolas" pitchFamily="34" charset="-120"/>
+              </a:rPr>
+              <a:t>BUILT FOR</a:t>
+            </a:r>
+            <a:endParaRPr lang="en-US" sz="1300" dirty="0"/>
+          </a:p>
+        </p:txBody>
+      </p:sp>
+      <p:sp>
+        <p:nvSpPr>
+          <p:cNvPr id="22" name="Shape 20"/>
+          <p:cNvSpPr/>
+          <p:nvPr/>
+        </p:nvSpPr>
+        <p:spPr>
+          <a:xfrm>
+            <a:off x="822960" y="2816352"/>
+            <a:ext cx="164592" cy="164592"/>
+          </a:xfrm>
+          <a:prstGeom prst="rect">
+            <a:avLst/>
+          </a:prstGeom>
+          <a:solidFill>
+            <a:srgbClr val="FF2D2D"/>
+          </a:solidFill>
+          <a:ln/>
+        </p:spPr>
+      </p:sp>
+      <p:sp>
+        <p:nvSpPr>
+          <p:cNvPr id="23" name="Text 21"/>
+          <p:cNvSpPr/>
+          <p:nvPr/>
+        </p:nvSpPr>
+        <p:spPr>
+          <a:xfrm>
+            <a:off x="1143000" y="2743200"/>
+            <a:ext cx="4754880" cy="365760"/>
+          </a:xfrm>
+          <a:prstGeom prst="rect">
+            <a:avLst/>
+          </a:prstGeom>
+          <a:noFill/>
+          <a:ln/>
+        </p:spPr>
+        <p:txBody>
+          <a:bodyPr wrap="square" rtlCol="0" anchor="ctr"/>
+          <a:lstStyle/>
+          <a:p>
+            <a:pPr indent="0" marL="0">
+              <a:buNone/>
+            </a:pPr>
+            <a:r>
+              <a:rPr lang="en-US" sz="1500" dirty="0">
+                <a:solidFill>
+                  <a:srgbClr val="F4F6F8"/>
+                </a:solidFill>
+                <a:latin typeface="Arial" pitchFamily="34" charset="0"/>
+                <a:ea typeface="Arial" pitchFamily="34" charset="-122"/>
+                <a:cs typeface="Arial" pitchFamily="34" charset="-120"/>
+              </a:rPr>
+              <a:t>1st &amp; 2nd year engineering students</a:t>
+            </a:r>
+            <a:endParaRPr lang="en-US" sz="1500" dirty="0"/>
+          </a:p>
+        </p:txBody>
+      </p:sp>
+      <p:sp>
+        <p:nvSpPr>
+          <p:cNvPr id="24" name="Shape 22"/>
+          <p:cNvSpPr/>
+          <p:nvPr/>
+        </p:nvSpPr>
+        <p:spPr>
+          <a:xfrm>
+            <a:off x="822960" y="3383280"/>
+            <a:ext cx="164592" cy="164592"/>
+          </a:xfrm>
+          <a:prstGeom prst="rect">
+            <a:avLst/>
+          </a:prstGeom>
+          <a:solidFill>
+            <a:srgbClr val="FF2D2D"/>
+          </a:solidFill>
+          <a:ln/>
+        </p:spPr>
+      </p:sp>
+      <p:sp>
+        <p:nvSpPr>
+          <p:cNvPr id="25" name="Text 23"/>
+          <p:cNvSpPr/>
+          <p:nvPr/>
+        </p:nvSpPr>
+        <p:spPr>
+          <a:xfrm>
+            <a:off x="1143000" y="3310128"/>
+            <a:ext cx="4754880" cy="365760"/>
+          </a:xfrm>
+          <a:prstGeom prst="rect">
+            <a:avLst/>
+          </a:prstGeom>
+          <a:noFill/>
+          <a:ln/>
+        </p:spPr>
+        <p:txBody>
+          <a:bodyPr wrap="square" rtlCol="0" anchor="ctr"/>
+          <a:lstStyle/>
+          <a:p>
+            <a:pPr indent="0" marL="0">
+              <a:buNone/>
+            </a:pPr>
+            <a:r>
+              <a:rPr lang="en-US" sz="1500" dirty="0">
+                <a:solidFill>
+                  <a:srgbClr val="F4F6F8"/>
+                </a:solidFill>
+                <a:latin typeface="Arial" pitchFamily="34" charset="0"/>
+                <a:ea typeface="Arial" pitchFamily="34" charset="-122"/>
+                <a:cs typeface="Arial" pitchFamily="34" charset="-120"/>
+              </a:rPr>
+              <a:t>Self-taught makers &amp; hobbyists</a:t>
+            </a:r>
+            <a:endParaRPr lang="en-US" sz="1500" dirty="0"/>
+          </a:p>
+        </p:txBody>
+      </p:sp>
+      <p:sp>
+        <p:nvSpPr>
+          <p:cNvPr id="26" name="Shape 24"/>
+          <p:cNvSpPr/>
+          <p:nvPr/>
+        </p:nvSpPr>
+        <p:spPr>
+          <a:xfrm>
+            <a:off x="822960" y="3950208"/>
+            <a:ext cx="164592" cy="164592"/>
+          </a:xfrm>
+          <a:prstGeom prst="rect">
+            <a:avLst/>
+          </a:prstGeom>
+          <a:solidFill>
+            <a:srgbClr val="FF2D2D"/>
+          </a:solidFill>
+          <a:ln/>
+        </p:spPr>
+      </p:sp>
+      <p:sp>
+        <p:nvSpPr>
+          <p:cNvPr id="27" name="Text 25"/>
+          <p:cNvSpPr/>
+          <p:nvPr/>
+        </p:nvSpPr>
+        <p:spPr>
+          <a:xfrm>
+            <a:off x="1143000" y="3877056"/>
+            <a:ext cx="4754880" cy="365760"/>
+          </a:xfrm>
+          <a:prstGeom prst="rect">
+            <a:avLst/>
+          </a:prstGeom>
+          <a:noFill/>
+          <a:ln/>
+        </p:spPr>
+        <p:txBody>
+          <a:bodyPr wrap="square" rtlCol="0" anchor="ctr"/>
+          <a:lstStyle/>
+          <a:p>
+            <a:pPr indent="0" marL="0">
+              <a:buNone/>
+            </a:pPr>
+            <a:r>
+              <a:rPr lang="en-US" sz="1500" dirty="0">
+                <a:solidFill>
+                  <a:srgbClr val="F4F6F8"/>
+                </a:solidFill>
+                <a:latin typeface="Arial" pitchFamily="34" charset="0"/>
+                <a:ea typeface="Arial" pitchFamily="34" charset="-122"/>
+                <a:cs typeface="Arial" pitchFamily="34" charset="-120"/>
+              </a:rPr>
+              <a:t>Classrooms without lab budgets</a:t>
+            </a:r>
+            <a:endParaRPr lang="en-US" sz="1500" dirty="0"/>
+          </a:p>
+        </p:txBody>
+      </p:sp>
+      <p:sp>
+        <p:nvSpPr>
+          <p:cNvPr id="28" name="Shape 26"/>
+          <p:cNvSpPr/>
+          <p:nvPr/>
+        </p:nvSpPr>
+        <p:spPr>
+          <a:xfrm>
+            <a:off x="822960" y="4517136"/>
+            <a:ext cx="164592" cy="164592"/>
+          </a:xfrm>
+          <a:prstGeom prst="rect">
+            <a:avLst/>
+          </a:prstGeom>
+          <a:solidFill>
+            <a:srgbClr val="FF2D2D"/>
+          </a:solidFill>
+          <a:ln/>
+        </p:spPr>
+      </p:sp>
+      <p:sp>
+        <p:nvSpPr>
+          <p:cNvPr id="29" name="Text 27"/>
+          <p:cNvSpPr/>
+          <p:nvPr/>
+        </p:nvSpPr>
+        <p:spPr>
+          <a:xfrm>
+            <a:off x="1143000" y="4443984"/>
+            <a:ext cx="4754880" cy="365760"/>
+          </a:xfrm>
+          <a:prstGeom prst="rect">
+            <a:avLst/>
+          </a:prstGeom>
+          <a:noFill/>
+          <a:ln/>
+        </p:spPr>
+        <p:txBody>
+          <a:bodyPr wrap="square" rtlCol="0" anchor="ctr"/>
+          <a:lstStyle/>
+          <a:p>
+            <a:pPr indent="0" marL="0">
+              <a:buNone/>
+            </a:pPr>
+            <a:r>
+              <a:rPr lang="en-US" sz="1500" dirty="0">
+                <a:solidFill>
+                  <a:srgbClr val="F4F6F8"/>
+                </a:solidFill>
+                <a:latin typeface="Arial" pitchFamily="34" charset="0"/>
+                <a:ea typeface="Arial" pitchFamily="34" charset="-122"/>
+                <a:cs typeface="Arial" pitchFamily="34" charset="-120"/>
+              </a:rPr>
+              <a:t>Anyone intimidated by real hardware</a:t>
+            </a:r>
+            <a:endParaRPr lang="en-US" sz="1500" dirty="0"/>
+          </a:p>
+        </p:txBody>
+      </p:sp>
+      <p:sp>
+        <p:nvSpPr>
+          <p:cNvPr id="30" name="Shape 28"/>
+          <p:cNvSpPr/>
+          <p:nvPr/>
+        </p:nvSpPr>
+        <p:spPr>
+          <a:xfrm>
+            <a:off x="6492240" y="2331720"/>
+            <a:ext cx="4873752" cy="960120"/>
+          </a:xfrm>
+          <a:prstGeom prst="roundRect">
+            <a:avLst>
+              <a:gd name="adj" fmla="val 5714"/>
+            </a:avLst>
+          </a:prstGeom>
+          <a:solidFill>
+            <a:srgbClr val="121417"/>
+          </a:solidFill>
+          <a:ln w="12700">
+            <a:solidFill>
+              <a:srgbClr val="2A2D33"/>
+            </a:solidFill>
+            <a:prstDash val="solid"/>
+          </a:ln>
+        </p:spPr>
+      </p:sp>
+      <p:sp>
+        <p:nvSpPr>
+          <p:cNvPr id="31" name="Shape 29"/>
+          <p:cNvSpPr/>
+          <p:nvPr/>
+        </p:nvSpPr>
+        <p:spPr>
+          <a:xfrm>
+            <a:off x="6720840" y="2331720"/>
+            <a:ext cx="4416552" cy="27432"/>
+          </a:xfrm>
+          <a:prstGeom prst="rect">
+            <a:avLst/>
+          </a:prstGeom>
+          <a:solidFill>
+            <a:srgbClr val="8A6A4E"/>
+          </a:solidFill>
+          <a:ln/>
+        </p:spPr>
+      </p:sp>
+      <p:sp>
+        <p:nvSpPr>
+          <p:cNvPr id="32" name="Text 30"/>
+          <p:cNvSpPr/>
+          <p:nvPr/>
+        </p:nvSpPr>
+        <p:spPr>
+          <a:xfrm>
+            <a:off x="6766560" y="2441448"/>
+            <a:ext cx="2011680" cy="731520"/>
+          </a:xfrm>
+          <a:prstGeom prst="rect">
+            <a:avLst/>
+          </a:prstGeom>
+          <a:noFill/>
+          <a:ln/>
+        </p:spPr>
+        <p:txBody>
+          <a:bodyPr wrap="square" rtlCol="0" anchor="ctr"/>
+          <a:lstStyle/>
+          <a:p>
+            <a:pPr indent="0" marL="0">
+              <a:buNone/>
+            </a:pPr>
+            <a:r>
+              <a:rPr lang="en-US" sz="3400" b="1" dirty="0">
+                <a:solidFill>
+                  <a:srgbClr val="FF2D2D"/>
+                </a:solidFill>
+                <a:latin typeface="Arial" pitchFamily="34" charset="0"/>
+                <a:ea typeface="Arial" pitchFamily="34" charset="-122"/>
+                <a:cs typeface="Arial" pitchFamily="34" charset="-120"/>
+              </a:rPr>
+              <a:t>$0</a:t>
+            </a:r>
+            <a:endParaRPr lang="en-US" sz="3400" dirty="0"/>
+          </a:p>
+        </p:txBody>
+      </p:sp>
+      <p:sp>
+        <p:nvSpPr>
+          <p:cNvPr id="33" name="Text 31"/>
+          <p:cNvSpPr/>
+          <p:nvPr/>
+        </p:nvSpPr>
+        <p:spPr>
+          <a:xfrm>
+            <a:off x="8869680" y="2331720"/>
+            <a:ext cx="2221992" cy="960120"/>
+          </a:xfrm>
+          <a:prstGeom prst="rect">
+            <a:avLst/>
+          </a:prstGeom>
+          <a:noFill/>
+          <a:ln/>
+        </p:spPr>
+        <p:txBody>
+          <a:bodyPr wrap="square" rtlCol="0" anchor="ctr"/>
+          <a:lstStyle/>
+          <a:p>
+            <a:pPr indent="0" marL="0">
+              <a:buNone/>
+            </a:pPr>
+            <a:r>
+              <a:rPr lang="en-US" sz="1400" dirty="0">
+                <a:solidFill>
+                  <a:srgbClr val="A9B2BD"/>
+                </a:solidFill>
+                <a:latin typeface="Arial" pitchFamily="34" charset="0"/>
+                <a:ea typeface="Arial" pitchFamily="34" charset="-122"/>
+                <a:cs typeface="Arial" pitchFamily="34" charset="-120"/>
+              </a:rPr>
+              <a:t>hardware cost to start learning</a:t>
+            </a:r>
+            <a:endParaRPr lang="en-US" sz="1400" dirty="0"/>
+          </a:p>
+        </p:txBody>
+      </p:sp>
+      <p:sp>
+        <p:nvSpPr>
+          <p:cNvPr id="34" name="Shape 32"/>
+          <p:cNvSpPr/>
+          <p:nvPr/>
+        </p:nvSpPr>
+        <p:spPr>
+          <a:xfrm>
+            <a:off x="6492240" y="3474720"/>
+            <a:ext cx="4873752" cy="960120"/>
+          </a:xfrm>
+          <a:prstGeom prst="roundRect">
+            <a:avLst>
+              <a:gd name="adj" fmla="val 5714"/>
+            </a:avLst>
+          </a:prstGeom>
+          <a:solidFill>
+            <a:srgbClr val="121417"/>
+          </a:solidFill>
+          <a:ln w="12700">
+            <a:solidFill>
+              <a:srgbClr val="2A2D33"/>
+            </a:solidFill>
+            <a:prstDash val="solid"/>
+          </a:ln>
+        </p:spPr>
+      </p:sp>
+      <p:sp>
+        <p:nvSpPr>
+          <p:cNvPr id="35" name="Shape 33"/>
+          <p:cNvSpPr/>
+          <p:nvPr/>
+        </p:nvSpPr>
+        <p:spPr>
+          <a:xfrm>
+            <a:off x="6720840" y="3474720"/>
+            <a:ext cx="4416552" cy="27432"/>
+          </a:xfrm>
+          <a:prstGeom prst="rect">
+            <a:avLst/>
+          </a:prstGeom>
+          <a:solidFill>
+            <a:srgbClr val="8A6A4E"/>
+          </a:solidFill>
+          <a:ln/>
+        </p:spPr>
+      </p:sp>
+      <p:sp>
+        <p:nvSpPr>
+          <p:cNvPr id="36" name="Text 34"/>
+          <p:cNvSpPr/>
+          <p:nvPr/>
+        </p:nvSpPr>
+        <p:spPr>
+          <a:xfrm>
+            <a:off x="6766560" y="3584448"/>
+            <a:ext cx="2011680" cy="731520"/>
+          </a:xfrm>
+          <a:prstGeom prst="rect">
+            <a:avLst/>
+          </a:prstGeom>
+          <a:noFill/>
+          <a:ln/>
+        </p:spPr>
+        <p:txBody>
+          <a:bodyPr wrap="square" rtlCol="0" anchor="ctr"/>
+          <a:lstStyle/>
+          <a:p>
+            <a:pPr indent="0" marL="0">
+              <a:buNone/>
+            </a:pPr>
+            <a:r>
+              <a:rPr lang="en-US" sz="3400" b="1" dirty="0">
+                <a:solidFill>
+                  <a:srgbClr val="FF2D2D"/>
+                </a:solidFill>
+                <a:latin typeface="Arial" pitchFamily="34" charset="0"/>
+                <a:ea typeface="Arial" pitchFamily="34" charset="-122"/>
+                <a:cs typeface="Arial" pitchFamily="34" charset="-120"/>
+              </a:rPr>
+              <a:t>0</a:t>
+            </a:r>
+            <a:endParaRPr lang="en-US" sz="3400" dirty="0"/>
+          </a:p>
+        </p:txBody>
+      </p:sp>
+      <p:sp>
+        <p:nvSpPr>
+          <p:cNvPr id="37" name="Text 35"/>
+          <p:cNvSpPr/>
+          <p:nvPr/>
+        </p:nvSpPr>
+        <p:spPr>
+          <a:xfrm>
+            <a:off x="8869680" y="3474720"/>
+            <a:ext cx="2221992" cy="960120"/>
+          </a:xfrm>
+          <a:prstGeom prst="rect">
+            <a:avLst/>
+          </a:prstGeom>
+          <a:noFill/>
+          <a:ln/>
+        </p:spPr>
+        <p:txBody>
+          <a:bodyPr wrap="square" rtlCol="0" anchor="ctr"/>
+          <a:lstStyle/>
+          <a:p>
+            <a:pPr indent="0" marL="0">
+              <a:buNone/>
+            </a:pPr>
+            <a:r>
+              <a:rPr lang="en-US" sz="1400" dirty="0">
+                <a:solidFill>
+                  <a:srgbClr val="A9B2BD"/>
+                </a:solidFill>
+                <a:latin typeface="Arial" pitchFamily="34" charset="0"/>
+                <a:ea typeface="Arial" pitchFamily="34" charset="-122"/>
+                <a:cs typeface="Arial" pitchFamily="34" charset="-120"/>
+              </a:rPr>
+              <a:t>components damaged by mistakes</a:t>
+            </a:r>
+            <a:endParaRPr lang="en-US" sz="1400" dirty="0"/>
+          </a:p>
+        </p:txBody>
+      </p:sp>
+      <p:sp>
+        <p:nvSpPr>
+          <p:cNvPr id="38" name="Shape 36"/>
+          <p:cNvSpPr/>
+          <p:nvPr/>
+        </p:nvSpPr>
+        <p:spPr>
+          <a:xfrm>
+            <a:off x="6492240" y="4617720"/>
+            <a:ext cx="4873752" cy="960120"/>
+          </a:xfrm>
+          <a:prstGeom prst="roundRect">
+            <a:avLst>
+              <a:gd name="adj" fmla="val 5714"/>
+            </a:avLst>
+          </a:prstGeom>
+          <a:solidFill>
+            <a:srgbClr val="121417"/>
+          </a:solidFill>
+          <a:ln w="12700">
+            <a:solidFill>
+              <a:srgbClr val="2A2D33"/>
+            </a:solidFill>
+            <a:prstDash val="solid"/>
+          </a:ln>
+        </p:spPr>
+      </p:sp>
+      <p:sp>
+        <p:nvSpPr>
+          <p:cNvPr id="39" name="Shape 37"/>
+          <p:cNvSpPr/>
+          <p:nvPr/>
+        </p:nvSpPr>
+        <p:spPr>
+          <a:xfrm>
+            <a:off x="6720840" y="4617720"/>
+            <a:ext cx="4416552" cy="27432"/>
+          </a:xfrm>
+          <a:prstGeom prst="rect">
+            <a:avLst/>
+          </a:prstGeom>
+          <a:solidFill>
+            <a:srgbClr val="8A6A4E"/>
+          </a:solidFill>
+          <a:ln/>
+        </p:spPr>
+      </p:sp>
+      <p:sp>
+        <p:nvSpPr>
+          <p:cNvPr id="40" name="Text 38"/>
+          <p:cNvSpPr/>
+          <p:nvPr/>
+        </p:nvSpPr>
+        <p:spPr>
+          <a:xfrm>
+            <a:off x="6766560" y="4727448"/>
+            <a:ext cx="2011680" cy="731520"/>
+          </a:xfrm>
+          <a:prstGeom prst="rect">
+            <a:avLst/>
+          </a:prstGeom>
+          <a:noFill/>
+          <a:ln/>
+        </p:spPr>
+        <p:txBody>
+          <a:bodyPr wrap="square" rtlCol="0" anchor="ctr"/>
+          <a:lstStyle/>
+          <a:p>
+            <a:pPr indent="0" marL="0">
+              <a:buNone/>
+            </a:pPr>
+            <a:r>
+              <a:rPr lang="en-US" sz="3400" b="1" dirty="0">
+                <a:solidFill>
+                  <a:srgbClr val="FF2D2D"/>
+                </a:solidFill>
+                <a:latin typeface="Arial" pitchFamily="34" charset="0"/>
+                <a:ea typeface="Arial" pitchFamily="34" charset="-122"/>
+                <a:cs typeface="Arial" pitchFamily="34" charset="-120"/>
+              </a:rPr>
+              <a:t>Instant</a:t>
+            </a:r>
+            <a:endParaRPr lang="en-US" sz="3400" dirty="0"/>
+          </a:p>
+        </p:txBody>
+      </p:sp>
+      <p:sp>
+        <p:nvSpPr>
+          <p:cNvPr id="41" name="Text 39"/>
+          <p:cNvSpPr/>
+          <p:nvPr/>
+        </p:nvSpPr>
+        <p:spPr>
+          <a:xfrm>
+            <a:off x="8869680" y="4617720"/>
+            <a:ext cx="2221992" cy="960120"/>
+          </a:xfrm>
+          <a:prstGeom prst="rect">
+            <a:avLst/>
+          </a:prstGeom>
+          <a:noFill/>
+          <a:ln/>
+        </p:spPr>
+        <p:txBody>
+          <a:bodyPr wrap="square" rtlCol="0" anchor="ctr"/>
+          <a:lstStyle/>
+          <a:p>
+            <a:pPr indent="0" marL="0">
+              <a:buNone/>
+            </a:pPr>
+            <a:r>
+              <a:rPr lang="en-US" sz="1400" dirty="0">
+                <a:solidFill>
+                  <a:srgbClr val="A9B2BD"/>
+                </a:solidFill>
+                <a:latin typeface="Arial" pitchFamily="34" charset="0"/>
+                <a:ea typeface="Arial" pitchFamily="34" charset="-122"/>
+                <a:cs typeface="Arial" pitchFamily="34" charset="-120"/>
+              </a:rPr>
+              <a:t>feedback the moment you wire</a:t>
+            </a:r>
+            <a:endParaRPr lang="en-US" sz="1400" dirty="0"/>
+          </a:p>
+        </p:txBody>
+      </p:sp>
+    </p:spTree>
+  </p:cSld>
+  <p:clrMapOvr>
+    <a:masterClrMapping/>
+  </p:clrMapOvr>
+</p:sld>
+</file>
+
+<file path=ppt/slides/slide11.xml><?xml version="1.0" encoding="utf-8"?>
+<p:sld xmlns:a="http://schemas.openxmlformats.org/drawingml/2006/main" xmlns:r="http://schemas.openxmlformats.org/officeDocument/2006/relationships" xmlns:p="http://schemas.openxmlformats.org/presentationml/2006/main">
+  <p:cSld name="Slide 11">
+    <p:bg>
+      <p:bgPr>
+        <a:solidFill>
+          <a:srgbClr val="0B0D0F"/>
+        </a:solidFill>
+      </p:bgPr>
+    </p:bg>
+    <p:spTree>
+      <p:nvGrpSpPr>
+        <p:cNvPr id="1" name=""/>
+        <p:cNvGrpSpPr/>
+        <p:nvPr/>
+      </p:nvGrpSpPr>
+      <p:grpSpPr>
+        <a:xfrm>
+          <a:off x="0" y="0"/>
+          <a:ext cx="0" cy="0"/>
+          <a:chOff x="0" y="0"/>
+          <a:chExt cx="0" cy="0"/>
+        </a:xfrm>
+      </p:grpSpPr>
+      <p:sp>
+        <p:nvSpPr>
+          <p:cNvPr id="2" name="Shape 0"/>
+          <p:cNvSpPr/>
+          <p:nvPr/>
+        </p:nvSpPr>
+        <p:spPr>
+          <a:xfrm>
+            <a:off x="937612" y="0"/>
+            <a:ext cx="0" cy="6858000"/>
+          </a:xfrm>
+          <a:prstGeom prst="line">
+            <a:avLst/>
+          </a:prstGeom>
+          <a:noFill/>
+          <a:ln w="6350">
+            <a:solidFill>
+              <a:srgbClr val="191B1F"/>
+            </a:solidFill>
+            <a:prstDash val="solid"/>
+          </a:ln>
+        </p:spPr>
+      </p:sp>
+      <p:sp>
+        <p:nvSpPr>
+          <p:cNvPr id="3" name="Shape 1"/>
+          <p:cNvSpPr/>
+          <p:nvPr/>
+        </p:nvSpPr>
+        <p:spPr>
+          <a:xfrm>
+            <a:off x="1875223" y="0"/>
+            <a:ext cx="0" cy="6858000"/>
+          </a:xfrm>
+          <a:prstGeom prst="line">
+            <a:avLst/>
+          </a:prstGeom>
+          <a:noFill/>
+          <a:ln w="6350">
+            <a:solidFill>
+              <a:srgbClr val="191B1F"/>
+            </a:solidFill>
+            <a:prstDash val="solid"/>
+          </a:ln>
+        </p:spPr>
+      </p:sp>
+      <p:sp>
+        <p:nvSpPr>
+          <p:cNvPr id="4" name="Shape 2"/>
+          <p:cNvSpPr/>
+          <p:nvPr/>
+        </p:nvSpPr>
+        <p:spPr>
+          <a:xfrm>
+            <a:off x="2812835" y="0"/>
+            <a:ext cx="0" cy="6858000"/>
+          </a:xfrm>
+          <a:prstGeom prst="line">
+            <a:avLst/>
+          </a:prstGeom>
+          <a:noFill/>
+          <a:ln w="6350">
+            <a:solidFill>
+              <a:srgbClr val="191B1F"/>
+            </a:solidFill>
+            <a:prstDash val="solid"/>
+          </a:ln>
+        </p:spPr>
+      </p:sp>
+      <p:sp>
+        <p:nvSpPr>
+          <p:cNvPr id="5" name="Shape 3"/>
+          <p:cNvSpPr/>
+          <p:nvPr/>
+        </p:nvSpPr>
+        <p:spPr>
+          <a:xfrm>
+            <a:off x="3750447" y="0"/>
+            <a:ext cx="0" cy="6858000"/>
+          </a:xfrm>
+          <a:prstGeom prst="line">
+            <a:avLst/>
+          </a:prstGeom>
+          <a:noFill/>
+          <a:ln w="6350">
+            <a:solidFill>
+              <a:srgbClr val="191B1F"/>
+            </a:solidFill>
+            <a:prstDash val="solid"/>
+          </a:ln>
+        </p:spPr>
+      </p:sp>
+      <p:sp>
+        <p:nvSpPr>
+          <p:cNvPr id="6" name="Shape 4"/>
+          <p:cNvSpPr/>
+          <p:nvPr/>
+        </p:nvSpPr>
+        <p:spPr>
+          <a:xfrm>
+            <a:off x="4688058" y="0"/>
+            <a:ext cx="0" cy="6858000"/>
+          </a:xfrm>
+          <a:prstGeom prst="line">
+            <a:avLst/>
+          </a:prstGeom>
+          <a:noFill/>
+          <a:ln w="6350">
+            <a:solidFill>
+              <a:srgbClr val="191B1F"/>
+            </a:solidFill>
+            <a:prstDash val="solid"/>
+          </a:ln>
+        </p:spPr>
+      </p:sp>
+      <p:sp>
+        <p:nvSpPr>
+          <p:cNvPr id="7" name="Shape 5"/>
+          <p:cNvSpPr/>
+          <p:nvPr/>
+        </p:nvSpPr>
+        <p:spPr>
+          <a:xfrm>
+            <a:off x="5625670" y="0"/>
+            <a:ext cx="0" cy="6858000"/>
+          </a:xfrm>
+          <a:prstGeom prst="line">
+            <a:avLst/>
+          </a:prstGeom>
+          <a:noFill/>
+          <a:ln w="6350">
+            <a:solidFill>
+              <a:srgbClr val="191B1F"/>
+            </a:solidFill>
+            <a:prstDash val="solid"/>
+          </a:ln>
+        </p:spPr>
+      </p:sp>
+      <p:sp>
+        <p:nvSpPr>
+          <p:cNvPr id="8" name="Shape 6"/>
+          <p:cNvSpPr/>
+          <p:nvPr/>
+        </p:nvSpPr>
+        <p:spPr>
+          <a:xfrm>
+            <a:off x="6563282" y="0"/>
+            <a:ext cx="0" cy="6858000"/>
+          </a:xfrm>
+          <a:prstGeom prst="line">
+            <a:avLst/>
+          </a:prstGeom>
+          <a:noFill/>
+          <a:ln w="6350">
+            <a:solidFill>
+              <a:srgbClr val="191B1F"/>
+            </a:solidFill>
+            <a:prstDash val="solid"/>
+          </a:ln>
+        </p:spPr>
+      </p:sp>
+      <p:sp>
+        <p:nvSpPr>
+          <p:cNvPr id="9" name="Shape 7"/>
+          <p:cNvSpPr/>
+          <p:nvPr/>
+        </p:nvSpPr>
+        <p:spPr>
+          <a:xfrm>
+            <a:off x="7500894" y="0"/>
+            <a:ext cx="0" cy="6858000"/>
+          </a:xfrm>
+          <a:prstGeom prst="line">
+            <a:avLst/>
+          </a:prstGeom>
+          <a:noFill/>
+          <a:ln w="6350">
+            <a:solidFill>
+              <a:srgbClr val="191B1F"/>
+            </a:solidFill>
+            <a:prstDash val="solid"/>
+          </a:ln>
+        </p:spPr>
+      </p:sp>
+      <p:sp>
+        <p:nvSpPr>
+          <p:cNvPr id="10" name="Shape 8"/>
+          <p:cNvSpPr/>
+          <p:nvPr/>
+        </p:nvSpPr>
+        <p:spPr>
+          <a:xfrm>
+            <a:off x="8438505" y="0"/>
+            <a:ext cx="0" cy="6858000"/>
+          </a:xfrm>
+          <a:prstGeom prst="line">
+            <a:avLst/>
+          </a:prstGeom>
+          <a:noFill/>
+          <a:ln w="6350">
+            <a:solidFill>
+              <a:srgbClr val="191B1F"/>
+            </a:solidFill>
+            <a:prstDash val="solid"/>
+          </a:ln>
+        </p:spPr>
+      </p:sp>
+      <p:sp>
+        <p:nvSpPr>
+          <p:cNvPr id="11" name="Shape 9"/>
+          <p:cNvSpPr/>
+          <p:nvPr/>
+        </p:nvSpPr>
+        <p:spPr>
+          <a:xfrm>
+            <a:off x="9376117" y="0"/>
+            <a:ext cx="0" cy="6858000"/>
+          </a:xfrm>
+          <a:prstGeom prst="line">
+            <a:avLst/>
+          </a:prstGeom>
+          <a:noFill/>
+          <a:ln w="6350">
+            <a:solidFill>
+              <a:srgbClr val="191B1F"/>
+            </a:solidFill>
+            <a:prstDash val="solid"/>
+          </a:ln>
+        </p:spPr>
+      </p:sp>
+      <p:sp>
+        <p:nvSpPr>
+          <p:cNvPr id="12" name="Shape 10"/>
+          <p:cNvSpPr/>
+          <p:nvPr/>
+        </p:nvSpPr>
+        <p:spPr>
+          <a:xfrm>
+            <a:off x="10313729" y="0"/>
+            <a:ext cx="0" cy="6858000"/>
+          </a:xfrm>
+          <a:prstGeom prst="line">
+            <a:avLst/>
+          </a:prstGeom>
+          <a:noFill/>
+          <a:ln w="6350">
+            <a:solidFill>
+              <a:srgbClr val="191B1F"/>
+            </a:solidFill>
+            <a:prstDash val="solid"/>
+          </a:ln>
+        </p:spPr>
+      </p:sp>
+      <p:sp>
+        <p:nvSpPr>
+          <p:cNvPr id="13" name="Shape 11"/>
+          <p:cNvSpPr/>
+          <p:nvPr/>
+        </p:nvSpPr>
+        <p:spPr>
+          <a:xfrm>
+            <a:off x="11251340" y="0"/>
+            <a:ext cx="0" cy="6858000"/>
+          </a:xfrm>
+          <a:prstGeom prst="line">
+            <a:avLst/>
+          </a:prstGeom>
+          <a:noFill/>
+          <a:ln w="6350">
+            <a:solidFill>
+              <a:srgbClr val="191B1F"/>
+            </a:solidFill>
+            <a:prstDash val="solid"/>
+          </a:ln>
+        </p:spPr>
+      </p:sp>
+      <p:sp>
+        <p:nvSpPr>
+          <p:cNvPr id="14" name="Shape 12"/>
+          <p:cNvSpPr/>
+          <p:nvPr/>
+        </p:nvSpPr>
+        <p:spPr>
+          <a:xfrm>
+            <a:off x="0" y="0"/>
+            <a:ext cx="12188952" cy="82296"/>
+          </a:xfrm>
+          <a:prstGeom prst="rect">
+            <a:avLst/>
+          </a:prstGeom>
+          <a:solidFill>
+            <a:srgbClr val="FF2D2D"/>
+          </a:solidFill>
+          <a:ln/>
+        </p:spPr>
+      </p:sp>
+      <p:sp>
+        <p:nvSpPr>
+          <p:cNvPr id="15" name="Shape 13"/>
+          <p:cNvSpPr/>
+          <p:nvPr/>
+        </p:nvSpPr>
+        <p:spPr>
+          <a:xfrm>
+            <a:off x="0" y="82296"/>
+            <a:ext cx="12188952" cy="18288"/>
+          </a:xfrm>
+          <a:prstGeom prst="rect">
+            <a:avLst/>
+          </a:prstGeom>
+          <a:solidFill>
+            <a:srgbClr val="7A1210"/>
+          </a:solidFill>
+          <a:ln/>
+        </p:spPr>
+      </p:sp>
+      <p:sp>
+        <p:nvSpPr>
+          <p:cNvPr id="16" name="Text 14"/>
+          <p:cNvSpPr/>
+          <p:nvPr/>
+        </p:nvSpPr>
+        <p:spPr>
+          <a:xfrm>
+            <a:off x="822960" y="6400800"/>
+            <a:ext cx="2743200" cy="274320"/>
+          </a:xfrm>
+          <a:prstGeom prst="rect">
+            <a:avLst/>
+          </a:prstGeom>
+          <a:noFill/>
+          <a:ln/>
+        </p:spPr>
+        <p:txBody>
+          <a:bodyPr wrap="square" rtlCol="0" anchor="ctr"/>
+          <a:lstStyle/>
+          <a:p>
+            <a:pPr algn="l" indent="0" marL="0">
+              <a:buNone/>
+            </a:pPr>
+            <a:r>
+              <a:rPr lang="en-US" sz="900" spc="200" kern="0" dirty="0">
+                <a:solidFill>
+                  <a:srgbClr val="6B7480"/>
+                </a:solidFill>
+                <a:latin typeface="Consolas" pitchFamily="34" charset="0"/>
+                <a:ea typeface="Consolas" pitchFamily="34" charset="-122"/>
+                <a:cs typeface="Consolas" pitchFamily="34" charset="-120"/>
+              </a:rPr>
+              <a:t>YANTRAA</a:t>
+            </a:r>
+            <a:endParaRPr lang="en-US" sz="900" dirty="0"/>
+          </a:p>
+        </p:txBody>
+      </p:sp>
+      <p:sp>
+        <p:nvSpPr>
+          <p:cNvPr id="17" name="Text 15"/>
+          <p:cNvSpPr/>
+          <p:nvPr/>
+        </p:nvSpPr>
+        <p:spPr>
+          <a:xfrm>
+            <a:off x="3351276" y="6400800"/>
+            <a:ext cx="5486400" cy="274320"/>
+          </a:xfrm>
+          <a:prstGeom prst="rect">
+            <a:avLst/>
+          </a:prstGeom>
+          <a:noFill/>
+          <a:ln/>
+        </p:spPr>
+        <p:txBody>
+          <a:bodyPr wrap="square" rtlCol="0" anchor="ctr"/>
+          <a:lstStyle/>
+          <a:p>
+            <a:pPr algn="ctr" indent="0" marL="0">
+              <a:buNone/>
+            </a:pPr>
+            <a:r>
+              <a:rPr lang="en-US" sz="900" spc="200" kern="0" dirty="0">
+                <a:solidFill>
+                  <a:srgbClr val="6B7480"/>
+                </a:solidFill>
+                <a:latin typeface="Consolas" pitchFamily="34" charset="0"/>
+                <a:ea typeface="Consolas" pitchFamily="34" charset="-122"/>
+                <a:cs typeface="Consolas" pitchFamily="34" charset="-120"/>
+              </a:rPr>
+              <a:t>LEARN ELECTRONICS IN 3D</a:t>
+            </a:r>
+            <a:endParaRPr lang="en-US" sz="900" dirty="0"/>
+          </a:p>
+        </p:txBody>
+      </p:sp>
+      <p:sp>
+        <p:nvSpPr>
+          <p:cNvPr id="18" name="Text 16"/>
+          <p:cNvSpPr/>
+          <p:nvPr/>
+        </p:nvSpPr>
+        <p:spPr>
+          <a:xfrm>
+            <a:off x="9994392" y="6400800"/>
+            <a:ext cx="1371600" cy="274320"/>
+          </a:xfrm>
+          <a:prstGeom prst="rect">
+            <a:avLst/>
+          </a:prstGeom>
+          <a:noFill/>
+          <a:ln/>
+        </p:spPr>
+        <p:txBody>
+          <a:bodyPr wrap="square" rtlCol="0" anchor="ctr"/>
+          <a:lstStyle/>
+          <a:p>
+            <a:pPr algn="r" indent="0" marL="0">
+              <a:buNone/>
+            </a:pPr>
+            <a:r>
+              <a:rPr lang="en-US" sz="900" spc="200" kern="0" dirty="0">
+                <a:solidFill>
+                  <a:srgbClr val="FF2D2D"/>
+                </a:solidFill>
+                <a:latin typeface="Consolas" pitchFamily="34" charset="0"/>
+                <a:ea typeface="Consolas" pitchFamily="34" charset="-122"/>
+                <a:cs typeface="Consolas" pitchFamily="34" charset="-120"/>
+              </a:rPr>
+              <a:t>11</a:t>
+            </a:r>
+            <a:endParaRPr lang="en-US" sz="900" dirty="0"/>
+          </a:p>
+        </p:txBody>
+      </p:sp>
+      <p:sp>
+        <p:nvSpPr>
+          <p:cNvPr id="19" name="Text 17"/>
+          <p:cNvSpPr/>
+          <p:nvPr/>
+        </p:nvSpPr>
+        <p:spPr>
+          <a:xfrm>
+            <a:off x="822960" y="640080"/>
+            <a:ext cx="7315200" cy="292608"/>
+          </a:xfrm>
+          <a:prstGeom prst="rect">
+            <a:avLst/>
+          </a:prstGeom>
+          <a:noFill/>
+          <a:ln/>
+        </p:spPr>
+        <p:txBody>
+          <a:bodyPr wrap="square" rtlCol="0" anchor="ctr"/>
+          <a:lstStyle/>
+          <a:p>
+            <a:pPr algn="l" indent="0" marL="0">
+              <a:buNone/>
+            </a:pPr>
+            <a:r>
+              <a:rPr lang="en-US" sz="1200" b="1" spc="300" kern="0" dirty="0">
+                <a:solidFill>
+                  <a:srgbClr val="FF2D2D"/>
+                </a:solidFill>
+                <a:latin typeface="Consolas" pitchFamily="34" charset="0"/>
+                <a:ea typeface="Consolas" pitchFamily="34" charset="-122"/>
+                <a:cs typeface="Consolas" pitchFamily="34" charset="-120"/>
+              </a:rPr>
+              <a:t>BUSINESS MODEL</a:t>
+            </a:r>
+            <a:endParaRPr lang="en-US" sz="1200" dirty="0"/>
+          </a:p>
+        </p:txBody>
+      </p:sp>
+      <p:sp>
+        <p:nvSpPr>
+          <p:cNvPr id="20" name="Text 18"/>
+          <p:cNvSpPr/>
+          <p:nvPr/>
+        </p:nvSpPr>
+        <p:spPr>
+          <a:xfrm>
+            <a:off x="822960" y="969264"/>
+            <a:ext cx="10543032" cy="914400"/>
+          </a:xfrm>
+          <a:prstGeom prst="rect">
+            <a:avLst/>
+          </a:prstGeom>
+          <a:noFill/>
+          <a:ln/>
+        </p:spPr>
+        <p:txBody>
+          <a:bodyPr wrap="square" rtlCol="0" anchor="ctr"/>
+          <a:lstStyle/>
+          <a:p>
+            <a:pPr algn="l" indent="0" marL="0">
+              <a:buNone/>
+            </a:pPr>
+            <a:r>
+              <a:rPr lang="en-US" sz="3400" b="1" dirty="0">
+                <a:solidFill>
+                  <a:srgbClr val="F4F6F8"/>
+                </a:solidFill>
+                <a:latin typeface="Arial" pitchFamily="34" charset="0"/>
+                <a:ea typeface="Arial" pitchFamily="34" charset="-122"/>
+                <a:cs typeface="Arial" pitchFamily="34" charset="-120"/>
+              </a:rPr>
+              <a:t>Free to learn, sustainable to grow</a:t>
+            </a:r>
+            <a:endParaRPr lang="en-US" sz="3400" dirty="0"/>
+          </a:p>
+        </p:txBody>
+      </p:sp>
+      <p:sp>
+        <p:nvSpPr>
+          <p:cNvPr id="21" name="Shape 19"/>
+          <p:cNvSpPr/>
+          <p:nvPr/>
+        </p:nvSpPr>
+        <p:spPr>
+          <a:xfrm>
+            <a:off x="822960" y="2377440"/>
+            <a:ext cx="3270504" cy="3200400"/>
+          </a:xfrm>
+          <a:prstGeom prst="roundRect">
+            <a:avLst>
+              <a:gd name="adj" fmla="val 1714"/>
+            </a:avLst>
+          </a:prstGeom>
+          <a:solidFill>
+            <a:srgbClr val="121417"/>
+          </a:solidFill>
+          <a:ln w="12700">
+            <a:solidFill>
+              <a:srgbClr val="2A2D33"/>
+            </a:solidFill>
+            <a:prstDash val="solid"/>
+          </a:ln>
+        </p:spPr>
+      </p:sp>
+      <p:sp>
+        <p:nvSpPr>
+          <p:cNvPr id="22" name="Shape 20"/>
+          <p:cNvSpPr/>
+          <p:nvPr/>
+        </p:nvSpPr>
+        <p:spPr>
+          <a:xfrm>
+            <a:off x="1051560" y="2377440"/>
+            <a:ext cx="2813304" cy="27432"/>
+          </a:xfrm>
+          <a:prstGeom prst="rect">
+            <a:avLst/>
+          </a:prstGeom>
+          <a:solidFill>
+            <a:srgbClr val="8A6A4E"/>
+          </a:solidFill>
+          <a:ln/>
+        </p:spPr>
+      </p:sp>
+      <p:sp>
+        <p:nvSpPr>
+          <p:cNvPr id="23" name="Text 21"/>
+          <p:cNvSpPr/>
+          <p:nvPr/>
+        </p:nvSpPr>
+        <p:spPr>
+          <a:xfrm>
+            <a:off x="1097280" y="2670048"/>
+            <a:ext cx="2721864" cy="457200"/>
+          </a:xfrm>
+          <a:prstGeom prst="rect">
+            <a:avLst/>
+          </a:prstGeom>
+          <a:noFill/>
+          <a:ln/>
+        </p:spPr>
+        <p:txBody>
+          <a:bodyPr wrap="square" rtlCol="0" anchor="ctr"/>
+          <a:lstStyle/>
+          <a:p>
+            <a:pPr indent="0" marL="0">
+              <a:buNone/>
+            </a:pPr>
+            <a:r>
+              <a:rPr lang="en-US" sz="2400" b="1" dirty="0">
+                <a:solidFill>
+                  <a:srgbClr val="F4F6F8"/>
+                </a:solidFill>
+                <a:latin typeface="Arial" pitchFamily="34" charset="0"/>
+                <a:ea typeface="Arial" pitchFamily="34" charset="-122"/>
+                <a:cs typeface="Arial" pitchFamily="34" charset="-120"/>
+              </a:rPr>
+              <a:t>FREE</a:t>
+            </a:r>
+            <a:endParaRPr lang="en-US" sz="2400" dirty="0"/>
+          </a:p>
+        </p:txBody>
+      </p:sp>
+      <p:sp>
+        <p:nvSpPr>
+          <p:cNvPr id="24" name="Text 22"/>
+          <p:cNvSpPr/>
+          <p:nvPr/>
+        </p:nvSpPr>
+        <p:spPr>
+          <a:xfrm>
+            <a:off x="1097280" y="3154680"/>
+            <a:ext cx="2721864" cy="320040"/>
+          </a:xfrm>
+          <a:prstGeom prst="rect">
+            <a:avLst/>
+          </a:prstGeom>
+          <a:noFill/>
+          <a:ln/>
+        </p:spPr>
+        <p:txBody>
+          <a:bodyPr wrap="square" rtlCol="0" anchor="ctr"/>
+          <a:lstStyle/>
+          <a:p>
+            <a:pPr indent="0" marL="0">
+              <a:buNone/>
+            </a:pPr>
+            <a:r>
+              <a:rPr lang="en-US" sz="1000" spc="100" kern="0" dirty="0">
+                <a:solidFill>
+                  <a:srgbClr val="A9B2BD"/>
+                </a:solidFill>
+                <a:latin typeface="Consolas" pitchFamily="34" charset="0"/>
+                <a:ea typeface="Consolas" pitchFamily="34" charset="-122"/>
+                <a:cs typeface="Consolas" pitchFamily="34" charset="-120"/>
+              </a:rPr>
+              <a:t>Students &amp; makers</a:t>
+            </a:r>
+            <a:endParaRPr lang="en-US" sz="1000" dirty="0"/>
+          </a:p>
+        </p:txBody>
+      </p:sp>
+      <p:sp>
+        <p:nvSpPr>
+          <p:cNvPr id="25" name="Shape 23"/>
+          <p:cNvSpPr/>
+          <p:nvPr/>
+        </p:nvSpPr>
+        <p:spPr>
+          <a:xfrm>
+            <a:off x="1097280" y="3566160"/>
+            <a:ext cx="2721864" cy="13716"/>
+          </a:xfrm>
+          <a:prstGeom prst="rect">
+            <a:avLst/>
+          </a:prstGeom>
+          <a:solidFill>
+            <a:srgbClr val="2A2D33"/>
+          </a:solidFill>
+          <a:ln/>
+        </p:spPr>
+      </p:sp>
+      <p:sp>
+        <p:nvSpPr>
+          <p:cNvPr id="26" name="Text 24"/>
+          <p:cNvSpPr/>
+          <p:nvPr/>
+        </p:nvSpPr>
+        <p:spPr>
+          <a:xfrm>
+            <a:off x="1097280" y="3794760"/>
+            <a:ext cx="274320" cy="320040"/>
+          </a:xfrm>
+          <a:prstGeom prst="rect">
+            <a:avLst/>
+          </a:prstGeom>
+          <a:noFill/>
+          <a:ln/>
+        </p:spPr>
+        <p:txBody>
+          <a:bodyPr wrap="square" rtlCol="0" anchor="ctr"/>
+          <a:lstStyle/>
+          <a:p>
+            <a:pPr indent="0" marL="0">
+              <a:buNone/>
+            </a:pPr>
+            <a:r>
+              <a:rPr lang="en-US" sz="1300" b="1" dirty="0">
+                <a:solidFill>
+                  <a:srgbClr val="2ECC71"/>
+                </a:solidFill>
+                <a:latin typeface="Arial" pitchFamily="34" charset="0"/>
+                <a:ea typeface="Arial" pitchFamily="34" charset="-122"/>
+                <a:cs typeface="Arial" pitchFamily="34" charset="-120"/>
+              </a:rPr>
+              <a:t>✓</a:t>
+            </a:r>
+            <a:endParaRPr lang="en-US" sz="1300" dirty="0"/>
+          </a:p>
+        </p:txBody>
+      </p:sp>
+      <p:sp>
+        <p:nvSpPr>
+          <p:cNvPr id="27" name="Text 25"/>
+          <p:cNvSpPr/>
+          <p:nvPr/>
+        </p:nvSpPr>
+        <p:spPr>
+          <a:xfrm>
+            <a:off x="1371600" y="3794760"/>
+            <a:ext cx="2493264" cy="457200"/>
+          </a:xfrm>
+          <a:prstGeom prst="rect">
+            <a:avLst/>
+          </a:prstGeom>
+          <a:noFill/>
+          <a:ln/>
+        </p:spPr>
+        <p:txBody>
+          <a:bodyPr wrap="square" rtlCol="0" anchor="ctr"/>
+          <a:lstStyle/>
+          <a:p>
+            <a:pPr indent="0" marL="0">
+              <a:lnSpc>
+                <a:spcPct val="105000"/>
+              </a:lnSpc>
+              <a:buNone/>
+            </a:pPr>
+            <a:r>
+              <a:rPr lang="en-US" sz="1150" dirty="0">
+                <a:solidFill>
+                  <a:srgbClr val="A9B2BD"/>
+                </a:solidFill>
+                <a:latin typeface="Arial" pitchFamily="34" charset="0"/>
+                <a:ea typeface="Arial" pitchFamily="34" charset="-122"/>
+                <a:cs typeface="Arial" pitchFamily="34" charset="-120"/>
+              </a:rPr>
+              <a:t>Full 3D lab &amp; core components</a:t>
+            </a:r>
+            <a:endParaRPr lang="en-US" sz="1150" dirty="0"/>
+          </a:p>
+        </p:txBody>
+      </p:sp>
+      <p:sp>
+        <p:nvSpPr>
+          <p:cNvPr id="28" name="Text 26"/>
+          <p:cNvSpPr/>
+          <p:nvPr/>
+        </p:nvSpPr>
+        <p:spPr>
+          <a:xfrm>
+            <a:off x="1097280" y="4270248"/>
+            <a:ext cx="274320" cy="320040"/>
+          </a:xfrm>
+          <a:prstGeom prst="rect">
+            <a:avLst/>
+          </a:prstGeom>
+          <a:noFill/>
+          <a:ln/>
+        </p:spPr>
+        <p:txBody>
+          <a:bodyPr wrap="square" rtlCol="0" anchor="ctr"/>
+          <a:lstStyle/>
+          <a:p>
+            <a:pPr indent="0" marL="0">
+              <a:buNone/>
+            </a:pPr>
+            <a:r>
+              <a:rPr lang="en-US" sz="1300" b="1" dirty="0">
+                <a:solidFill>
+                  <a:srgbClr val="2ECC71"/>
+                </a:solidFill>
+                <a:latin typeface="Arial" pitchFamily="34" charset="0"/>
+                <a:ea typeface="Arial" pitchFamily="34" charset="-122"/>
+                <a:cs typeface="Arial" pitchFamily="34" charset="-120"/>
+              </a:rPr>
+              <a:t>✓</a:t>
+            </a:r>
+            <a:endParaRPr lang="en-US" sz="1300" dirty="0"/>
+          </a:p>
+        </p:txBody>
+      </p:sp>
+      <p:sp>
+        <p:nvSpPr>
+          <p:cNvPr id="29" name="Text 27"/>
+          <p:cNvSpPr/>
+          <p:nvPr/>
+        </p:nvSpPr>
+        <p:spPr>
+          <a:xfrm>
+            <a:off x="1371600" y="4270248"/>
+            <a:ext cx="2493264" cy="457200"/>
+          </a:xfrm>
+          <a:prstGeom prst="rect">
+            <a:avLst/>
+          </a:prstGeom>
+          <a:noFill/>
+          <a:ln/>
+        </p:spPr>
+        <p:txBody>
+          <a:bodyPr wrap="square" rtlCol="0" anchor="ctr"/>
+          <a:lstStyle/>
+          <a:p>
+            <a:pPr indent="0" marL="0">
+              <a:lnSpc>
+                <a:spcPct val="105000"/>
+              </a:lnSpc>
+              <a:buNone/>
+            </a:pPr>
+            <a:r>
+              <a:rPr lang="en-US" sz="1150" dirty="0">
+                <a:solidFill>
+                  <a:srgbClr val="A9B2BD"/>
+                </a:solidFill>
+                <a:latin typeface="Arial" pitchFamily="34" charset="0"/>
+                <a:ea typeface="Arial" pitchFamily="34" charset="-122"/>
+                <a:cs typeface="Arial" pitchFamily="34" charset="-120"/>
+              </a:rPr>
+              <a:t>AI tutor (fair-use)</a:t>
+            </a:r>
+            <a:endParaRPr lang="en-US" sz="1150" dirty="0"/>
+          </a:p>
+        </p:txBody>
+      </p:sp>
+      <p:sp>
+        <p:nvSpPr>
+          <p:cNvPr id="30" name="Text 28"/>
+          <p:cNvSpPr/>
+          <p:nvPr/>
+        </p:nvSpPr>
+        <p:spPr>
+          <a:xfrm>
+            <a:off x="1097280" y="4745736"/>
+            <a:ext cx="274320" cy="320040"/>
+          </a:xfrm>
+          <a:prstGeom prst="rect">
+            <a:avLst/>
+          </a:prstGeom>
+          <a:noFill/>
+          <a:ln/>
+        </p:spPr>
+        <p:txBody>
+          <a:bodyPr wrap="square" rtlCol="0" anchor="ctr"/>
+          <a:lstStyle/>
+          <a:p>
+            <a:pPr indent="0" marL="0">
+              <a:buNone/>
+            </a:pPr>
+            <a:r>
+              <a:rPr lang="en-US" sz="1300" b="1" dirty="0">
+                <a:solidFill>
+                  <a:srgbClr val="2ECC71"/>
+                </a:solidFill>
+                <a:latin typeface="Arial" pitchFamily="34" charset="0"/>
+                <a:ea typeface="Arial" pitchFamily="34" charset="-122"/>
+                <a:cs typeface="Arial" pitchFamily="34" charset="-120"/>
+              </a:rPr>
+              <a:t>✓</a:t>
+            </a:r>
+            <a:endParaRPr lang="en-US" sz="1300" dirty="0"/>
+          </a:p>
+        </p:txBody>
+      </p:sp>
+      <p:sp>
+        <p:nvSpPr>
+          <p:cNvPr id="31" name="Text 29"/>
+          <p:cNvSpPr/>
+          <p:nvPr/>
+        </p:nvSpPr>
+        <p:spPr>
+          <a:xfrm>
+            <a:off x="1371600" y="4745736"/>
+            <a:ext cx="2493264" cy="457200"/>
+          </a:xfrm>
+          <a:prstGeom prst="rect">
+            <a:avLst/>
+          </a:prstGeom>
+          <a:noFill/>
+          <a:ln/>
+        </p:spPr>
+        <p:txBody>
+          <a:bodyPr wrap="square" rtlCol="0" anchor="ctr"/>
+          <a:lstStyle/>
+          <a:p>
+            <a:pPr indent="0" marL="0">
+              <a:lnSpc>
+                <a:spcPct val="105000"/>
+              </a:lnSpc>
+              <a:buNone/>
+            </a:pPr>
+            <a:r>
+              <a:rPr lang="en-US" sz="1150" dirty="0">
+                <a:solidFill>
+                  <a:srgbClr val="A9B2BD"/>
+                </a:solidFill>
+                <a:latin typeface="Arial" pitchFamily="34" charset="0"/>
+                <a:ea typeface="Arial" pitchFamily="34" charset="-122"/>
+                <a:cs typeface="Arial" pitchFamily="34" charset="-120"/>
+              </a:rPr>
+              <a:t>Guided Build Path</a:t>
+            </a:r>
+            <a:endParaRPr lang="en-US" sz="1150" dirty="0"/>
+          </a:p>
+        </p:txBody>
+      </p:sp>
+      <p:sp>
+        <p:nvSpPr>
+          <p:cNvPr id="32" name="Shape 30"/>
+          <p:cNvSpPr/>
+          <p:nvPr/>
+        </p:nvSpPr>
+        <p:spPr>
+          <a:xfrm>
+            <a:off x="4459224" y="2377440"/>
+            <a:ext cx="3270504" cy="3200400"/>
+          </a:xfrm>
+          <a:prstGeom prst="roundRect">
+            <a:avLst>
+              <a:gd name="adj" fmla="val 1714"/>
+            </a:avLst>
+          </a:prstGeom>
+          <a:solidFill>
+            <a:srgbClr val="191B1F"/>
+          </a:solidFill>
+          <a:ln w="12700">
+            <a:solidFill>
+              <a:srgbClr val="2A2D33"/>
+            </a:solidFill>
+            <a:prstDash val="solid"/>
+          </a:ln>
+        </p:spPr>
+      </p:sp>
+      <p:sp>
+        <p:nvSpPr>
+          <p:cNvPr id="33" name="Shape 31"/>
+          <p:cNvSpPr/>
+          <p:nvPr/>
+        </p:nvSpPr>
+        <p:spPr>
+          <a:xfrm>
+            <a:off x="4687824" y="2377440"/>
+            <a:ext cx="2813304" cy="27432"/>
+          </a:xfrm>
+          <a:prstGeom prst="rect">
+            <a:avLst/>
+          </a:prstGeom>
+          <a:solidFill>
+            <a:srgbClr val="8A6A4E"/>
+          </a:solidFill>
+          <a:ln/>
+        </p:spPr>
+      </p:sp>
+      <p:sp>
+        <p:nvSpPr>
+          <p:cNvPr id="34" name="Shape 32"/>
+          <p:cNvSpPr/>
+          <p:nvPr/>
+        </p:nvSpPr>
+        <p:spPr>
+          <a:xfrm>
+            <a:off x="4687824" y="2377440"/>
+            <a:ext cx="2813304" cy="54864"/>
+          </a:xfrm>
+          <a:prstGeom prst="rect">
+            <a:avLst/>
+          </a:prstGeom>
+          <a:solidFill>
+            <a:srgbClr val="FF2D2D"/>
+          </a:solidFill>
+          <a:ln/>
+        </p:spPr>
+      </p:sp>
+      <p:sp>
+        <p:nvSpPr>
+          <p:cNvPr id="35" name="Text 33"/>
+          <p:cNvSpPr/>
+          <p:nvPr/>
+        </p:nvSpPr>
+        <p:spPr>
+          <a:xfrm>
+            <a:off x="4733544" y="2542032"/>
+            <a:ext cx="2721864" cy="274320"/>
+          </a:xfrm>
+          <a:prstGeom prst="rect">
+            <a:avLst/>
+          </a:prstGeom>
+          <a:noFill/>
+          <a:ln/>
+        </p:spPr>
+        <p:txBody>
+          <a:bodyPr wrap="square" rtlCol="0" anchor="ctr"/>
+          <a:lstStyle/>
+          <a:p>
+            <a:pPr indent="0" marL="0">
+              <a:buNone/>
+            </a:pPr>
+            <a:r>
+              <a:rPr lang="en-US" sz="900" b="1" spc="200" kern="0" dirty="0">
+                <a:solidFill>
+                  <a:srgbClr val="FF2D2D"/>
+                </a:solidFill>
+                <a:latin typeface="Consolas" pitchFamily="34" charset="0"/>
+                <a:ea typeface="Consolas" pitchFamily="34" charset="-122"/>
+                <a:cs typeface="Consolas" pitchFamily="34" charset="-120"/>
+              </a:rPr>
+              <a:t>MOST POPULAR</a:t>
+            </a:r>
+            <a:endParaRPr lang="en-US" sz="900" dirty="0"/>
+          </a:p>
+        </p:txBody>
+      </p:sp>
+      <p:sp>
+        <p:nvSpPr>
+          <p:cNvPr id="36" name="Text 34"/>
+          <p:cNvSpPr/>
+          <p:nvPr/>
+        </p:nvSpPr>
+        <p:spPr>
+          <a:xfrm>
+            <a:off x="4733544" y="2834640"/>
+            <a:ext cx="2721864" cy="457200"/>
+          </a:xfrm>
+          <a:prstGeom prst="rect">
+            <a:avLst/>
+          </a:prstGeom>
+          <a:noFill/>
+          <a:ln/>
+        </p:spPr>
+        <p:txBody>
+          <a:bodyPr wrap="square" rtlCol="0" anchor="ctr"/>
+          <a:lstStyle/>
+          <a:p>
+            <a:pPr indent="0" marL="0">
+              <a:buNone/>
+            </a:pPr>
+            <a:r>
+              <a:rPr lang="en-US" sz="2400" b="1" dirty="0">
+                <a:solidFill>
+                  <a:srgbClr val="FF2D2D"/>
+                </a:solidFill>
+                <a:latin typeface="Arial" pitchFamily="34" charset="0"/>
+                <a:ea typeface="Arial" pitchFamily="34" charset="-122"/>
+                <a:cs typeface="Arial" pitchFamily="34" charset="-120"/>
+              </a:rPr>
+              <a:t>PRO</a:t>
+            </a:r>
+            <a:endParaRPr lang="en-US" sz="2400" dirty="0"/>
+          </a:p>
+        </p:txBody>
+      </p:sp>
+      <p:sp>
+        <p:nvSpPr>
+          <p:cNvPr id="37" name="Text 35"/>
+          <p:cNvSpPr/>
+          <p:nvPr/>
+        </p:nvSpPr>
+        <p:spPr>
+          <a:xfrm>
+            <a:off x="4733544" y="3337560"/>
+            <a:ext cx="2721864" cy="320040"/>
+          </a:xfrm>
+          <a:prstGeom prst="rect">
+            <a:avLst/>
+          </a:prstGeom>
+          <a:noFill/>
+          <a:ln/>
+        </p:spPr>
+        <p:txBody>
+          <a:bodyPr wrap="square" rtlCol="0" anchor="ctr"/>
+          <a:lstStyle/>
+          <a:p>
+            <a:pPr indent="0" marL="0">
+              <a:buNone/>
+            </a:pPr>
+            <a:r>
+              <a:rPr lang="en-US" sz="1000" spc="100" kern="0" dirty="0">
+                <a:solidFill>
+                  <a:srgbClr val="A9B2BD"/>
+                </a:solidFill>
+                <a:latin typeface="Consolas" pitchFamily="34" charset="0"/>
+                <a:ea typeface="Consolas" pitchFamily="34" charset="-122"/>
+                <a:cs typeface="Consolas" pitchFamily="34" charset="-120"/>
+              </a:rPr>
+              <a:t>Power users</a:t>
+            </a:r>
+            <a:endParaRPr lang="en-US" sz="1000" dirty="0"/>
+          </a:p>
+        </p:txBody>
+      </p:sp>
+      <p:sp>
+        <p:nvSpPr>
+          <p:cNvPr id="38" name="Shape 36"/>
+          <p:cNvSpPr/>
+          <p:nvPr/>
+        </p:nvSpPr>
+        <p:spPr>
+          <a:xfrm>
+            <a:off x="4733544" y="3749040"/>
+            <a:ext cx="2721864" cy="13716"/>
+          </a:xfrm>
+          <a:prstGeom prst="rect">
+            <a:avLst/>
+          </a:prstGeom>
+          <a:solidFill>
+            <a:srgbClr val="2A2D33"/>
+          </a:solidFill>
+          <a:ln/>
+        </p:spPr>
+      </p:sp>
+      <p:sp>
+        <p:nvSpPr>
+          <p:cNvPr id="39" name="Text 37"/>
+          <p:cNvSpPr/>
+          <p:nvPr/>
+        </p:nvSpPr>
+        <p:spPr>
+          <a:xfrm>
+            <a:off x="4733544" y="3977640"/>
+            <a:ext cx="274320" cy="320040"/>
+          </a:xfrm>
+          <a:prstGeom prst="rect">
+            <a:avLst/>
+          </a:prstGeom>
+          <a:noFill/>
+          <a:ln/>
+        </p:spPr>
+        <p:txBody>
+          <a:bodyPr wrap="square" rtlCol="0" anchor="ctr"/>
+          <a:lstStyle/>
+          <a:p>
+            <a:pPr indent="0" marL="0">
+              <a:buNone/>
+            </a:pPr>
+            <a:r>
+              <a:rPr lang="en-US" sz="1300" b="1" dirty="0">
+                <a:solidFill>
+                  <a:srgbClr val="2ECC71"/>
+                </a:solidFill>
+                <a:latin typeface="Arial" pitchFamily="34" charset="0"/>
+                <a:ea typeface="Arial" pitchFamily="34" charset="-122"/>
+                <a:cs typeface="Arial" pitchFamily="34" charset="-120"/>
+              </a:rPr>
+              <a:t>✓</a:t>
+            </a:r>
+            <a:endParaRPr lang="en-US" sz="1300" dirty="0"/>
+          </a:p>
+        </p:txBody>
+      </p:sp>
+      <p:sp>
+        <p:nvSpPr>
+          <p:cNvPr id="40" name="Text 38"/>
+          <p:cNvSpPr/>
+          <p:nvPr/>
+        </p:nvSpPr>
+        <p:spPr>
+          <a:xfrm>
+            <a:off x="5007864" y="3977640"/>
+            <a:ext cx="2493264" cy="457200"/>
+          </a:xfrm>
+          <a:prstGeom prst="rect">
+            <a:avLst/>
+          </a:prstGeom>
+          <a:noFill/>
+          <a:ln/>
+        </p:spPr>
+        <p:txBody>
+          <a:bodyPr wrap="square" rtlCol="0" anchor="ctr"/>
+          <a:lstStyle/>
+          <a:p>
+            <a:pPr indent="0" marL="0">
+              <a:lnSpc>
+                <a:spcPct val="105000"/>
+              </a:lnSpc>
+              <a:buNone/>
+            </a:pPr>
+            <a:r>
+              <a:rPr lang="en-US" sz="1150" dirty="0">
+                <a:solidFill>
+                  <a:srgbClr val="A9B2BD"/>
+                </a:solidFill>
+                <a:latin typeface="Arial" pitchFamily="34" charset="0"/>
+                <a:ea typeface="Arial" pitchFamily="34" charset="-122"/>
+                <a:cs typeface="Arial" pitchFamily="34" charset="-120"/>
+              </a:rPr>
+              <a:t>Advanced parts &amp; unlimited AI</a:t>
+            </a:r>
+            <a:endParaRPr lang="en-US" sz="1150" dirty="0"/>
+          </a:p>
+        </p:txBody>
+      </p:sp>
+      <p:sp>
+        <p:nvSpPr>
+          <p:cNvPr id="41" name="Text 39"/>
+          <p:cNvSpPr/>
+          <p:nvPr/>
+        </p:nvSpPr>
+        <p:spPr>
+          <a:xfrm>
+            <a:off x="4733544" y="4453128"/>
+            <a:ext cx="274320" cy="320040"/>
+          </a:xfrm>
+          <a:prstGeom prst="rect">
+            <a:avLst/>
+          </a:prstGeom>
+          <a:noFill/>
+          <a:ln/>
+        </p:spPr>
+        <p:txBody>
+          <a:bodyPr wrap="square" rtlCol="0" anchor="ctr"/>
+          <a:lstStyle/>
+          <a:p>
+            <a:pPr indent="0" marL="0">
+              <a:buNone/>
+            </a:pPr>
+            <a:r>
+              <a:rPr lang="en-US" sz="1300" b="1" dirty="0">
+                <a:solidFill>
+                  <a:srgbClr val="2ECC71"/>
+                </a:solidFill>
+                <a:latin typeface="Arial" pitchFamily="34" charset="0"/>
+                <a:ea typeface="Arial" pitchFamily="34" charset="-122"/>
+                <a:cs typeface="Arial" pitchFamily="34" charset="-120"/>
+              </a:rPr>
+              <a:t>✓</a:t>
+            </a:r>
+            <a:endParaRPr lang="en-US" sz="1300" dirty="0"/>
+          </a:p>
+        </p:txBody>
+      </p:sp>
+      <p:sp>
+        <p:nvSpPr>
+          <p:cNvPr id="42" name="Text 40"/>
+          <p:cNvSpPr/>
+          <p:nvPr/>
+        </p:nvSpPr>
+        <p:spPr>
+          <a:xfrm>
+            <a:off x="5007864" y="4453128"/>
+            <a:ext cx="2493264" cy="457200"/>
+          </a:xfrm>
+          <a:prstGeom prst="rect">
+            <a:avLst/>
+          </a:prstGeom>
+          <a:noFill/>
+          <a:ln/>
+        </p:spPr>
+        <p:txBody>
+          <a:bodyPr wrap="square" rtlCol="0" anchor="ctr"/>
+          <a:lstStyle/>
+          <a:p>
+            <a:pPr indent="0" marL="0">
+              <a:lnSpc>
+                <a:spcPct val="105000"/>
+              </a:lnSpc>
+              <a:buNone/>
+            </a:pPr>
+            <a:r>
+              <a:rPr lang="en-US" sz="1150" dirty="0">
+                <a:solidFill>
+                  <a:srgbClr val="A9B2BD"/>
+                </a:solidFill>
+                <a:latin typeface="Arial" pitchFamily="34" charset="0"/>
+                <a:ea typeface="Arial" pitchFamily="34" charset="-122"/>
+                <a:cs typeface="Arial" pitchFamily="34" charset="-120"/>
+              </a:rPr>
+              <a:t>Save &amp; share unlimited circuits</a:t>
+            </a:r>
+            <a:endParaRPr lang="en-US" sz="1150" dirty="0"/>
+          </a:p>
+        </p:txBody>
+      </p:sp>
+      <p:sp>
+        <p:nvSpPr>
+          <p:cNvPr id="43" name="Text 41"/>
+          <p:cNvSpPr/>
+          <p:nvPr/>
+        </p:nvSpPr>
+        <p:spPr>
+          <a:xfrm>
+            <a:off x="4733544" y="4928616"/>
+            <a:ext cx="274320" cy="320040"/>
+          </a:xfrm>
+          <a:prstGeom prst="rect">
+            <a:avLst/>
+          </a:prstGeom>
+          <a:noFill/>
+          <a:ln/>
+        </p:spPr>
+        <p:txBody>
+          <a:bodyPr wrap="square" rtlCol="0" anchor="ctr"/>
+          <a:lstStyle/>
+          <a:p>
+            <a:pPr indent="0" marL="0">
+              <a:buNone/>
+            </a:pPr>
+            <a:r>
+              <a:rPr lang="en-US" sz="1300" b="1" dirty="0">
+                <a:solidFill>
+                  <a:srgbClr val="2ECC71"/>
+                </a:solidFill>
+                <a:latin typeface="Arial" pitchFamily="34" charset="0"/>
+                <a:ea typeface="Arial" pitchFamily="34" charset="-122"/>
+                <a:cs typeface="Arial" pitchFamily="34" charset="-120"/>
+              </a:rPr>
+              <a:t>✓</a:t>
+            </a:r>
+            <a:endParaRPr lang="en-US" sz="1300" dirty="0"/>
+          </a:p>
+        </p:txBody>
+      </p:sp>
+      <p:sp>
+        <p:nvSpPr>
+          <p:cNvPr id="44" name="Text 42"/>
+          <p:cNvSpPr/>
+          <p:nvPr/>
+        </p:nvSpPr>
+        <p:spPr>
+          <a:xfrm>
+            <a:off x="5007864" y="4928616"/>
+            <a:ext cx="2493264" cy="457200"/>
+          </a:xfrm>
+          <a:prstGeom prst="rect">
+            <a:avLst/>
+          </a:prstGeom>
+          <a:noFill/>
+          <a:ln/>
+        </p:spPr>
+        <p:txBody>
+          <a:bodyPr wrap="square" rtlCol="0" anchor="ctr"/>
+          <a:lstStyle/>
+          <a:p>
+            <a:pPr indent="0" marL="0">
+              <a:lnSpc>
+                <a:spcPct val="105000"/>
+              </a:lnSpc>
+              <a:buNone/>
+            </a:pPr>
+            <a:r>
+              <a:rPr lang="en-US" sz="1150" dirty="0">
+                <a:solidFill>
+                  <a:srgbClr val="A9B2BD"/>
+                </a:solidFill>
+                <a:latin typeface="Arial" pitchFamily="34" charset="0"/>
+                <a:ea typeface="Arial" pitchFamily="34" charset="-122"/>
+                <a:cs typeface="Arial" pitchFamily="34" charset="-120"/>
+              </a:rPr>
+              <a:t>Export to real PCB layouts</a:t>
+            </a:r>
+            <a:endParaRPr lang="en-US" sz="1150" dirty="0"/>
+          </a:p>
+        </p:txBody>
+      </p:sp>
+      <p:sp>
+        <p:nvSpPr>
+          <p:cNvPr id="45" name="Shape 43"/>
+          <p:cNvSpPr/>
+          <p:nvPr/>
+        </p:nvSpPr>
+        <p:spPr>
+          <a:xfrm>
+            <a:off x="8095488" y="2377440"/>
+            <a:ext cx="3270504" cy="3200400"/>
+          </a:xfrm>
+          <a:prstGeom prst="roundRect">
+            <a:avLst>
+              <a:gd name="adj" fmla="val 1714"/>
+            </a:avLst>
+          </a:prstGeom>
+          <a:solidFill>
+            <a:srgbClr val="121417"/>
+          </a:solidFill>
+          <a:ln w="12700">
+            <a:solidFill>
+              <a:srgbClr val="2A2D33"/>
+            </a:solidFill>
+            <a:prstDash val="solid"/>
+          </a:ln>
+        </p:spPr>
+      </p:sp>
+      <p:sp>
+        <p:nvSpPr>
+          <p:cNvPr id="46" name="Shape 44"/>
+          <p:cNvSpPr/>
+          <p:nvPr/>
+        </p:nvSpPr>
+        <p:spPr>
+          <a:xfrm>
+            <a:off x="8324088" y="2377440"/>
+            <a:ext cx="2813304" cy="27432"/>
+          </a:xfrm>
+          <a:prstGeom prst="rect">
+            <a:avLst/>
+          </a:prstGeom>
+          <a:solidFill>
+            <a:srgbClr val="8A6A4E"/>
+          </a:solidFill>
+          <a:ln/>
+        </p:spPr>
+      </p:sp>
+      <p:sp>
+        <p:nvSpPr>
+          <p:cNvPr id="47" name="Text 45"/>
+          <p:cNvSpPr/>
+          <p:nvPr/>
+        </p:nvSpPr>
+        <p:spPr>
+          <a:xfrm>
+            <a:off x="8369808" y="2670048"/>
+            <a:ext cx="2721864" cy="457200"/>
+          </a:xfrm>
+          <a:prstGeom prst="rect">
+            <a:avLst/>
+          </a:prstGeom>
+          <a:noFill/>
+          <a:ln/>
+        </p:spPr>
+        <p:txBody>
+          <a:bodyPr wrap="square" rtlCol="0" anchor="ctr"/>
+          <a:lstStyle/>
+          <a:p>
+            <a:pPr indent="0" marL="0">
+              <a:buNone/>
+            </a:pPr>
+            <a:r>
+              <a:rPr lang="en-US" sz="2400" b="1" dirty="0">
+                <a:solidFill>
+                  <a:srgbClr val="F4F6F8"/>
+                </a:solidFill>
+                <a:latin typeface="Arial" pitchFamily="34" charset="0"/>
+                <a:ea typeface="Arial" pitchFamily="34" charset="-122"/>
+                <a:cs typeface="Arial" pitchFamily="34" charset="-120"/>
+              </a:rPr>
+              <a:t>CLASSROOM</a:t>
+            </a:r>
+            <a:endParaRPr lang="en-US" sz="2400" dirty="0"/>
+          </a:p>
+        </p:txBody>
+      </p:sp>
+      <p:sp>
+        <p:nvSpPr>
+          <p:cNvPr id="48" name="Text 46"/>
+          <p:cNvSpPr/>
+          <p:nvPr/>
+        </p:nvSpPr>
+        <p:spPr>
+          <a:xfrm>
+            <a:off x="8369808" y="3154680"/>
+            <a:ext cx="2721864" cy="320040"/>
+          </a:xfrm>
+          <a:prstGeom prst="rect">
+            <a:avLst/>
+          </a:prstGeom>
+          <a:noFill/>
+          <a:ln/>
+        </p:spPr>
+        <p:txBody>
+          <a:bodyPr wrap="square" rtlCol="0" anchor="ctr"/>
+          <a:lstStyle/>
+          <a:p>
+            <a:pPr indent="0" marL="0">
+              <a:buNone/>
+            </a:pPr>
+            <a:r>
+              <a:rPr lang="en-US" sz="1000" spc="100" kern="0" dirty="0">
+                <a:solidFill>
+                  <a:srgbClr val="A9B2BD"/>
+                </a:solidFill>
+                <a:latin typeface="Consolas" pitchFamily="34" charset="0"/>
+                <a:ea typeface="Consolas" pitchFamily="34" charset="-122"/>
+                <a:cs typeface="Consolas" pitchFamily="34" charset="-120"/>
+              </a:rPr>
+              <a:t>Schools &amp; bootcamps</a:t>
+            </a:r>
+            <a:endParaRPr lang="en-US" sz="1000" dirty="0"/>
+          </a:p>
+        </p:txBody>
+      </p:sp>
+      <p:sp>
+        <p:nvSpPr>
+          <p:cNvPr id="49" name="Shape 47"/>
+          <p:cNvSpPr/>
+          <p:nvPr/>
+        </p:nvSpPr>
+        <p:spPr>
+          <a:xfrm>
+            <a:off x="8369808" y="3566160"/>
+            <a:ext cx="2721864" cy="13716"/>
+          </a:xfrm>
+          <a:prstGeom prst="rect">
+            <a:avLst/>
+          </a:prstGeom>
+          <a:solidFill>
+            <a:srgbClr val="2A2D33"/>
+          </a:solidFill>
+          <a:ln/>
+        </p:spPr>
+      </p:sp>
+      <p:sp>
+        <p:nvSpPr>
+          <p:cNvPr id="50" name="Text 48"/>
+          <p:cNvSpPr/>
+          <p:nvPr/>
+        </p:nvSpPr>
+        <p:spPr>
+          <a:xfrm>
+            <a:off x="8369808" y="3794760"/>
+            <a:ext cx="274320" cy="320040"/>
+          </a:xfrm>
+          <a:prstGeom prst="rect">
+            <a:avLst/>
+          </a:prstGeom>
+          <a:noFill/>
+          <a:ln/>
+        </p:spPr>
+        <p:txBody>
+          <a:bodyPr wrap="square" rtlCol="0" anchor="ctr"/>
+          <a:lstStyle/>
+          <a:p>
+            <a:pPr indent="0" marL="0">
+              <a:buNone/>
+            </a:pPr>
+            <a:r>
+              <a:rPr lang="en-US" sz="1300" b="1" dirty="0">
+                <a:solidFill>
+                  <a:srgbClr val="2ECC71"/>
+                </a:solidFill>
+                <a:latin typeface="Arial" pitchFamily="34" charset="0"/>
+                <a:ea typeface="Arial" pitchFamily="34" charset="-122"/>
+                <a:cs typeface="Arial" pitchFamily="34" charset="-120"/>
+              </a:rPr>
+              <a:t>✓</a:t>
+            </a:r>
+            <a:endParaRPr lang="en-US" sz="1300" dirty="0"/>
+          </a:p>
+        </p:txBody>
+      </p:sp>
+      <p:sp>
+        <p:nvSpPr>
+          <p:cNvPr id="51" name="Text 49"/>
+          <p:cNvSpPr/>
+          <p:nvPr/>
+        </p:nvSpPr>
+        <p:spPr>
+          <a:xfrm>
+            <a:off x="8644128" y="3794760"/>
+            <a:ext cx="2493264" cy="457200"/>
+          </a:xfrm>
+          <a:prstGeom prst="rect">
+            <a:avLst/>
+          </a:prstGeom>
+          <a:noFill/>
+          <a:ln/>
+        </p:spPr>
+        <p:txBody>
+          <a:bodyPr wrap="square" rtlCol="0" anchor="ctr"/>
+          <a:lstStyle/>
+          <a:p>
+            <a:pPr indent="0" marL="0">
+              <a:lnSpc>
+                <a:spcPct val="105000"/>
+              </a:lnSpc>
+              <a:buNone/>
+            </a:pPr>
+            <a:r>
+              <a:rPr lang="en-US" sz="1150" dirty="0">
+                <a:solidFill>
+                  <a:srgbClr val="A9B2BD"/>
+                </a:solidFill>
+                <a:latin typeface="Arial" pitchFamily="34" charset="0"/>
+                <a:ea typeface="Arial" pitchFamily="34" charset="-122"/>
+                <a:cs typeface="Arial" pitchFamily="34" charset="-120"/>
+              </a:rPr>
+              <a:t>Teacher dashboard &amp; cohorts</a:t>
+            </a:r>
+            <a:endParaRPr lang="en-US" sz="1150" dirty="0"/>
+          </a:p>
+        </p:txBody>
+      </p:sp>
+      <p:sp>
+        <p:nvSpPr>
+          <p:cNvPr id="52" name="Text 50"/>
+          <p:cNvSpPr/>
+          <p:nvPr/>
+        </p:nvSpPr>
+        <p:spPr>
+          <a:xfrm>
+            <a:off x="8369808" y="4270248"/>
+            <a:ext cx="274320" cy="320040"/>
+          </a:xfrm>
+          <a:prstGeom prst="rect">
+            <a:avLst/>
+          </a:prstGeom>
+          <a:noFill/>
+          <a:ln/>
+        </p:spPr>
+        <p:txBody>
+          <a:bodyPr wrap="square" rtlCol="0" anchor="ctr"/>
+          <a:lstStyle/>
+          <a:p>
+            <a:pPr indent="0" marL="0">
+              <a:buNone/>
+            </a:pPr>
+            <a:r>
+              <a:rPr lang="en-US" sz="1300" b="1" dirty="0">
+                <a:solidFill>
+                  <a:srgbClr val="2ECC71"/>
+                </a:solidFill>
+                <a:latin typeface="Arial" pitchFamily="34" charset="0"/>
+                <a:ea typeface="Arial" pitchFamily="34" charset="-122"/>
+                <a:cs typeface="Arial" pitchFamily="34" charset="-120"/>
+              </a:rPr>
+              <a:t>✓</a:t>
+            </a:r>
+            <a:endParaRPr lang="en-US" sz="1300" dirty="0"/>
+          </a:p>
+        </p:txBody>
+      </p:sp>
+      <p:sp>
+        <p:nvSpPr>
+          <p:cNvPr id="53" name="Text 51"/>
+          <p:cNvSpPr/>
+          <p:nvPr/>
+        </p:nvSpPr>
+        <p:spPr>
+          <a:xfrm>
+            <a:off x="8644128" y="4270248"/>
+            <a:ext cx="2493264" cy="457200"/>
+          </a:xfrm>
+          <a:prstGeom prst="rect">
+            <a:avLst/>
+          </a:prstGeom>
+          <a:noFill/>
+          <a:ln/>
+        </p:spPr>
+        <p:txBody>
+          <a:bodyPr wrap="square" rtlCol="0" anchor="ctr"/>
+          <a:lstStyle/>
+          <a:p>
+            <a:pPr indent="0" marL="0">
+              <a:lnSpc>
+                <a:spcPct val="105000"/>
+              </a:lnSpc>
+              <a:buNone/>
+            </a:pPr>
+            <a:r>
+              <a:rPr lang="en-US" sz="1150" dirty="0">
+                <a:solidFill>
+                  <a:srgbClr val="A9B2BD"/>
+                </a:solidFill>
+                <a:latin typeface="Arial" pitchFamily="34" charset="0"/>
+                <a:ea typeface="Arial" pitchFamily="34" charset="-122"/>
+                <a:cs typeface="Arial" pitchFamily="34" charset="-120"/>
+              </a:rPr>
+              <a:t>Assignments &amp; progress tracking</a:t>
+            </a:r>
+            <a:endParaRPr lang="en-US" sz="1150" dirty="0"/>
+          </a:p>
+        </p:txBody>
+      </p:sp>
+      <p:sp>
+        <p:nvSpPr>
+          <p:cNvPr id="54" name="Text 52"/>
+          <p:cNvSpPr/>
+          <p:nvPr/>
+        </p:nvSpPr>
+        <p:spPr>
+          <a:xfrm>
+            <a:off x="8369808" y="4745736"/>
+            <a:ext cx="274320" cy="320040"/>
+          </a:xfrm>
+          <a:prstGeom prst="rect">
+            <a:avLst/>
+          </a:prstGeom>
+          <a:noFill/>
+          <a:ln/>
+        </p:spPr>
+        <p:txBody>
+          <a:bodyPr wrap="square" rtlCol="0" anchor="ctr"/>
+          <a:lstStyle/>
+          <a:p>
+            <a:pPr indent="0" marL="0">
+              <a:buNone/>
+            </a:pPr>
+            <a:r>
+              <a:rPr lang="en-US" sz="1300" b="1" dirty="0">
+                <a:solidFill>
+                  <a:srgbClr val="2ECC71"/>
+                </a:solidFill>
+                <a:latin typeface="Arial" pitchFamily="34" charset="0"/>
+                <a:ea typeface="Arial" pitchFamily="34" charset="-122"/>
+                <a:cs typeface="Arial" pitchFamily="34" charset="-120"/>
+              </a:rPr>
+              <a:t>✓</a:t>
+            </a:r>
+            <a:endParaRPr lang="en-US" sz="1300" dirty="0"/>
+          </a:p>
+        </p:txBody>
+      </p:sp>
+      <p:sp>
+        <p:nvSpPr>
+          <p:cNvPr id="55" name="Text 53"/>
+          <p:cNvSpPr/>
+          <p:nvPr/>
+        </p:nvSpPr>
+        <p:spPr>
+          <a:xfrm>
+            <a:off x="8644128" y="4745736"/>
+            <a:ext cx="2493264" cy="457200"/>
+          </a:xfrm>
+          <a:prstGeom prst="rect">
+            <a:avLst/>
+          </a:prstGeom>
+          <a:noFill/>
+          <a:ln/>
+        </p:spPr>
+        <p:txBody>
+          <a:bodyPr wrap="square" rtlCol="0" anchor="ctr"/>
+          <a:lstStyle/>
+          <a:p>
+            <a:pPr indent="0" marL="0">
+              <a:lnSpc>
+                <a:spcPct val="105000"/>
+              </a:lnSpc>
+              <a:buNone/>
+            </a:pPr>
+            <a:r>
+              <a:rPr lang="en-US" sz="1150" dirty="0">
+                <a:solidFill>
+                  <a:srgbClr val="A9B2BD"/>
+                </a:solidFill>
+                <a:latin typeface="Arial" pitchFamily="34" charset="0"/>
+                <a:ea typeface="Arial" pitchFamily="34" charset="-122"/>
+                <a:cs typeface="Arial" pitchFamily="34" charset="-120"/>
+              </a:rPr>
+              <a:t>Seat-based institutional license</a:t>
+            </a:r>
+            <a:endParaRPr lang="en-US" sz="1150" dirty="0"/>
+          </a:p>
+        </p:txBody>
+      </p:sp>
+      <p:sp>
+        <p:nvSpPr>
+          <p:cNvPr id="56" name="Text 54"/>
+          <p:cNvSpPr/>
+          <p:nvPr/>
+        </p:nvSpPr>
+        <p:spPr>
+          <a:xfrm>
+            <a:off x="822960" y="5806440"/>
+            <a:ext cx="10543032" cy="320040"/>
+          </a:xfrm>
+          <a:prstGeom prst="rect">
+            <a:avLst/>
+          </a:prstGeom>
+          <a:noFill/>
+          <a:ln/>
+        </p:spPr>
+        <p:txBody>
+          <a:bodyPr wrap="square" rtlCol="0" anchor="ctr"/>
+          <a:lstStyle/>
+          <a:p>
+            <a:pPr algn="ctr" indent="0" marL="0">
+              <a:buNone/>
+            </a:pPr>
+            <a:r>
+              <a:rPr lang="en-US" sz="1100" spc="100" kern="0" dirty="0">
+                <a:solidFill>
+                  <a:srgbClr val="6B7480"/>
+                </a:solidFill>
+                <a:latin typeface="Consolas" pitchFamily="34" charset="0"/>
+                <a:ea typeface="Consolas" pitchFamily="34" charset="-122"/>
+                <a:cs typeface="Consolas" pitchFamily="34" charset="-120"/>
+              </a:rPr>
+              <a:t>Land free with students → expand into paid Pro &amp; Classroom seats. Low marginal cost — no hardware to ship.</a:t>
+            </a:r>
+            <a:endParaRPr lang="en-US" sz="1100" dirty="0"/>
+          </a:p>
+        </p:txBody>
+      </p:sp>
+    </p:spTree>
+  </p:cSld>
+  <p:clrMapOvr>
+    <a:masterClrMapping/>
+  </p:clrMapOvr>
+</p:sld>
+</file>
+
+<file path=ppt/slides/slide12.xml><?xml version="1.0" encoding="utf-8"?>
+<p:sld xmlns:a="http://schemas.openxmlformats.org/drawingml/2006/main" xmlns:r="http://schemas.openxmlformats.org/officeDocument/2006/relationships" xmlns:p="http://schemas.openxmlformats.org/presentationml/2006/main">
+  <p:cSld name="Slide 12">
+    <p:bg>
+      <p:bgPr>
+        <a:solidFill>
+          <a:srgbClr val="0B0D0F"/>
+        </a:solidFill>
+      </p:bgPr>
+    </p:bg>
+    <p:spTree>
+      <p:nvGrpSpPr>
+        <p:cNvPr id="1" name=""/>
+        <p:cNvGrpSpPr/>
+        <p:nvPr/>
+      </p:nvGrpSpPr>
+      <p:grpSpPr>
+        <a:xfrm>
+          <a:off x="0" y="0"/>
+          <a:ext cx="0" cy="0"/>
+          <a:chOff x="0" y="0"/>
+          <a:chExt cx="0" cy="0"/>
+        </a:xfrm>
+      </p:grpSpPr>
+      <p:sp>
+        <p:nvSpPr>
+          <p:cNvPr id="2" name="Shape 0"/>
+          <p:cNvSpPr/>
+          <p:nvPr/>
+        </p:nvSpPr>
+        <p:spPr>
+          <a:xfrm>
+            <a:off x="937612" y="0"/>
+            <a:ext cx="0" cy="6858000"/>
+          </a:xfrm>
+          <a:prstGeom prst="line">
+            <a:avLst/>
+          </a:prstGeom>
+          <a:noFill/>
+          <a:ln w="6350">
+            <a:solidFill>
+              <a:srgbClr val="191B1F"/>
+            </a:solidFill>
+            <a:prstDash val="solid"/>
+          </a:ln>
+        </p:spPr>
+      </p:sp>
+      <p:sp>
+        <p:nvSpPr>
+          <p:cNvPr id="3" name="Shape 1"/>
+          <p:cNvSpPr/>
+          <p:nvPr/>
+        </p:nvSpPr>
+        <p:spPr>
+          <a:xfrm>
+            <a:off x="1875223" y="0"/>
+            <a:ext cx="0" cy="6858000"/>
+          </a:xfrm>
+          <a:prstGeom prst="line">
+            <a:avLst/>
+          </a:prstGeom>
+          <a:noFill/>
+          <a:ln w="6350">
+            <a:solidFill>
+              <a:srgbClr val="191B1F"/>
+            </a:solidFill>
+            <a:prstDash val="solid"/>
+          </a:ln>
+        </p:spPr>
+      </p:sp>
+      <p:sp>
+        <p:nvSpPr>
+          <p:cNvPr id="4" name="Shape 2"/>
+          <p:cNvSpPr/>
+          <p:nvPr/>
+        </p:nvSpPr>
+        <p:spPr>
+          <a:xfrm>
+            <a:off x="2812835" y="0"/>
+            <a:ext cx="0" cy="6858000"/>
+          </a:xfrm>
+          <a:prstGeom prst="line">
+            <a:avLst/>
+          </a:prstGeom>
+          <a:noFill/>
+          <a:ln w="6350">
+            <a:solidFill>
+              <a:srgbClr val="191B1F"/>
+            </a:solidFill>
+            <a:prstDash val="solid"/>
+          </a:ln>
+        </p:spPr>
+      </p:sp>
+      <p:sp>
+        <p:nvSpPr>
+          <p:cNvPr id="5" name="Shape 3"/>
+          <p:cNvSpPr/>
+          <p:nvPr/>
+        </p:nvSpPr>
+        <p:spPr>
+          <a:xfrm>
+            <a:off x="3750447" y="0"/>
+            <a:ext cx="0" cy="6858000"/>
+          </a:xfrm>
+          <a:prstGeom prst="line">
+            <a:avLst/>
+          </a:prstGeom>
+          <a:noFill/>
+          <a:ln w="6350">
+            <a:solidFill>
+              <a:srgbClr val="191B1F"/>
+            </a:solidFill>
+            <a:prstDash val="solid"/>
+          </a:ln>
+        </p:spPr>
+      </p:sp>
+      <p:sp>
+        <p:nvSpPr>
+          <p:cNvPr id="6" name="Shape 4"/>
+          <p:cNvSpPr/>
+          <p:nvPr/>
+        </p:nvSpPr>
+        <p:spPr>
+          <a:xfrm>
+            <a:off x="4688058" y="0"/>
+            <a:ext cx="0" cy="6858000"/>
+          </a:xfrm>
+          <a:prstGeom prst="line">
+            <a:avLst/>
+          </a:prstGeom>
+          <a:noFill/>
+          <a:ln w="6350">
+            <a:solidFill>
+              <a:srgbClr val="191B1F"/>
+            </a:solidFill>
+            <a:prstDash val="solid"/>
+          </a:ln>
+        </p:spPr>
+      </p:sp>
+      <p:sp>
+        <p:nvSpPr>
+          <p:cNvPr id="7" name="Shape 5"/>
+          <p:cNvSpPr/>
+          <p:nvPr/>
+        </p:nvSpPr>
+        <p:spPr>
+          <a:xfrm>
+            <a:off x="5625670" y="0"/>
+            <a:ext cx="0" cy="6858000"/>
+          </a:xfrm>
+          <a:prstGeom prst="line">
+            <a:avLst/>
+          </a:prstGeom>
+          <a:noFill/>
+          <a:ln w="6350">
+            <a:solidFill>
+              <a:srgbClr val="191B1F"/>
+            </a:solidFill>
+            <a:prstDash val="solid"/>
+          </a:ln>
+        </p:spPr>
+      </p:sp>
+      <p:sp>
+        <p:nvSpPr>
+          <p:cNvPr id="8" name="Shape 6"/>
+          <p:cNvSpPr/>
+          <p:nvPr/>
+        </p:nvSpPr>
+        <p:spPr>
+          <a:xfrm>
+            <a:off x="6563282" y="0"/>
+            <a:ext cx="0" cy="6858000"/>
+          </a:xfrm>
+          <a:prstGeom prst="line">
+            <a:avLst/>
+          </a:prstGeom>
+          <a:noFill/>
+          <a:ln w="6350">
+            <a:solidFill>
+              <a:srgbClr val="191B1F"/>
+            </a:solidFill>
+            <a:prstDash val="solid"/>
+          </a:ln>
+        </p:spPr>
+      </p:sp>
+      <p:sp>
+        <p:nvSpPr>
+          <p:cNvPr id="9" name="Shape 7"/>
+          <p:cNvSpPr/>
+          <p:nvPr/>
+        </p:nvSpPr>
+        <p:spPr>
+          <a:xfrm>
+            <a:off x="7500894" y="0"/>
+            <a:ext cx="0" cy="6858000"/>
+          </a:xfrm>
+          <a:prstGeom prst="line">
+            <a:avLst/>
+          </a:prstGeom>
+          <a:noFill/>
+          <a:ln w="6350">
+            <a:solidFill>
+              <a:srgbClr val="191B1F"/>
+            </a:solidFill>
+            <a:prstDash val="solid"/>
+          </a:ln>
+        </p:spPr>
+      </p:sp>
+      <p:sp>
+        <p:nvSpPr>
+          <p:cNvPr id="10" name="Shape 8"/>
+          <p:cNvSpPr/>
+          <p:nvPr/>
+        </p:nvSpPr>
+        <p:spPr>
+          <a:xfrm>
+            <a:off x="8438505" y="0"/>
+            <a:ext cx="0" cy="6858000"/>
+          </a:xfrm>
+          <a:prstGeom prst="line">
+            <a:avLst/>
+          </a:prstGeom>
+          <a:noFill/>
+          <a:ln w="6350">
+            <a:solidFill>
+              <a:srgbClr val="191B1F"/>
+            </a:solidFill>
+            <a:prstDash val="solid"/>
+          </a:ln>
+        </p:spPr>
+      </p:sp>
+      <p:sp>
+        <p:nvSpPr>
+          <p:cNvPr id="11" name="Shape 9"/>
+          <p:cNvSpPr/>
+          <p:nvPr/>
+        </p:nvSpPr>
+        <p:spPr>
+          <a:xfrm>
+            <a:off x="9376117" y="0"/>
+            <a:ext cx="0" cy="6858000"/>
+          </a:xfrm>
+          <a:prstGeom prst="line">
+            <a:avLst/>
+          </a:prstGeom>
+          <a:noFill/>
+          <a:ln w="6350">
+            <a:solidFill>
+              <a:srgbClr val="191B1F"/>
+            </a:solidFill>
+            <a:prstDash val="solid"/>
+          </a:ln>
+        </p:spPr>
+      </p:sp>
+      <p:sp>
+        <p:nvSpPr>
+          <p:cNvPr id="12" name="Shape 10"/>
+          <p:cNvSpPr/>
+          <p:nvPr/>
+        </p:nvSpPr>
+        <p:spPr>
+          <a:xfrm>
+            <a:off x="10313729" y="0"/>
+            <a:ext cx="0" cy="6858000"/>
+          </a:xfrm>
+          <a:prstGeom prst="line">
+            <a:avLst/>
+          </a:prstGeom>
+          <a:noFill/>
+          <a:ln w="6350">
+            <a:solidFill>
+              <a:srgbClr val="191B1F"/>
+            </a:solidFill>
+            <a:prstDash val="solid"/>
+          </a:ln>
+        </p:spPr>
+      </p:sp>
+      <p:sp>
+        <p:nvSpPr>
+          <p:cNvPr id="13" name="Shape 11"/>
+          <p:cNvSpPr/>
+          <p:nvPr/>
+        </p:nvSpPr>
+        <p:spPr>
+          <a:xfrm>
+            <a:off x="11251340" y="0"/>
+            <a:ext cx="0" cy="6858000"/>
+          </a:xfrm>
+          <a:prstGeom prst="line">
+            <a:avLst/>
+          </a:prstGeom>
+          <a:noFill/>
+          <a:ln w="6350">
+            <a:solidFill>
+              <a:srgbClr val="191B1F"/>
+            </a:solidFill>
+            <a:prstDash val="solid"/>
+          </a:ln>
+        </p:spPr>
+      </p:sp>
+      <p:sp>
+        <p:nvSpPr>
+          <p:cNvPr id="14" name="Shape 12"/>
+          <p:cNvSpPr/>
+          <p:nvPr/>
+        </p:nvSpPr>
+        <p:spPr>
+          <a:xfrm>
+            <a:off x="0" y="0"/>
+            <a:ext cx="12188952" cy="82296"/>
+          </a:xfrm>
+          <a:prstGeom prst="rect">
+            <a:avLst/>
+          </a:prstGeom>
+          <a:solidFill>
+            <a:srgbClr val="FF2D2D"/>
+          </a:solidFill>
+          <a:ln/>
+        </p:spPr>
+      </p:sp>
+      <p:sp>
+        <p:nvSpPr>
+          <p:cNvPr id="15" name="Shape 13"/>
+          <p:cNvSpPr/>
+          <p:nvPr/>
+        </p:nvSpPr>
+        <p:spPr>
+          <a:xfrm>
+            <a:off x="0" y="82296"/>
+            <a:ext cx="12188952" cy="18288"/>
+          </a:xfrm>
+          <a:prstGeom prst="rect">
+            <a:avLst/>
+          </a:prstGeom>
+          <a:solidFill>
+            <a:srgbClr val="7A1210"/>
+          </a:solidFill>
+          <a:ln/>
+        </p:spPr>
+      </p:sp>
+      <p:sp>
+        <p:nvSpPr>
+          <p:cNvPr id="16" name="Text 14"/>
+          <p:cNvSpPr/>
+          <p:nvPr/>
+        </p:nvSpPr>
+        <p:spPr>
+          <a:xfrm>
+            <a:off x="822960" y="6400800"/>
+            <a:ext cx="2743200" cy="274320"/>
+          </a:xfrm>
+          <a:prstGeom prst="rect">
+            <a:avLst/>
+          </a:prstGeom>
+          <a:noFill/>
+          <a:ln/>
+        </p:spPr>
+        <p:txBody>
+          <a:bodyPr wrap="square" rtlCol="0" anchor="ctr"/>
+          <a:lstStyle/>
+          <a:p>
+            <a:pPr algn="l" indent="0" marL="0">
+              <a:buNone/>
+            </a:pPr>
+            <a:r>
+              <a:rPr lang="en-US" sz="900" spc="200" kern="0" dirty="0">
+                <a:solidFill>
+                  <a:srgbClr val="6B7480"/>
+                </a:solidFill>
+                <a:latin typeface="Consolas" pitchFamily="34" charset="0"/>
+                <a:ea typeface="Consolas" pitchFamily="34" charset="-122"/>
+                <a:cs typeface="Consolas" pitchFamily="34" charset="-120"/>
+              </a:rPr>
+              <a:t>YANTRAA</a:t>
+            </a:r>
+            <a:endParaRPr lang="en-US" sz="900" dirty="0"/>
+          </a:p>
+        </p:txBody>
+      </p:sp>
+      <p:sp>
+        <p:nvSpPr>
+          <p:cNvPr id="17" name="Text 15"/>
+          <p:cNvSpPr/>
+          <p:nvPr/>
+        </p:nvSpPr>
+        <p:spPr>
+          <a:xfrm>
+            <a:off x="3351276" y="6400800"/>
+            <a:ext cx="5486400" cy="274320"/>
+          </a:xfrm>
+          <a:prstGeom prst="rect">
+            <a:avLst/>
+          </a:prstGeom>
+          <a:noFill/>
+          <a:ln/>
+        </p:spPr>
+        <p:txBody>
+          <a:bodyPr wrap="square" rtlCol="0" anchor="ctr"/>
+          <a:lstStyle/>
+          <a:p>
+            <a:pPr algn="ctr" indent="0" marL="0">
+              <a:buNone/>
+            </a:pPr>
+            <a:r>
+              <a:rPr lang="en-US" sz="900" spc="200" kern="0" dirty="0">
+                <a:solidFill>
+                  <a:srgbClr val="6B7480"/>
+                </a:solidFill>
+                <a:latin typeface="Consolas" pitchFamily="34" charset="0"/>
+                <a:ea typeface="Consolas" pitchFamily="34" charset="-122"/>
+                <a:cs typeface="Consolas" pitchFamily="34" charset="-120"/>
+              </a:rPr>
+              <a:t>LEARN ELECTRONICS IN 3D</a:t>
+            </a:r>
+            <a:endParaRPr lang="en-US" sz="900" dirty="0"/>
+          </a:p>
+        </p:txBody>
+      </p:sp>
+      <p:sp>
+        <p:nvSpPr>
+          <p:cNvPr id="18" name="Text 16"/>
+          <p:cNvSpPr/>
+          <p:nvPr/>
+        </p:nvSpPr>
+        <p:spPr>
+          <a:xfrm>
+            <a:off x="9994392" y="6400800"/>
+            <a:ext cx="1371600" cy="274320"/>
+          </a:xfrm>
+          <a:prstGeom prst="rect">
+            <a:avLst/>
+          </a:prstGeom>
+          <a:noFill/>
+          <a:ln/>
+        </p:spPr>
+        <p:txBody>
+          <a:bodyPr wrap="square" rtlCol="0" anchor="ctr"/>
+          <a:lstStyle/>
+          <a:p>
+            <a:pPr algn="r" indent="0" marL="0">
+              <a:buNone/>
+            </a:pPr>
+            <a:r>
+              <a:rPr lang="en-US" sz="900" spc="200" kern="0" dirty="0">
+                <a:solidFill>
+                  <a:srgbClr val="FF2D2D"/>
+                </a:solidFill>
+                <a:latin typeface="Consolas" pitchFamily="34" charset="0"/>
+                <a:ea typeface="Consolas" pitchFamily="34" charset="-122"/>
+                <a:cs typeface="Consolas" pitchFamily="34" charset="-120"/>
+              </a:rPr>
+              <a:t>12</a:t>
+            </a:r>
+            <a:endParaRPr lang="en-US" sz="900" dirty="0"/>
+          </a:p>
+        </p:txBody>
+      </p:sp>
+      <p:sp>
+        <p:nvSpPr>
+          <p:cNvPr id="19" name="Text 17"/>
+          <p:cNvSpPr/>
+          <p:nvPr/>
+        </p:nvSpPr>
+        <p:spPr>
+          <a:xfrm>
+            <a:off x="822960" y="640080"/>
+            <a:ext cx="7315200" cy="292608"/>
+          </a:xfrm>
+          <a:prstGeom prst="rect">
+            <a:avLst/>
+          </a:prstGeom>
+          <a:noFill/>
+          <a:ln/>
+        </p:spPr>
+        <p:txBody>
+          <a:bodyPr wrap="square" rtlCol="0" anchor="ctr"/>
+          <a:lstStyle/>
+          <a:p>
+            <a:pPr algn="l" indent="0" marL="0">
+              <a:buNone/>
+            </a:pPr>
+            <a:r>
+              <a:rPr lang="en-US" sz="1200" b="1" spc="300" kern="0" dirty="0">
+                <a:solidFill>
+                  <a:srgbClr val="FF2D2D"/>
+                </a:solidFill>
+                <a:latin typeface="Consolas" pitchFamily="34" charset="0"/>
+                <a:ea typeface="Consolas" pitchFamily="34" charset="-122"/>
+                <a:cs typeface="Consolas" pitchFamily="34" charset="-120"/>
+              </a:rPr>
+              <a:t>SCALABILITY &amp; FEASIBILITY</a:t>
+            </a:r>
+            <a:endParaRPr lang="en-US" sz="1200" dirty="0"/>
+          </a:p>
+        </p:txBody>
+      </p:sp>
+      <p:sp>
+        <p:nvSpPr>
+          <p:cNvPr id="20" name="Text 18"/>
+          <p:cNvSpPr/>
+          <p:nvPr/>
+        </p:nvSpPr>
+        <p:spPr>
+          <a:xfrm>
+            <a:off x="822960" y="969264"/>
+            <a:ext cx="10543032" cy="914400"/>
+          </a:xfrm>
+          <a:prstGeom prst="rect">
+            <a:avLst/>
+          </a:prstGeom>
+          <a:noFill/>
+          <a:ln/>
+        </p:spPr>
+        <p:txBody>
+          <a:bodyPr wrap="square" rtlCol="0" anchor="ctr"/>
+          <a:lstStyle/>
+          <a:p>
+            <a:pPr algn="l" indent="0" marL="0">
+              <a:buNone/>
+            </a:pPr>
+            <a:r>
+              <a:rPr lang="en-US" sz="3400" b="1" dirty="0">
+                <a:solidFill>
+                  <a:srgbClr val="F4F6F8"/>
+                </a:solidFill>
+                <a:latin typeface="Arial" pitchFamily="34" charset="0"/>
+                <a:ea typeface="Arial" pitchFamily="34" charset="-122"/>
+                <a:cs typeface="Arial" pitchFamily="34" charset="-120"/>
+              </a:rPr>
+              <a:t>Ready today, built to grow</a:t>
+            </a:r>
+            <a:endParaRPr lang="en-US" sz="3400" dirty="0"/>
+          </a:p>
+        </p:txBody>
+      </p:sp>
+      <p:sp>
+        <p:nvSpPr>
+          <p:cNvPr id="21" name="Shape 19"/>
+          <p:cNvSpPr/>
+          <p:nvPr/>
+        </p:nvSpPr>
+        <p:spPr>
+          <a:xfrm>
+            <a:off x="822960" y="2377440"/>
+            <a:ext cx="5042916" cy="3291840"/>
+          </a:xfrm>
+          <a:prstGeom prst="roundRect">
+            <a:avLst>
+              <a:gd name="adj" fmla="val 1667"/>
+            </a:avLst>
+          </a:prstGeom>
+          <a:solidFill>
+            <a:srgbClr val="121417"/>
+          </a:solidFill>
+          <a:ln w="12700">
+            <a:solidFill>
+              <a:srgbClr val="2A2D33"/>
+            </a:solidFill>
+            <a:prstDash val="solid"/>
+          </a:ln>
+        </p:spPr>
+      </p:sp>
+      <p:sp>
+        <p:nvSpPr>
+          <p:cNvPr id="22" name="Shape 20"/>
+          <p:cNvSpPr/>
+          <p:nvPr/>
+        </p:nvSpPr>
+        <p:spPr>
+          <a:xfrm>
+            <a:off x="1051560" y="2377440"/>
+            <a:ext cx="4585716" cy="27432"/>
+          </a:xfrm>
+          <a:prstGeom prst="rect">
+            <a:avLst/>
+          </a:prstGeom>
+          <a:solidFill>
+            <a:srgbClr val="8A6A4E"/>
+          </a:solidFill>
+          <a:ln/>
+        </p:spPr>
+      </p:sp>
+      <p:sp>
+        <p:nvSpPr>
+          <p:cNvPr id="23" name="Text 21"/>
+          <p:cNvSpPr/>
+          <p:nvPr/>
+        </p:nvSpPr>
+        <p:spPr>
+          <a:xfrm>
+            <a:off x="1097280" y="2606040"/>
+            <a:ext cx="4494276" cy="320040"/>
+          </a:xfrm>
+          <a:prstGeom prst="rect">
+            <a:avLst/>
+          </a:prstGeom>
+          <a:noFill/>
+          <a:ln/>
+        </p:spPr>
+        <p:txBody>
+          <a:bodyPr wrap="square" rtlCol="0" anchor="ctr"/>
+          <a:lstStyle/>
+          <a:p>
+            <a:pPr indent="0" marL="0">
+              <a:buNone/>
+            </a:pPr>
+            <a:r>
+              <a:rPr lang="en-US" sz="1300" b="1" spc="200" kern="0" dirty="0">
+                <a:solidFill>
+                  <a:srgbClr val="FF2D2D"/>
+                </a:solidFill>
+                <a:latin typeface="Consolas" pitchFamily="34" charset="0"/>
+                <a:ea typeface="Consolas" pitchFamily="34" charset="-122"/>
+                <a:cs typeface="Consolas" pitchFamily="34" charset="-120"/>
+              </a:rPr>
+              <a:t>WHY IT SCALES</a:t>
+            </a:r>
+            <a:endParaRPr lang="en-US" sz="1300" dirty="0"/>
+          </a:p>
+        </p:txBody>
+      </p:sp>
+      <p:sp>
+        <p:nvSpPr>
+          <p:cNvPr id="24" name="Shape 22"/>
+          <p:cNvSpPr/>
+          <p:nvPr/>
+        </p:nvSpPr>
+        <p:spPr>
+          <a:xfrm>
+            <a:off x="1097280" y="3108960"/>
+            <a:ext cx="146304" cy="146304"/>
+          </a:xfrm>
+          <a:prstGeom prst="ellipse">
+            <a:avLst/>
+          </a:prstGeom>
+          <a:solidFill>
+            <a:srgbClr val="2ECC71"/>
+          </a:solidFill>
+          <a:ln/>
+        </p:spPr>
+      </p:sp>
+      <p:sp>
+        <p:nvSpPr>
+          <p:cNvPr id="25" name="Text 23"/>
+          <p:cNvSpPr/>
+          <p:nvPr/>
+        </p:nvSpPr>
+        <p:spPr>
+          <a:xfrm>
+            <a:off x="1389888" y="3063240"/>
+            <a:ext cx="4219956" cy="274320"/>
+          </a:xfrm>
+          <a:prstGeom prst="rect">
+            <a:avLst/>
+          </a:prstGeom>
+          <a:noFill/>
+          <a:ln/>
+        </p:spPr>
+        <p:txBody>
+          <a:bodyPr wrap="square" rtlCol="0" anchor="ctr"/>
+          <a:lstStyle/>
+          <a:p>
+            <a:pPr indent="0" marL="0">
+              <a:buNone/>
+            </a:pPr>
+            <a:r>
+              <a:rPr lang="en-US" sz="1500" b="1" dirty="0">
+                <a:solidFill>
+                  <a:srgbClr val="F4F6F8"/>
+                </a:solidFill>
+                <a:latin typeface="Arial" pitchFamily="34" charset="0"/>
+                <a:ea typeface="Arial" pitchFamily="34" charset="-122"/>
+                <a:cs typeface="Arial" pitchFamily="34" charset="-120"/>
+              </a:rPr>
+              <a:t>Client-side compute</a:t>
+            </a:r>
+            <a:endParaRPr lang="en-US" sz="1500" dirty="0"/>
+          </a:p>
+        </p:txBody>
+      </p:sp>
+      <p:sp>
+        <p:nvSpPr>
+          <p:cNvPr id="26" name="Text 24"/>
+          <p:cNvSpPr/>
+          <p:nvPr/>
+        </p:nvSpPr>
+        <p:spPr>
+          <a:xfrm>
+            <a:off x="1389888" y="3355848"/>
+            <a:ext cx="4219956" cy="548640"/>
+          </a:xfrm>
+          <a:prstGeom prst="rect">
+            <a:avLst/>
+          </a:prstGeom>
+          <a:noFill/>
+          <a:ln/>
+        </p:spPr>
+        <p:txBody>
+          <a:bodyPr wrap="square" rtlCol="0" anchor="ctr"/>
+          <a:lstStyle/>
+          <a:p>
+            <a:pPr indent="0" marL="0">
+              <a:lnSpc>
+                <a:spcPct val="110000"/>
+              </a:lnSpc>
+              <a:buNone/>
+            </a:pPr>
+            <a:r>
+              <a:rPr lang="en-US" sz="1200" dirty="0">
+                <a:solidFill>
+                  <a:srgbClr val="A9B2BD"/>
+                </a:solidFill>
+                <a:latin typeface="Arial" pitchFamily="34" charset="0"/>
+                <a:ea typeface="Arial" pitchFamily="34" charset="-122"/>
+                <a:cs typeface="Arial" pitchFamily="34" charset="-120"/>
+              </a:rPr>
+              <a:t>The 3D lab and circuit engine run in the user’s browser — adding users costs us almost nothing.</a:t>
+            </a:r>
+            <a:endParaRPr lang="en-US" sz="1200" dirty="0"/>
+          </a:p>
+        </p:txBody>
+      </p:sp>
+      <p:sp>
+        <p:nvSpPr>
+          <p:cNvPr id="27" name="Shape 25"/>
+          <p:cNvSpPr/>
+          <p:nvPr/>
+        </p:nvSpPr>
+        <p:spPr>
+          <a:xfrm>
+            <a:off x="1097280" y="3977640"/>
+            <a:ext cx="146304" cy="146304"/>
+          </a:xfrm>
+          <a:prstGeom prst="ellipse">
+            <a:avLst/>
+          </a:prstGeom>
+          <a:solidFill>
+            <a:srgbClr val="2ECC71"/>
+          </a:solidFill>
+          <a:ln/>
+        </p:spPr>
+      </p:sp>
+      <p:sp>
+        <p:nvSpPr>
+          <p:cNvPr id="28" name="Text 26"/>
+          <p:cNvSpPr/>
+          <p:nvPr/>
+        </p:nvSpPr>
+        <p:spPr>
+          <a:xfrm>
+            <a:off x="1389888" y="3931920"/>
+            <a:ext cx="4219956" cy="274320"/>
+          </a:xfrm>
+          <a:prstGeom prst="rect">
+            <a:avLst/>
+          </a:prstGeom>
+          <a:noFill/>
+          <a:ln/>
+        </p:spPr>
+        <p:txBody>
+          <a:bodyPr wrap="square" rtlCol="0" anchor="ctr"/>
+          <a:lstStyle/>
+          <a:p>
+            <a:pPr indent="0" marL="0">
+              <a:buNone/>
+            </a:pPr>
+            <a:r>
+              <a:rPr lang="en-US" sz="1500" b="1" dirty="0">
+                <a:solidFill>
+                  <a:srgbClr val="F4F6F8"/>
+                </a:solidFill>
+                <a:latin typeface="Arial" pitchFamily="34" charset="0"/>
+                <a:ea typeface="Arial" pitchFamily="34" charset="-122"/>
+                <a:cs typeface="Arial" pitchFamily="34" charset="-120"/>
+              </a:rPr>
+              <a:t>Edge-hosted &amp; serverless</a:t>
+            </a:r>
+            <a:endParaRPr lang="en-US" sz="1500" dirty="0"/>
+          </a:p>
+        </p:txBody>
+      </p:sp>
+      <p:sp>
+        <p:nvSpPr>
+          <p:cNvPr id="29" name="Text 27"/>
+          <p:cNvSpPr/>
+          <p:nvPr/>
+        </p:nvSpPr>
+        <p:spPr>
+          <a:xfrm>
+            <a:off x="1389888" y="4224528"/>
+            <a:ext cx="4219956" cy="548640"/>
+          </a:xfrm>
+          <a:prstGeom prst="rect">
+            <a:avLst/>
+          </a:prstGeom>
+          <a:noFill/>
+          <a:ln/>
+        </p:spPr>
+        <p:txBody>
+          <a:bodyPr wrap="square" rtlCol="0" anchor="ctr"/>
+          <a:lstStyle/>
+          <a:p>
+            <a:pPr indent="0" marL="0">
+              <a:lnSpc>
+                <a:spcPct val="110000"/>
+              </a:lnSpc>
+              <a:buNone/>
+            </a:pPr>
+            <a:r>
+              <a:rPr lang="en-US" sz="1200" dirty="0">
+                <a:solidFill>
+                  <a:srgbClr val="A9B2BD"/>
+                </a:solidFill>
+                <a:latin typeface="Arial" pitchFamily="34" charset="0"/>
+                <a:ea typeface="Arial" pitchFamily="34" charset="-122"/>
+                <a:cs typeface="Arial" pitchFamily="34" charset="-120"/>
+              </a:rPr>
+              <a:t>Next.js on Vercel scales automatically with demand, from 10 users to 100,000.</a:t>
+            </a:r>
+            <a:endParaRPr lang="en-US" sz="1200" dirty="0"/>
+          </a:p>
+        </p:txBody>
+      </p:sp>
+      <p:sp>
+        <p:nvSpPr>
+          <p:cNvPr id="30" name="Shape 28"/>
+          <p:cNvSpPr/>
+          <p:nvPr/>
+        </p:nvSpPr>
+        <p:spPr>
+          <a:xfrm>
+            <a:off x="1097280" y="4846320"/>
+            <a:ext cx="146304" cy="146304"/>
+          </a:xfrm>
+          <a:prstGeom prst="ellipse">
+            <a:avLst/>
+          </a:prstGeom>
+          <a:solidFill>
+            <a:srgbClr val="2ECC71"/>
+          </a:solidFill>
+          <a:ln/>
+        </p:spPr>
+      </p:sp>
+      <p:sp>
+        <p:nvSpPr>
+          <p:cNvPr id="31" name="Text 29"/>
+          <p:cNvSpPr/>
+          <p:nvPr/>
+        </p:nvSpPr>
+        <p:spPr>
+          <a:xfrm>
+            <a:off x="1389888" y="4800600"/>
+            <a:ext cx="4219956" cy="274320"/>
+          </a:xfrm>
+          <a:prstGeom prst="rect">
+            <a:avLst/>
+          </a:prstGeom>
+          <a:noFill/>
+          <a:ln/>
+        </p:spPr>
+        <p:txBody>
+          <a:bodyPr wrap="square" rtlCol="0" anchor="ctr"/>
+          <a:lstStyle/>
+          <a:p>
+            <a:pPr indent="0" marL="0">
+              <a:buNone/>
+            </a:pPr>
+            <a:r>
+              <a:rPr lang="en-US" sz="1500" b="1" dirty="0">
+                <a:solidFill>
+                  <a:srgbClr val="F4F6F8"/>
+                </a:solidFill>
+                <a:latin typeface="Arial" pitchFamily="34" charset="0"/>
+                <a:ea typeface="Arial" pitchFamily="34" charset="-122"/>
+                <a:cs typeface="Arial" pitchFamily="34" charset="-120"/>
+              </a:rPr>
+              <a:t>Content, not code</a:t>
+            </a:r>
+            <a:endParaRPr lang="en-US" sz="1500" dirty="0"/>
+          </a:p>
+        </p:txBody>
+      </p:sp>
+      <p:sp>
+        <p:nvSpPr>
+          <p:cNvPr id="32" name="Text 30"/>
+          <p:cNvSpPr/>
+          <p:nvPr/>
+        </p:nvSpPr>
+        <p:spPr>
+          <a:xfrm>
+            <a:off x="1389888" y="5093208"/>
+            <a:ext cx="4219956" cy="548640"/>
+          </a:xfrm>
+          <a:prstGeom prst="rect">
+            <a:avLst/>
+          </a:prstGeom>
+          <a:noFill/>
+          <a:ln/>
+        </p:spPr>
+        <p:txBody>
+          <a:bodyPr wrap="square" rtlCol="0" anchor="ctr"/>
+          <a:lstStyle/>
+          <a:p>
+            <a:pPr indent="0" marL="0">
+              <a:lnSpc>
+                <a:spcPct val="110000"/>
+              </a:lnSpc>
+              <a:buNone/>
+            </a:pPr>
+            <a:r>
+              <a:rPr lang="en-US" sz="1200" dirty="0">
+                <a:solidFill>
+                  <a:srgbClr val="A9B2BD"/>
+                </a:solidFill>
+                <a:latin typeface="Arial" pitchFamily="34" charset="0"/>
+                <a:ea typeface="Arial" pitchFamily="34" charset="-122"/>
+                <a:cs typeface="Arial" pitchFamily="34" charset="-120"/>
+              </a:rPr>
+              <a:t>New components and projects are data-driven — the library grows without re-engineering.</a:t>
+            </a:r>
+            <a:endParaRPr lang="en-US" sz="1200" dirty="0"/>
+          </a:p>
+        </p:txBody>
+      </p:sp>
+      <p:sp>
+        <p:nvSpPr>
+          <p:cNvPr id="33" name="Shape 31"/>
+          <p:cNvSpPr/>
+          <p:nvPr/>
+        </p:nvSpPr>
+        <p:spPr>
+          <a:xfrm>
+            <a:off x="6323076" y="2377440"/>
+            <a:ext cx="5042916" cy="3291840"/>
+          </a:xfrm>
+          <a:prstGeom prst="roundRect">
+            <a:avLst>
+              <a:gd name="adj" fmla="val 1667"/>
+            </a:avLst>
+          </a:prstGeom>
+          <a:solidFill>
+            <a:srgbClr val="121417"/>
+          </a:solidFill>
+          <a:ln w="12700">
+            <a:solidFill>
+              <a:srgbClr val="2A2D33"/>
+            </a:solidFill>
+            <a:prstDash val="solid"/>
+          </a:ln>
+        </p:spPr>
+      </p:sp>
+      <p:sp>
+        <p:nvSpPr>
+          <p:cNvPr id="34" name="Shape 32"/>
+          <p:cNvSpPr/>
+          <p:nvPr/>
+        </p:nvSpPr>
+        <p:spPr>
+          <a:xfrm>
+            <a:off x="6551676" y="2377440"/>
+            <a:ext cx="4585716" cy="27432"/>
+          </a:xfrm>
+          <a:prstGeom prst="rect">
+            <a:avLst/>
+          </a:prstGeom>
+          <a:solidFill>
+            <a:srgbClr val="8A6A4E"/>
+          </a:solidFill>
+          <a:ln/>
+        </p:spPr>
+      </p:sp>
+      <p:sp>
+        <p:nvSpPr>
+          <p:cNvPr id="35" name="Text 33"/>
+          <p:cNvSpPr/>
+          <p:nvPr/>
+        </p:nvSpPr>
+        <p:spPr>
+          <a:xfrm>
+            <a:off x="6597396" y="2606040"/>
+            <a:ext cx="4494276" cy="320040"/>
+          </a:xfrm>
+          <a:prstGeom prst="rect">
+            <a:avLst/>
+          </a:prstGeom>
+          <a:noFill/>
+          <a:ln/>
+        </p:spPr>
+        <p:txBody>
+          <a:bodyPr wrap="square" rtlCol="0" anchor="ctr"/>
+          <a:lstStyle/>
+          <a:p>
+            <a:pPr indent="0" marL="0">
+              <a:buNone/>
+            </a:pPr>
+            <a:r>
+              <a:rPr lang="en-US" sz="1300" b="1" spc="200" kern="0" dirty="0">
+                <a:solidFill>
+                  <a:srgbClr val="FF2D2D"/>
+                </a:solidFill>
+                <a:latin typeface="Consolas" pitchFamily="34" charset="0"/>
+                <a:ea typeface="Consolas" pitchFamily="34" charset="-122"/>
+                <a:cs typeface="Consolas" pitchFamily="34" charset="-120"/>
+              </a:rPr>
+              <a:t>FEASIBILITY — ALREADY REAL</a:t>
+            </a:r>
+            <a:endParaRPr lang="en-US" sz="1300" dirty="0"/>
+          </a:p>
+        </p:txBody>
+      </p:sp>
+      <p:sp>
+        <p:nvSpPr>
+          <p:cNvPr id="36" name="Text 34"/>
+          <p:cNvSpPr/>
+          <p:nvPr/>
+        </p:nvSpPr>
+        <p:spPr>
+          <a:xfrm>
+            <a:off x="6597396" y="3108960"/>
+            <a:ext cx="274320" cy="320040"/>
+          </a:xfrm>
+          <a:prstGeom prst="rect">
+            <a:avLst/>
+          </a:prstGeom>
+          <a:noFill/>
+          <a:ln/>
+        </p:spPr>
+        <p:txBody>
+          <a:bodyPr wrap="square" rtlCol="0" anchor="ctr"/>
+          <a:lstStyle/>
+          <a:p>
+            <a:pPr indent="0" marL="0">
+              <a:buNone/>
+            </a:pPr>
+            <a:r>
+              <a:rPr lang="en-US" sz="1400" b="1" dirty="0">
+                <a:solidFill>
+                  <a:srgbClr val="2ECC71"/>
+                </a:solidFill>
+                <a:latin typeface="Arial" pitchFamily="34" charset="0"/>
+                <a:ea typeface="Arial" pitchFamily="34" charset="-122"/>
+                <a:cs typeface="Arial" pitchFamily="34" charset="-120"/>
+              </a:rPr>
+              <a:t>✓</a:t>
+            </a:r>
+            <a:endParaRPr lang="en-US" sz="1400" dirty="0"/>
+          </a:p>
+        </p:txBody>
+      </p:sp>
+      <p:sp>
+        <p:nvSpPr>
+          <p:cNvPr id="37" name="Text 35"/>
+          <p:cNvSpPr/>
+          <p:nvPr/>
+        </p:nvSpPr>
+        <p:spPr>
+          <a:xfrm>
+            <a:off x="6890004" y="3108960"/>
+            <a:ext cx="4219956" cy="411480"/>
+          </a:xfrm>
+          <a:prstGeom prst="rect">
+            <a:avLst/>
+          </a:prstGeom>
+          <a:noFill/>
+          <a:ln/>
+        </p:spPr>
+        <p:txBody>
+          <a:bodyPr wrap="square" rtlCol="0" anchor="t"/>
+          <a:lstStyle/>
+          <a:p>
+            <a:pPr indent="0" marL="0">
+              <a:buNone/>
+            </a:pPr>
+            <a:r>
+              <a:rPr lang="en-US" sz="1350" dirty="0">
+                <a:solidFill>
+                  <a:srgbClr val="F4F6F8"/>
+                </a:solidFill>
+                <a:latin typeface="Arial" pitchFamily="34" charset="0"/>
+                <a:ea typeface="Arial" pitchFamily="34" charset="-122"/>
+                <a:cs typeface="Arial" pitchFamily="34" charset="-120"/>
+              </a:rPr>
+              <a:t>Working platform — not a mockup</a:t>
+            </a:r>
+            <a:endParaRPr lang="en-US" sz="1350" dirty="0"/>
+          </a:p>
+        </p:txBody>
+      </p:sp>
+      <p:sp>
+        <p:nvSpPr>
+          <p:cNvPr id="38" name="Text 36"/>
+          <p:cNvSpPr/>
+          <p:nvPr/>
+        </p:nvSpPr>
+        <p:spPr>
+          <a:xfrm>
+            <a:off x="6597396" y="3611880"/>
+            <a:ext cx="274320" cy="320040"/>
+          </a:xfrm>
+          <a:prstGeom prst="rect">
+            <a:avLst/>
+          </a:prstGeom>
+          <a:noFill/>
+          <a:ln/>
+        </p:spPr>
+        <p:txBody>
+          <a:bodyPr wrap="square" rtlCol="0" anchor="ctr"/>
+          <a:lstStyle/>
+          <a:p>
+            <a:pPr indent="0" marL="0">
+              <a:buNone/>
+            </a:pPr>
+            <a:r>
+              <a:rPr lang="en-US" sz="1400" b="1" dirty="0">
+                <a:solidFill>
+                  <a:srgbClr val="2ECC71"/>
+                </a:solidFill>
+                <a:latin typeface="Arial" pitchFamily="34" charset="0"/>
+                <a:ea typeface="Arial" pitchFamily="34" charset="-122"/>
+                <a:cs typeface="Arial" pitchFamily="34" charset="-120"/>
+              </a:rPr>
+              <a:t>✓</a:t>
+            </a:r>
+            <a:endParaRPr lang="en-US" sz="1400" dirty="0"/>
+          </a:p>
+        </p:txBody>
+      </p:sp>
+      <p:sp>
+        <p:nvSpPr>
+          <p:cNvPr id="39" name="Text 37"/>
+          <p:cNvSpPr/>
+          <p:nvPr/>
+        </p:nvSpPr>
+        <p:spPr>
+          <a:xfrm>
+            <a:off x="6890004" y="3611880"/>
+            <a:ext cx="4219956" cy="411480"/>
+          </a:xfrm>
+          <a:prstGeom prst="rect">
+            <a:avLst/>
+          </a:prstGeom>
+          <a:noFill/>
+          <a:ln/>
+        </p:spPr>
+        <p:txBody>
+          <a:bodyPr wrap="square" rtlCol="0" anchor="t"/>
+          <a:lstStyle/>
+          <a:p>
+            <a:pPr indent="0" marL="0">
+              <a:buNone/>
+            </a:pPr>
+            <a:r>
+              <a:rPr lang="en-US" sz="1350" dirty="0">
+                <a:solidFill>
+                  <a:srgbClr val="F4F6F8"/>
+                </a:solidFill>
+                <a:latin typeface="Arial" pitchFamily="34" charset="0"/>
+                <a:ea typeface="Arial" pitchFamily="34" charset="-122"/>
+                <a:cs typeface="Arial" pitchFamily="34" charset="-120"/>
+              </a:rPr>
+              <a:t>Live 3D lab, circuit engine &amp; AI tutor ship today</a:t>
+            </a:r>
+            <a:endParaRPr lang="en-US" sz="1350" dirty="0"/>
+          </a:p>
+        </p:txBody>
+      </p:sp>
+      <p:sp>
+        <p:nvSpPr>
+          <p:cNvPr id="40" name="Text 38"/>
+          <p:cNvSpPr/>
+          <p:nvPr/>
+        </p:nvSpPr>
+        <p:spPr>
+          <a:xfrm>
+            <a:off x="6597396" y="4114800"/>
+            <a:ext cx="274320" cy="320040"/>
+          </a:xfrm>
+          <a:prstGeom prst="rect">
+            <a:avLst/>
+          </a:prstGeom>
+          <a:noFill/>
+          <a:ln/>
+        </p:spPr>
+        <p:txBody>
+          <a:bodyPr wrap="square" rtlCol="0" anchor="ctr"/>
+          <a:lstStyle/>
+          <a:p>
+            <a:pPr indent="0" marL="0">
+              <a:buNone/>
+            </a:pPr>
+            <a:r>
+              <a:rPr lang="en-US" sz="1400" b="1" dirty="0">
+                <a:solidFill>
+                  <a:srgbClr val="2ECC71"/>
+                </a:solidFill>
+                <a:latin typeface="Arial" pitchFamily="34" charset="0"/>
+                <a:ea typeface="Arial" pitchFamily="34" charset="-122"/>
+                <a:cs typeface="Arial" pitchFamily="34" charset="-120"/>
+              </a:rPr>
+              <a:t>✓</a:t>
+            </a:r>
+            <a:endParaRPr lang="en-US" sz="1400" dirty="0"/>
+          </a:p>
+        </p:txBody>
+      </p:sp>
+      <p:sp>
+        <p:nvSpPr>
+          <p:cNvPr id="41" name="Text 39"/>
+          <p:cNvSpPr/>
+          <p:nvPr/>
+        </p:nvSpPr>
+        <p:spPr>
+          <a:xfrm>
+            <a:off x="6890004" y="4114800"/>
+            <a:ext cx="4219956" cy="411480"/>
+          </a:xfrm>
+          <a:prstGeom prst="rect">
+            <a:avLst/>
+          </a:prstGeom>
+          <a:noFill/>
+          <a:ln/>
+        </p:spPr>
+        <p:txBody>
+          <a:bodyPr wrap="square" rtlCol="0" anchor="t"/>
+          <a:lstStyle/>
+          <a:p>
+            <a:pPr indent="0" marL="0">
+              <a:buNone/>
+            </a:pPr>
+            <a:r>
+              <a:rPr lang="en-US" sz="1350" dirty="0">
+                <a:solidFill>
+                  <a:srgbClr val="F4F6F8"/>
+                </a:solidFill>
+                <a:latin typeface="Arial" pitchFamily="34" charset="0"/>
+                <a:ea typeface="Arial" pitchFamily="34" charset="-122"/>
+                <a:cs typeface="Arial" pitchFamily="34" charset="-120"/>
+              </a:rPr>
+              <a:t>Built on proven, production-grade web tech</a:t>
+            </a:r>
+            <a:endParaRPr lang="en-US" sz="1350" dirty="0"/>
+          </a:p>
+        </p:txBody>
+      </p:sp>
+      <p:sp>
+        <p:nvSpPr>
+          <p:cNvPr id="42" name="Text 40"/>
+          <p:cNvSpPr/>
+          <p:nvPr/>
+        </p:nvSpPr>
+        <p:spPr>
+          <a:xfrm>
+            <a:off x="6597396" y="4617720"/>
+            <a:ext cx="274320" cy="320040"/>
+          </a:xfrm>
+          <a:prstGeom prst="rect">
+            <a:avLst/>
+          </a:prstGeom>
+          <a:noFill/>
+          <a:ln/>
+        </p:spPr>
+        <p:txBody>
+          <a:bodyPr wrap="square" rtlCol="0" anchor="ctr"/>
+          <a:lstStyle/>
+          <a:p>
+            <a:pPr indent="0" marL="0">
+              <a:buNone/>
+            </a:pPr>
+            <a:r>
+              <a:rPr lang="en-US" sz="1400" b="1" dirty="0">
+                <a:solidFill>
+                  <a:srgbClr val="2ECC71"/>
+                </a:solidFill>
+                <a:latin typeface="Arial" pitchFamily="34" charset="0"/>
+                <a:ea typeface="Arial" pitchFamily="34" charset="-122"/>
+                <a:cs typeface="Arial" pitchFamily="34" charset="-120"/>
+              </a:rPr>
+              <a:t>✓</a:t>
+            </a:r>
+            <a:endParaRPr lang="en-US" sz="1400" dirty="0"/>
+          </a:p>
+        </p:txBody>
+      </p:sp>
+      <p:sp>
+        <p:nvSpPr>
+          <p:cNvPr id="43" name="Text 41"/>
+          <p:cNvSpPr/>
+          <p:nvPr/>
+        </p:nvSpPr>
+        <p:spPr>
+          <a:xfrm>
+            <a:off x="6890004" y="4617720"/>
+            <a:ext cx="4219956" cy="411480"/>
+          </a:xfrm>
+          <a:prstGeom prst="rect">
+            <a:avLst/>
+          </a:prstGeom>
+          <a:noFill/>
+          <a:ln/>
+        </p:spPr>
+        <p:txBody>
+          <a:bodyPr wrap="square" rtlCol="0" anchor="t"/>
+          <a:lstStyle/>
+          <a:p>
+            <a:pPr indent="0" marL="0">
+              <a:buNone/>
+            </a:pPr>
+            <a:r>
+              <a:rPr lang="en-US" sz="1350" dirty="0">
+                <a:solidFill>
+                  <a:srgbClr val="F4F6F8"/>
+                </a:solidFill>
+                <a:latin typeface="Arial" pitchFamily="34" charset="0"/>
+                <a:ea typeface="Arial" pitchFamily="34" charset="-122"/>
+                <a:cs typeface="Arial" pitchFamily="34" charset="-120"/>
+              </a:rPr>
+              <a:t>No supply chain, inventory, or hardware logistics</a:t>
+            </a:r>
+            <a:endParaRPr lang="en-US" sz="1350" dirty="0"/>
+          </a:p>
+        </p:txBody>
+      </p:sp>
+      <p:sp>
+        <p:nvSpPr>
+          <p:cNvPr id="44" name="Text 42"/>
+          <p:cNvSpPr/>
+          <p:nvPr/>
+        </p:nvSpPr>
+        <p:spPr>
+          <a:xfrm>
+            <a:off x="6597396" y="5120640"/>
+            <a:ext cx="274320" cy="320040"/>
+          </a:xfrm>
+          <a:prstGeom prst="rect">
+            <a:avLst/>
+          </a:prstGeom>
+          <a:noFill/>
+          <a:ln/>
+        </p:spPr>
+        <p:txBody>
+          <a:bodyPr wrap="square" rtlCol="0" anchor="ctr"/>
+          <a:lstStyle/>
+          <a:p>
+            <a:pPr indent="0" marL="0">
+              <a:buNone/>
+            </a:pPr>
+            <a:r>
+              <a:rPr lang="en-US" sz="1400" b="1" dirty="0">
+                <a:solidFill>
+                  <a:srgbClr val="2ECC71"/>
+                </a:solidFill>
+                <a:latin typeface="Arial" pitchFamily="34" charset="0"/>
+                <a:ea typeface="Arial" pitchFamily="34" charset="-122"/>
+                <a:cs typeface="Arial" pitchFamily="34" charset="-120"/>
+              </a:rPr>
+              <a:t>✓</a:t>
+            </a:r>
+            <a:endParaRPr lang="en-US" sz="1400" dirty="0"/>
+          </a:p>
+        </p:txBody>
+      </p:sp>
+      <p:sp>
+        <p:nvSpPr>
+          <p:cNvPr id="45" name="Text 43"/>
+          <p:cNvSpPr/>
+          <p:nvPr/>
+        </p:nvSpPr>
+        <p:spPr>
+          <a:xfrm>
+            <a:off x="6890004" y="5120640"/>
+            <a:ext cx="4219956" cy="411480"/>
+          </a:xfrm>
+          <a:prstGeom prst="rect">
+            <a:avLst/>
+          </a:prstGeom>
+          <a:noFill/>
+          <a:ln/>
+        </p:spPr>
+        <p:txBody>
+          <a:bodyPr wrap="square" rtlCol="0" anchor="t"/>
+          <a:lstStyle/>
+          <a:p>
+            <a:pPr indent="0" marL="0">
+              <a:buNone/>
+            </a:pPr>
+            <a:r>
+              <a:rPr lang="en-US" sz="1350" dirty="0">
+                <a:solidFill>
+                  <a:srgbClr val="F4F6F8"/>
+                </a:solidFill>
+                <a:latin typeface="Arial" pitchFamily="34" charset="0"/>
+                <a:ea typeface="Arial" pitchFamily="34" charset="-122"/>
+                <a:cs typeface="Arial" pitchFamily="34" charset="-120"/>
+              </a:rPr>
+              <a:t>Instant global distribution via a URL</a:t>
+            </a:r>
+            <a:endParaRPr lang="en-US" sz="1350" dirty="0"/>
+          </a:p>
+        </p:txBody>
+      </p:sp>
+    </p:spTree>
+  </p:cSld>
+  <p:clrMapOvr>
+    <a:masterClrMapping/>
+  </p:clrMapOvr>
+</p:sld>
+</file>
+
+<file path=ppt/slides/slide13.xml><?xml version="1.0" encoding="utf-8"?>
+<p:sld xmlns:a="http://schemas.openxmlformats.org/drawingml/2006/main" xmlns:r="http://schemas.openxmlformats.org/officeDocument/2006/relationships" xmlns:p="http://schemas.openxmlformats.org/presentationml/2006/main">
+  <p:cSld name="Slide 13">
+    <p:bg>
+      <p:bgPr>
+        <a:solidFill>
+          <a:srgbClr val="0B0D0F"/>
+        </a:solidFill>
+      </p:bgPr>
+    </p:bg>
+    <p:spTree>
+      <p:nvGrpSpPr>
+        <p:cNvPr id="1" name=""/>
+        <p:cNvGrpSpPr/>
+        <p:nvPr/>
+      </p:nvGrpSpPr>
+      <p:grpSpPr>
+        <a:xfrm>
+          <a:off x="0" y="0"/>
+          <a:ext cx="0" cy="0"/>
+          <a:chOff x="0" y="0"/>
+          <a:chExt cx="0" cy="0"/>
+        </a:xfrm>
+      </p:grpSpPr>
+      <p:sp>
+        <p:nvSpPr>
+          <p:cNvPr id="2" name="Shape 0"/>
+          <p:cNvSpPr/>
+          <p:nvPr/>
+        </p:nvSpPr>
+        <p:spPr>
+          <a:xfrm>
+            <a:off x="937612" y="0"/>
+            <a:ext cx="0" cy="6858000"/>
+          </a:xfrm>
+          <a:prstGeom prst="line">
+            <a:avLst/>
+          </a:prstGeom>
+          <a:noFill/>
+          <a:ln w="6350">
+            <a:solidFill>
+              <a:srgbClr val="191B1F"/>
+            </a:solidFill>
+            <a:prstDash val="solid"/>
+          </a:ln>
+        </p:spPr>
+      </p:sp>
+      <p:sp>
+        <p:nvSpPr>
+          <p:cNvPr id="3" name="Shape 1"/>
+          <p:cNvSpPr/>
+          <p:nvPr/>
+        </p:nvSpPr>
+        <p:spPr>
+          <a:xfrm>
+            <a:off x="1875223" y="0"/>
+            <a:ext cx="0" cy="6858000"/>
+          </a:xfrm>
+          <a:prstGeom prst="line">
+            <a:avLst/>
+          </a:prstGeom>
+          <a:noFill/>
+          <a:ln w="6350">
+            <a:solidFill>
+              <a:srgbClr val="191B1F"/>
+            </a:solidFill>
+            <a:prstDash val="solid"/>
+          </a:ln>
+        </p:spPr>
+      </p:sp>
+      <p:sp>
+        <p:nvSpPr>
+          <p:cNvPr id="4" name="Shape 2"/>
+          <p:cNvSpPr/>
+          <p:nvPr/>
+        </p:nvSpPr>
+        <p:spPr>
+          <a:xfrm>
+            <a:off x="2812835" y="0"/>
+            <a:ext cx="0" cy="6858000"/>
+          </a:xfrm>
+          <a:prstGeom prst="line">
+            <a:avLst/>
+          </a:prstGeom>
+          <a:noFill/>
+          <a:ln w="6350">
+            <a:solidFill>
+              <a:srgbClr val="191B1F"/>
+            </a:solidFill>
+            <a:prstDash val="solid"/>
+          </a:ln>
+        </p:spPr>
+      </p:sp>
+      <p:sp>
+        <p:nvSpPr>
+          <p:cNvPr id="5" name="Shape 3"/>
+          <p:cNvSpPr/>
+          <p:nvPr/>
+        </p:nvSpPr>
+        <p:spPr>
+          <a:xfrm>
+            <a:off x="3750447" y="0"/>
+            <a:ext cx="0" cy="6858000"/>
+          </a:xfrm>
+          <a:prstGeom prst="line">
+            <a:avLst/>
+          </a:prstGeom>
+          <a:noFill/>
+          <a:ln w="6350">
+            <a:solidFill>
+              <a:srgbClr val="191B1F"/>
+            </a:solidFill>
+            <a:prstDash val="solid"/>
+          </a:ln>
+        </p:spPr>
+      </p:sp>
+      <p:sp>
+        <p:nvSpPr>
+          <p:cNvPr id="6" name="Shape 4"/>
+          <p:cNvSpPr/>
+          <p:nvPr/>
+        </p:nvSpPr>
+        <p:spPr>
+          <a:xfrm>
+            <a:off x="4688058" y="0"/>
+            <a:ext cx="0" cy="6858000"/>
+          </a:xfrm>
+          <a:prstGeom prst="line">
+            <a:avLst/>
+          </a:prstGeom>
+          <a:noFill/>
+          <a:ln w="6350">
+            <a:solidFill>
+              <a:srgbClr val="191B1F"/>
+            </a:solidFill>
+            <a:prstDash val="solid"/>
+          </a:ln>
+        </p:spPr>
+      </p:sp>
+      <p:sp>
+        <p:nvSpPr>
+          <p:cNvPr id="7" name="Shape 5"/>
+          <p:cNvSpPr/>
+          <p:nvPr/>
+        </p:nvSpPr>
+        <p:spPr>
+          <a:xfrm>
+            <a:off x="5625670" y="0"/>
+            <a:ext cx="0" cy="6858000"/>
+          </a:xfrm>
+          <a:prstGeom prst="line">
+            <a:avLst/>
+          </a:prstGeom>
+          <a:noFill/>
+          <a:ln w="6350">
+            <a:solidFill>
+              <a:srgbClr val="191B1F"/>
+            </a:solidFill>
+            <a:prstDash val="solid"/>
+          </a:ln>
+        </p:spPr>
+      </p:sp>
+      <p:sp>
+        <p:nvSpPr>
+          <p:cNvPr id="8" name="Shape 6"/>
+          <p:cNvSpPr/>
+          <p:nvPr/>
+        </p:nvSpPr>
+        <p:spPr>
+          <a:xfrm>
+            <a:off x="6563282" y="0"/>
+            <a:ext cx="0" cy="6858000"/>
+          </a:xfrm>
+          <a:prstGeom prst="line">
+            <a:avLst/>
+          </a:prstGeom>
+          <a:noFill/>
+          <a:ln w="6350">
+            <a:solidFill>
+              <a:srgbClr val="191B1F"/>
+            </a:solidFill>
+            <a:prstDash val="solid"/>
+          </a:ln>
+        </p:spPr>
+      </p:sp>
+      <p:sp>
+        <p:nvSpPr>
+          <p:cNvPr id="9" name="Shape 7"/>
+          <p:cNvSpPr/>
+          <p:nvPr/>
+        </p:nvSpPr>
+        <p:spPr>
+          <a:xfrm>
+            <a:off x="7500894" y="0"/>
+            <a:ext cx="0" cy="6858000"/>
+          </a:xfrm>
+          <a:prstGeom prst="line">
+            <a:avLst/>
+          </a:prstGeom>
+          <a:noFill/>
+          <a:ln w="6350">
+            <a:solidFill>
+              <a:srgbClr val="191B1F"/>
+            </a:solidFill>
+            <a:prstDash val="solid"/>
+          </a:ln>
+        </p:spPr>
+      </p:sp>
+      <p:sp>
+        <p:nvSpPr>
+          <p:cNvPr id="10" name="Shape 8"/>
+          <p:cNvSpPr/>
+          <p:nvPr/>
+        </p:nvSpPr>
+        <p:spPr>
+          <a:xfrm>
+            <a:off x="8438505" y="0"/>
+            <a:ext cx="0" cy="6858000"/>
+          </a:xfrm>
+          <a:prstGeom prst="line">
+            <a:avLst/>
+          </a:prstGeom>
+          <a:noFill/>
+          <a:ln w="6350">
+            <a:solidFill>
+              <a:srgbClr val="191B1F"/>
+            </a:solidFill>
+            <a:prstDash val="solid"/>
+          </a:ln>
+        </p:spPr>
+      </p:sp>
+      <p:sp>
+        <p:nvSpPr>
+          <p:cNvPr id="11" name="Shape 9"/>
+          <p:cNvSpPr/>
+          <p:nvPr/>
+        </p:nvSpPr>
+        <p:spPr>
+          <a:xfrm>
+            <a:off x="9376117" y="0"/>
+            <a:ext cx="0" cy="6858000"/>
+          </a:xfrm>
+          <a:prstGeom prst="line">
+            <a:avLst/>
+          </a:prstGeom>
+          <a:noFill/>
+          <a:ln w="6350">
+            <a:solidFill>
+              <a:srgbClr val="191B1F"/>
+            </a:solidFill>
+            <a:prstDash val="solid"/>
+          </a:ln>
+        </p:spPr>
+      </p:sp>
+      <p:sp>
+        <p:nvSpPr>
+          <p:cNvPr id="12" name="Shape 10"/>
+          <p:cNvSpPr/>
+          <p:nvPr/>
+        </p:nvSpPr>
+        <p:spPr>
+          <a:xfrm>
+            <a:off x="10313729" y="0"/>
+            <a:ext cx="0" cy="6858000"/>
+          </a:xfrm>
+          <a:prstGeom prst="line">
+            <a:avLst/>
+          </a:prstGeom>
+          <a:noFill/>
+          <a:ln w="6350">
+            <a:solidFill>
+              <a:srgbClr val="191B1F"/>
+            </a:solidFill>
+            <a:prstDash val="solid"/>
+          </a:ln>
+        </p:spPr>
+      </p:sp>
+      <p:sp>
+        <p:nvSpPr>
+          <p:cNvPr id="13" name="Shape 11"/>
+          <p:cNvSpPr/>
+          <p:nvPr/>
+        </p:nvSpPr>
+        <p:spPr>
+          <a:xfrm>
+            <a:off x="11251340" y="0"/>
+            <a:ext cx="0" cy="6858000"/>
+          </a:xfrm>
+          <a:prstGeom prst="line">
+            <a:avLst/>
+          </a:prstGeom>
+          <a:noFill/>
+          <a:ln w="6350">
+            <a:solidFill>
+              <a:srgbClr val="191B1F"/>
+            </a:solidFill>
+            <a:prstDash val="solid"/>
+          </a:ln>
+        </p:spPr>
+      </p:sp>
+      <p:sp>
+        <p:nvSpPr>
+          <p:cNvPr id="14" name="Shape 12"/>
+          <p:cNvSpPr/>
+          <p:nvPr/>
+        </p:nvSpPr>
+        <p:spPr>
+          <a:xfrm>
+            <a:off x="0" y="0"/>
+            <a:ext cx="12188952" cy="82296"/>
+          </a:xfrm>
+          <a:prstGeom prst="rect">
+            <a:avLst/>
+          </a:prstGeom>
+          <a:solidFill>
+            <a:srgbClr val="FF2D2D"/>
+          </a:solidFill>
+          <a:ln/>
+        </p:spPr>
+      </p:sp>
+      <p:sp>
+        <p:nvSpPr>
+          <p:cNvPr id="15" name="Shape 13"/>
+          <p:cNvSpPr/>
+          <p:nvPr/>
+        </p:nvSpPr>
+        <p:spPr>
+          <a:xfrm>
+            <a:off x="0" y="82296"/>
+            <a:ext cx="12188952" cy="18288"/>
+          </a:xfrm>
+          <a:prstGeom prst="rect">
+            <a:avLst/>
+          </a:prstGeom>
+          <a:solidFill>
+            <a:srgbClr val="7A1210"/>
+          </a:solidFill>
+          <a:ln/>
+        </p:spPr>
+      </p:sp>
+      <p:sp>
+        <p:nvSpPr>
+          <p:cNvPr id="16" name="Text 14"/>
+          <p:cNvSpPr/>
+          <p:nvPr/>
+        </p:nvSpPr>
+        <p:spPr>
+          <a:xfrm>
+            <a:off x="822960" y="6400800"/>
+            <a:ext cx="2743200" cy="274320"/>
+          </a:xfrm>
+          <a:prstGeom prst="rect">
+            <a:avLst/>
+          </a:prstGeom>
+          <a:noFill/>
+          <a:ln/>
+        </p:spPr>
+        <p:txBody>
+          <a:bodyPr wrap="square" rtlCol="0" anchor="ctr"/>
+          <a:lstStyle/>
+          <a:p>
+            <a:pPr algn="l" indent="0" marL="0">
+              <a:buNone/>
+            </a:pPr>
+            <a:r>
+              <a:rPr lang="en-US" sz="900" spc="200" kern="0" dirty="0">
+                <a:solidFill>
+                  <a:srgbClr val="6B7480"/>
+                </a:solidFill>
+                <a:latin typeface="Consolas" pitchFamily="34" charset="0"/>
+                <a:ea typeface="Consolas" pitchFamily="34" charset="-122"/>
+                <a:cs typeface="Consolas" pitchFamily="34" charset="-120"/>
+              </a:rPr>
+              <a:t>YANTRAA</a:t>
+            </a:r>
+            <a:endParaRPr lang="en-US" sz="900" dirty="0"/>
+          </a:p>
+        </p:txBody>
+      </p:sp>
+      <p:sp>
+        <p:nvSpPr>
+          <p:cNvPr id="17" name="Text 15"/>
+          <p:cNvSpPr/>
+          <p:nvPr/>
+        </p:nvSpPr>
+        <p:spPr>
+          <a:xfrm>
+            <a:off x="3351276" y="6400800"/>
+            <a:ext cx="5486400" cy="274320"/>
+          </a:xfrm>
+          <a:prstGeom prst="rect">
+            <a:avLst/>
+          </a:prstGeom>
+          <a:noFill/>
+          <a:ln/>
+        </p:spPr>
+        <p:txBody>
+          <a:bodyPr wrap="square" rtlCol="0" anchor="ctr"/>
+          <a:lstStyle/>
+          <a:p>
+            <a:pPr algn="ctr" indent="0" marL="0">
+              <a:buNone/>
+            </a:pPr>
+            <a:r>
+              <a:rPr lang="en-US" sz="900" spc="200" kern="0" dirty="0">
+                <a:solidFill>
+                  <a:srgbClr val="6B7480"/>
+                </a:solidFill>
+                <a:latin typeface="Consolas" pitchFamily="34" charset="0"/>
+                <a:ea typeface="Consolas" pitchFamily="34" charset="-122"/>
+                <a:cs typeface="Consolas" pitchFamily="34" charset="-120"/>
+              </a:rPr>
+              <a:t>LEARN ELECTRONICS IN 3D</a:t>
+            </a:r>
+            <a:endParaRPr lang="en-US" sz="900" dirty="0"/>
+          </a:p>
+        </p:txBody>
+      </p:sp>
+      <p:sp>
+        <p:nvSpPr>
+          <p:cNvPr id="18" name="Text 16"/>
+          <p:cNvSpPr/>
+          <p:nvPr/>
+        </p:nvSpPr>
+        <p:spPr>
+          <a:xfrm>
+            <a:off x="9994392" y="6400800"/>
+            <a:ext cx="1371600" cy="274320"/>
+          </a:xfrm>
+          <a:prstGeom prst="rect">
+            <a:avLst/>
+          </a:prstGeom>
+          <a:noFill/>
+          <a:ln/>
+        </p:spPr>
+        <p:txBody>
+          <a:bodyPr wrap="square" rtlCol="0" anchor="ctr"/>
+          <a:lstStyle/>
+          <a:p>
+            <a:pPr algn="r" indent="0" marL="0">
+              <a:buNone/>
+            </a:pPr>
+            <a:r>
+              <a:rPr lang="en-US" sz="900" spc="200" kern="0" dirty="0">
+                <a:solidFill>
+                  <a:srgbClr val="FF2D2D"/>
+                </a:solidFill>
+                <a:latin typeface="Consolas" pitchFamily="34" charset="0"/>
+                <a:ea typeface="Consolas" pitchFamily="34" charset="-122"/>
+                <a:cs typeface="Consolas" pitchFamily="34" charset="-120"/>
+              </a:rPr>
+              <a:t>13</a:t>
+            </a:r>
+            <a:endParaRPr lang="en-US" sz="900" dirty="0"/>
+          </a:p>
+        </p:txBody>
+      </p:sp>
+      <p:sp>
+        <p:nvSpPr>
+          <p:cNvPr id="19" name="Text 17"/>
+          <p:cNvSpPr/>
+          <p:nvPr/>
+        </p:nvSpPr>
+        <p:spPr>
+          <a:xfrm>
+            <a:off x="822960" y="640080"/>
+            <a:ext cx="7315200" cy="292608"/>
+          </a:xfrm>
+          <a:prstGeom prst="rect">
+            <a:avLst/>
+          </a:prstGeom>
+          <a:noFill/>
+          <a:ln/>
+        </p:spPr>
+        <p:txBody>
+          <a:bodyPr wrap="square" rtlCol="0" anchor="ctr"/>
+          <a:lstStyle/>
+          <a:p>
+            <a:pPr algn="l" indent="0" marL="0">
+              <a:buNone/>
+            </a:pPr>
+            <a:r>
+              <a:rPr lang="en-US" sz="1200" b="1" spc="300" kern="0" dirty="0">
+                <a:solidFill>
+                  <a:srgbClr val="FF2D2D"/>
+                </a:solidFill>
+                <a:latin typeface="Consolas" pitchFamily="34" charset="0"/>
+                <a:ea typeface="Consolas" pitchFamily="34" charset="-122"/>
+                <a:cs typeface="Consolas" pitchFamily="34" charset="-120"/>
+              </a:rPr>
               <a:t>WHAT’S NEXT</a:t>
             </a:r>
             <a:endParaRPr lang="en-US" sz="1200" dirty="0"/>
@@ -12691,7 +17364,7 @@
                 <a:ea typeface="Consolas" pitchFamily="34" charset="-122"/>
                 <a:cs typeface="Consolas" pitchFamily="34" charset="-120"/>
               </a:rPr>
-              <a:t>IMPACT</a:t>
+              <a:t>TECH STACK</a:t>
             </a:r>
             <a:endParaRPr lang="en-US" sz="1200" dirty="0"/>
           </a:p>
@@ -12730,7 +17403,7 @@
                 <a:ea typeface="Arial" pitchFamily="34" charset="-122"/>
                 <a:cs typeface="Arial" pitchFamily="34" charset="-120"/>
               </a:rPr>
-              <a:t>Who it’s for &amp; why it matters</a:t>
+              <a:t>The tools that power YANTRAA</a:t>
             </a:r>
             <a:endParaRPr lang="en-US" sz="3400" dirty="0"/>
           </a:p>
@@ -12738,293 +17411,18 @@
       </p:sp>
       <p:sp>
         <p:nvSpPr>
-          <p:cNvPr id="21" name="Text 19"/>
-          <p:cNvSpPr/>
-          <p:nvPr/>
-        </p:nvSpPr>
-        <p:spPr>
-          <a:xfrm>
-            <a:off x="822960" y="2286000"/>
-            <a:ext cx="4572000" cy="320040"/>
-          </a:xfrm>
-          <a:prstGeom prst="rect">
-            <a:avLst/>
-          </a:prstGeom>
-          <a:noFill/>
-          <a:ln/>
-        </p:spPr>
-        <p:txBody>
-          <a:bodyPr wrap="square" rtlCol="0" anchor="ctr"/>
-          <a:lstStyle/>
-          <a:p>
-            <a:pPr indent="0" marL="0">
-              <a:buNone/>
-            </a:pPr>
-            <a:r>
-              <a:rPr lang="en-US" sz="1300" b="1" spc="200" kern="0" dirty="0">
-                <a:solidFill>
-                  <a:srgbClr val="FF2D2D"/>
-                </a:solidFill>
-                <a:latin typeface="Consolas" pitchFamily="34" charset="0"/>
-                <a:ea typeface="Consolas" pitchFamily="34" charset="-122"/>
-                <a:cs typeface="Consolas" pitchFamily="34" charset="-120"/>
-              </a:rPr>
-              <a:t>BUILT FOR</a:t>
-            </a:r>
-            <a:endParaRPr lang="en-US" sz="1300" dirty="0"/>
-          </a:p>
-        </p:txBody>
-      </p:sp>
-      <p:sp>
-        <p:nvSpPr>
-          <p:cNvPr id="22" name="Shape 20"/>
-          <p:cNvSpPr/>
-          <p:nvPr/>
-        </p:nvSpPr>
-        <p:spPr>
-          <a:xfrm>
-            <a:off x="822960" y="2816352"/>
-            <a:ext cx="164592" cy="164592"/>
-          </a:xfrm>
-          <a:prstGeom prst="rect">
-            <a:avLst/>
-          </a:prstGeom>
-          <a:solidFill>
-            <a:srgbClr val="FF2D2D"/>
-          </a:solidFill>
-          <a:ln/>
-        </p:spPr>
-      </p:sp>
-      <p:sp>
-        <p:nvSpPr>
-          <p:cNvPr id="23" name="Text 21"/>
-          <p:cNvSpPr/>
-          <p:nvPr/>
-        </p:nvSpPr>
-        <p:spPr>
-          <a:xfrm>
-            <a:off x="1143000" y="2743200"/>
-            <a:ext cx="4754880" cy="365760"/>
-          </a:xfrm>
-          <a:prstGeom prst="rect">
-            <a:avLst/>
-          </a:prstGeom>
-          <a:noFill/>
-          <a:ln/>
-        </p:spPr>
-        <p:txBody>
-          <a:bodyPr wrap="square" rtlCol="0" anchor="ctr"/>
-          <a:lstStyle/>
-          <a:p>
-            <a:pPr indent="0" marL="0">
-              <a:buNone/>
-            </a:pPr>
-            <a:r>
-              <a:rPr lang="en-US" sz="1500" dirty="0">
-                <a:solidFill>
-                  <a:srgbClr val="F4F6F8"/>
-                </a:solidFill>
-                <a:latin typeface="Arial" pitchFamily="34" charset="0"/>
-                <a:ea typeface="Arial" pitchFamily="34" charset="-122"/>
-                <a:cs typeface="Arial" pitchFamily="34" charset="-120"/>
-              </a:rPr>
-              <a:t>1st &amp; 2nd year engineering students</a:t>
-            </a:r>
-            <a:endParaRPr lang="en-US" sz="1500" dirty="0"/>
-          </a:p>
-        </p:txBody>
-      </p:sp>
-      <p:sp>
-        <p:nvSpPr>
-          <p:cNvPr id="24" name="Shape 22"/>
-          <p:cNvSpPr/>
-          <p:nvPr/>
-        </p:nvSpPr>
-        <p:spPr>
-          <a:xfrm>
-            <a:off x="822960" y="3383280"/>
-            <a:ext cx="164592" cy="164592"/>
-          </a:xfrm>
-          <a:prstGeom prst="rect">
-            <a:avLst/>
-          </a:prstGeom>
-          <a:solidFill>
-            <a:srgbClr val="FF2D2D"/>
-          </a:solidFill>
-          <a:ln/>
-        </p:spPr>
-      </p:sp>
-      <p:sp>
-        <p:nvSpPr>
-          <p:cNvPr id="25" name="Text 23"/>
-          <p:cNvSpPr/>
-          <p:nvPr/>
-        </p:nvSpPr>
-        <p:spPr>
-          <a:xfrm>
-            <a:off x="1143000" y="3310128"/>
-            <a:ext cx="4754880" cy="365760"/>
-          </a:xfrm>
-          <a:prstGeom prst="rect">
-            <a:avLst/>
-          </a:prstGeom>
-          <a:noFill/>
-          <a:ln/>
-        </p:spPr>
-        <p:txBody>
-          <a:bodyPr wrap="square" rtlCol="0" anchor="ctr"/>
-          <a:lstStyle/>
-          <a:p>
-            <a:pPr indent="0" marL="0">
-              <a:buNone/>
-            </a:pPr>
-            <a:r>
-              <a:rPr lang="en-US" sz="1500" dirty="0">
-                <a:solidFill>
-                  <a:srgbClr val="F4F6F8"/>
-                </a:solidFill>
-                <a:latin typeface="Arial" pitchFamily="34" charset="0"/>
-                <a:ea typeface="Arial" pitchFamily="34" charset="-122"/>
-                <a:cs typeface="Arial" pitchFamily="34" charset="-120"/>
-              </a:rPr>
-              <a:t>Self-taught makers &amp; hobbyists</a:t>
-            </a:r>
-            <a:endParaRPr lang="en-US" sz="1500" dirty="0"/>
-          </a:p>
-        </p:txBody>
-      </p:sp>
-      <p:sp>
-        <p:nvSpPr>
-          <p:cNvPr id="26" name="Shape 24"/>
-          <p:cNvSpPr/>
-          <p:nvPr/>
-        </p:nvSpPr>
-        <p:spPr>
-          <a:xfrm>
-            <a:off x="822960" y="3950208"/>
-            <a:ext cx="164592" cy="164592"/>
-          </a:xfrm>
-          <a:prstGeom prst="rect">
-            <a:avLst/>
-          </a:prstGeom>
-          <a:solidFill>
-            <a:srgbClr val="FF2D2D"/>
-          </a:solidFill>
-          <a:ln/>
-        </p:spPr>
-      </p:sp>
-      <p:sp>
-        <p:nvSpPr>
-          <p:cNvPr id="27" name="Text 25"/>
-          <p:cNvSpPr/>
-          <p:nvPr/>
-        </p:nvSpPr>
-        <p:spPr>
-          <a:xfrm>
-            <a:off x="1143000" y="3877056"/>
-            <a:ext cx="4754880" cy="365760"/>
-          </a:xfrm>
-          <a:prstGeom prst="rect">
-            <a:avLst/>
-          </a:prstGeom>
-          <a:noFill/>
-          <a:ln/>
-        </p:spPr>
-        <p:txBody>
-          <a:bodyPr wrap="square" rtlCol="0" anchor="ctr"/>
-          <a:lstStyle/>
-          <a:p>
-            <a:pPr indent="0" marL="0">
-              <a:buNone/>
-            </a:pPr>
-            <a:r>
-              <a:rPr lang="en-US" sz="1500" dirty="0">
-                <a:solidFill>
-                  <a:srgbClr val="F4F6F8"/>
-                </a:solidFill>
-                <a:latin typeface="Arial" pitchFamily="34" charset="0"/>
-                <a:ea typeface="Arial" pitchFamily="34" charset="-122"/>
-                <a:cs typeface="Arial" pitchFamily="34" charset="-120"/>
-              </a:rPr>
-              <a:t>Classrooms without lab budgets</a:t>
-            </a:r>
-            <a:endParaRPr lang="en-US" sz="1500" dirty="0"/>
-          </a:p>
-        </p:txBody>
-      </p:sp>
-      <p:sp>
-        <p:nvSpPr>
-          <p:cNvPr id="28" name="Shape 26"/>
-          <p:cNvSpPr/>
-          <p:nvPr/>
-        </p:nvSpPr>
-        <p:spPr>
-          <a:xfrm>
-            <a:off x="822960" y="4517136"/>
-            <a:ext cx="164592" cy="164592"/>
-          </a:xfrm>
-          <a:prstGeom prst="rect">
-            <a:avLst/>
-          </a:prstGeom>
-          <a:solidFill>
-            <a:srgbClr val="FF2D2D"/>
-          </a:solidFill>
-          <a:ln/>
-        </p:spPr>
-      </p:sp>
-      <p:sp>
-        <p:nvSpPr>
-          <p:cNvPr id="29" name="Text 27"/>
-          <p:cNvSpPr/>
-          <p:nvPr/>
-        </p:nvSpPr>
-        <p:spPr>
-          <a:xfrm>
-            <a:off x="1143000" y="4443984"/>
-            <a:ext cx="4754880" cy="365760"/>
-          </a:xfrm>
-          <a:prstGeom prst="rect">
-            <a:avLst/>
-          </a:prstGeom>
-          <a:noFill/>
-          <a:ln/>
-        </p:spPr>
-        <p:txBody>
-          <a:bodyPr wrap="square" rtlCol="0" anchor="ctr"/>
-          <a:lstStyle/>
-          <a:p>
-            <a:pPr indent="0" marL="0">
-              <a:buNone/>
-            </a:pPr>
-            <a:r>
-              <a:rPr lang="en-US" sz="1500" dirty="0">
-                <a:solidFill>
-                  <a:srgbClr val="F4F6F8"/>
-                </a:solidFill>
-                <a:latin typeface="Arial" pitchFamily="34" charset="0"/>
-                <a:ea typeface="Arial" pitchFamily="34" charset="-122"/>
-                <a:cs typeface="Arial" pitchFamily="34" charset="-120"/>
-              </a:rPr>
-              <a:t>Anyone intimidated by real hardware</a:t>
-            </a:r>
-            <a:endParaRPr lang="en-US" sz="1500" dirty="0"/>
-          </a:p>
-        </p:txBody>
-      </p:sp>
-      <p:sp>
-        <p:nvSpPr>
-          <p:cNvPr id="30" name="Shape 28"/>
-          <p:cNvSpPr/>
-          <p:nvPr/>
-        </p:nvSpPr>
-        <p:spPr>
-          <a:xfrm>
-            <a:off x="6492240" y="2331720"/>
-            <a:ext cx="4873752" cy="960120"/>
+          <p:cNvPr id="21" name="Shape 19"/>
+          <p:cNvSpPr/>
+          <p:nvPr/>
+        </p:nvSpPr>
+        <p:spPr>
+          <a:xfrm>
+            <a:off x="822960" y="2377440"/>
+            <a:ext cx="2430018" cy="3200400"/>
           </a:xfrm>
           <a:prstGeom prst="roundRect">
             <a:avLst>
-              <a:gd name="adj" fmla="val 5714"/>
+              <a:gd name="adj" fmla="val 2258"/>
             </a:avLst>
           </a:prstGeom>
           <a:solidFill>
@@ -13040,14 +17438,14 @@
       </p:sp>
       <p:sp>
         <p:nvSpPr>
-          <p:cNvPr id="31" name="Shape 29"/>
-          <p:cNvSpPr/>
-          <p:nvPr/>
-        </p:nvSpPr>
-        <p:spPr>
-          <a:xfrm>
-            <a:off x="6720840" y="2331720"/>
-            <a:ext cx="4416552" cy="27432"/>
+          <p:cNvPr id="22" name="Shape 20"/>
+          <p:cNvSpPr/>
+          <p:nvPr/>
+        </p:nvSpPr>
+        <p:spPr>
+          <a:xfrm>
+            <a:off x="1051560" y="2377440"/>
+            <a:ext cx="1972818" cy="27432"/>
           </a:xfrm>
           <a:prstGeom prst="rect">
             <a:avLst/>
@@ -13060,14 +17458,14 @@
       </p:sp>
       <p:sp>
         <p:nvSpPr>
-          <p:cNvPr id="32" name="Text 30"/>
-          <p:cNvSpPr/>
-          <p:nvPr/>
-        </p:nvSpPr>
-        <p:spPr>
-          <a:xfrm>
-            <a:off x="6766560" y="2441448"/>
-            <a:ext cx="2011680" cy="731520"/>
+          <p:cNvPr id="23" name="Text 21"/>
+          <p:cNvSpPr/>
+          <p:nvPr/>
+        </p:nvSpPr>
+        <p:spPr>
+          <a:xfrm>
+            <a:off x="1051560" y="2633472"/>
+            <a:ext cx="1972818" cy="320040"/>
           </a:xfrm>
           <a:prstGeom prst="rect">
             <a:avLst/>
@@ -13083,73 +17481,290 @@
               <a:buNone/>
             </a:pPr>
             <a:r>
-              <a:rPr lang="en-US" sz="3400" b="1" dirty="0">
+              <a:rPr lang="en-US" sz="1200" b="1" spc="150" kern="0" dirty="0">
                 <a:solidFill>
                   <a:srgbClr val="FF2D2D"/>
+                </a:solidFill>
+                <a:latin typeface="Consolas" pitchFamily="34" charset="0"/>
+                <a:ea typeface="Consolas" pitchFamily="34" charset="-122"/>
+                <a:cs typeface="Consolas" pitchFamily="34" charset="-120"/>
+              </a:rPr>
+              <a:t>FRONTEND</a:t>
+            </a:r>
+            <a:endParaRPr lang="en-US" sz="1200" dirty="0"/>
+          </a:p>
+        </p:txBody>
+      </p:sp>
+      <p:sp>
+        <p:nvSpPr>
+          <p:cNvPr id="24" name="Shape 22"/>
+          <p:cNvSpPr/>
+          <p:nvPr/>
+        </p:nvSpPr>
+        <p:spPr>
+          <a:xfrm>
+            <a:off x="1051560" y="3035808"/>
+            <a:ext cx="457200" cy="27432"/>
+          </a:xfrm>
+          <a:prstGeom prst="rect">
+            <a:avLst/>
+          </a:prstGeom>
+          <a:solidFill>
+            <a:srgbClr val="8A6A4E"/>
+          </a:solidFill>
+          <a:ln/>
+        </p:spPr>
+      </p:sp>
+      <p:sp>
+        <p:nvSpPr>
+          <p:cNvPr id="25" name="Shape 23"/>
+          <p:cNvSpPr/>
+          <p:nvPr/>
+        </p:nvSpPr>
+        <p:spPr>
+          <a:xfrm>
+            <a:off x="1051560" y="3300984"/>
+            <a:ext cx="118872" cy="118872"/>
+          </a:xfrm>
+          <a:prstGeom prst="ellipse">
+            <a:avLst/>
+          </a:prstGeom>
+          <a:solidFill>
+            <a:srgbClr val="FF2D2D"/>
+          </a:solidFill>
+          <a:ln/>
+        </p:spPr>
+      </p:sp>
+      <p:sp>
+        <p:nvSpPr>
+          <p:cNvPr id="26" name="Text 24"/>
+          <p:cNvSpPr/>
+          <p:nvPr/>
+        </p:nvSpPr>
+        <p:spPr>
+          <a:xfrm>
+            <a:off x="1280160" y="3246120"/>
+            <a:ext cx="1789938" cy="457200"/>
+          </a:xfrm>
+          <a:prstGeom prst="rect">
+            <a:avLst/>
+          </a:prstGeom>
+          <a:noFill/>
+          <a:ln/>
+        </p:spPr>
+        <p:txBody>
+          <a:bodyPr wrap="square" rtlCol="0" anchor="t"/>
+          <a:lstStyle/>
+          <a:p>
+            <a:pPr indent="0" marL="0">
+              <a:buNone/>
+            </a:pPr>
+            <a:r>
+              <a:rPr lang="en-US" sz="1200" dirty="0">
+                <a:solidFill>
+                  <a:srgbClr val="F4F6F8"/>
                 </a:solidFill>
                 <a:latin typeface="Arial" pitchFamily="34" charset="0"/>
                 <a:ea typeface="Arial" pitchFamily="34" charset="-122"/>
                 <a:cs typeface="Arial" pitchFamily="34" charset="-120"/>
               </a:rPr>
-              <a:t>$0</a:t>
-            </a:r>
-            <a:endParaRPr lang="en-US" sz="3400" dirty="0"/>
-          </a:p>
-        </p:txBody>
-      </p:sp>
-      <p:sp>
-        <p:nvSpPr>
-          <p:cNvPr id="33" name="Text 31"/>
-          <p:cNvSpPr/>
-          <p:nvPr/>
-        </p:nvSpPr>
-        <p:spPr>
-          <a:xfrm>
-            <a:off x="8869680" y="2331720"/>
-            <a:ext cx="2221992" cy="960120"/>
-          </a:xfrm>
-          <a:prstGeom prst="rect">
-            <a:avLst/>
-          </a:prstGeom>
-          <a:noFill/>
-          <a:ln/>
-        </p:spPr>
-        <p:txBody>
-          <a:bodyPr wrap="square" rtlCol="0" anchor="ctr"/>
+              <a:t>Next.js (App Router)</a:t>
+            </a:r>
+            <a:endParaRPr lang="en-US" sz="1200" dirty="0"/>
+          </a:p>
+        </p:txBody>
+      </p:sp>
+      <p:sp>
+        <p:nvSpPr>
+          <p:cNvPr id="27" name="Shape 25"/>
+          <p:cNvSpPr/>
+          <p:nvPr/>
+        </p:nvSpPr>
+        <p:spPr>
+          <a:xfrm>
+            <a:off x="1051560" y="3849624"/>
+            <a:ext cx="118872" cy="118872"/>
+          </a:xfrm>
+          <a:prstGeom prst="ellipse">
+            <a:avLst/>
+          </a:prstGeom>
+          <a:solidFill>
+            <a:srgbClr val="FF2D2D"/>
+          </a:solidFill>
+          <a:ln/>
+        </p:spPr>
+      </p:sp>
+      <p:sp>
+        <p:nvSpPr>
+          <p:cNvPr id="28" name="Text 26"/>
+          <p:cNvSpPr/>
+          <p:nvPr/>
+        </p:nvSpPr>
+        <p:spPr>
+          <a:xfrm>
+            <a:off x="1280160" y="3794760"/>
+            <a:ext cx="1789938" cy="457200"/>
+          </a:xfrm>
+          <a:prstGeom prst="rect">
+            <a:avLst/>
+          </a:prstGeom>
+          <a:noFill/>
+          <a:ln/>
+        </p:spPr>
+        <p:txBody>
+          <a:bodyPr wrap="square" rtlCol="0" anchor="t"/>
           <a:lstStyle/>
           <a:p>
             <a:pPr indent="0" marL="0">
               <a:buNone/>
             </a:pPr>
             <a:r>
-              <a:rPr lang="en-US" sz="1400" dirty="0">
-                <a:solidFill>
-                  <a:srgbClr val="A9B2BD"/>
+              <a:rPr lang="en-US" sz="1200" dirty="0">
+                <a:solidFill>
+                  <a:srgbClr val="F4F6F8"/>
                 </a:solidFill>
                 <a:latin typeface="Arial" pitchFamily="34" charset="0"/>
                 <a:ea typeface="Arial" pitchFamily="34" charset="-122"/>
                 <a:cs typeface="Arial" pitchFamily="34" charset="-120"/>
               </a:rPr>
-              <a:t>hardware cost to start learning</a:t>
-            </a:r>
-            <a:endParaRPr lang="en-US" sz="1400" dirty="0"/>
-          </a:p>
-        </p:txBody>
-      </p:sp>
-      <p:sp>
-        <p:nvSpPr>
-          <p:cNvPr id="34" name="Shape 32"/>
-          <p:cNvSpPr/>
-          <p:nvPr/>
-        </p:nvSpPr>
-        <p:spPr>
-          <a:xfrm>
-            <a:off x="6492240" y="3474720"/>
-            <a:ext cx="4873752" cy="960120"/>
+              <a:t>React + TypeScript</a:t>
+            </a:r>
+            <a:endParaRPr lang="en-US" sz="1200" dirty="0"/>
+          </a:p>
+        </p:txBody>
+      </p:sp>
+      <p:sp>
+        <p:nvSpPr>
+          <p:cNvPr id="29" name="Shape 27"/>
+          <p:cNvSpPr/>
+          <p:nvPr/>
+        </p:nvSpPr>
+        <p:spPr>
+          <a:xfrm>
+            <a:off x="1051560" y="4398264"/>
+            <a:ext cx="118872" cy="118872"/>
+          </a:xfrm>
+          <a:prstGeom prst="ellipse">
+            <a:avLst/>
+          </a:prstGeom>
+          <a:solidFill>
+            <a:srgbClr val="FF2D2D"/>
+          </a:solidFill>
+          <a:ln/>
+        </p:spPr>
+      </p:sp>
+      <p:sp>
+        <p:nvSpPr>
+          <p:cNvPr id="30" name="Text 28"/>
+          <p:cNvSpPr/>
+          <p:nvPr/>
+        </p:nvSpPr>
+        <p:spPr>
+          <a:xfrm>
+            <a:off x="1280160" y="4343400"/>
+            <a:ext cx="1789938" cy="457200"/>
+          </a:xfrm>
+          <a:prstGeom prst="rect">
+            <a:avLst/>
+          </a:prstGeom>
+          <a:noFill/>
+          <a:ln/>
+        </p:spPr>
+        <p:txBody>
+          <a:bodyPr wrap="square" rtlCol="0" anchor="t"/>
+          <a:lstStyle/>
+          <a:p>
+            <a:pPr indent="0" marL="0">
+              <a:buNone/>
+            </a:pPr>
+            <a:r>
+              <a:rPr lang="en-US" sz="1200" dirty="0">
+                <a:solidFill>
+                  <a:srgbClr val="F4F6F8"/>
+                </a:solidFill>
+                <a:latin typeface="Arial" pitchFamily="34" charset="0"/>
+                <a:ea typeface="Arial" pitchFamily="34" charset="-122"/>
+                <a:cs typeface="Arial" pitchFamily="34" charset="-120"/>
+              </a:rPr>
+              <a:t>Fluent UI</a:t>
+            </a:r>
+            <a:endParaRPr lang="en-US" sz="1200" dirty="0"/>
+          </a:p>
+        </p:txBody>
+      </p:sp>
+      <p:sp>
+        <p:nvSpPr>
+          <p:cNvPr id="31" name="Shape 29"/>
+          <p:cNvSpPr/>
+          <p:nvPr/>
+        </p:nvSpPr>
+        <p:spPr>
+          <a:xfrm>
+            <a:off x="1051560" y="4946904"/>
+            <a:ext cx="118872" cy="118872"/>
+          </a:xfrm>
+          <a:prstGeom prst="ellipse">
+            <a:avLst/>
+          </a:prstGeom>
+          <a:solidFill>
+            <a:srgbClr val="FF2D2D"/>
+          </a:solidFill>
+          <a:ln/>
+        </p:spPr>
+      </p:sp>
+      <p:sp>
+        <p:nvSpPr>
+          <p:cNvPr id="32" name="Text 30"/>
+          <p:cNvSpPr/>
+          <p:nvPr/>
+        </p:nvSpPr>
+        <p:spPr>
+          <a:xfrm>
+            <a:off x="1280160" y="4892040"/>
+            <a:ext cx="1789938" cy="457200"/>
+          </a:xfrm>
+          <a:prstGeom prst="rect">
+            <a:avLst/>
+          </a:prstGeom>
+          <a:noFill/>
+          <a:ln/>
+        </p:spPr>
+        <p:txBody>
+          <a:bodyPr wrap="square" rtlCol="0" anchor="t"/>
+          <a:lstStyle/>
+          <a:p>
+            <a:pPr indent="0" marL="0">
+              <a:buNone/>
+            </a:pPr>
+            <a:r>
+              <a:rPr lang="en-US" sz="1200" dirty="0">
+                <a:solidFill>
+                  <a:srgbClr val="F4F6F8"/>
+                </a:solidFill>
+                <a:latin typeface="Arial" pitchFamily="34" charset="0"/>
+                <a:ea typeface="Arial" pitchFamily="34" charset="-122"/>
+                <a:cs typeface="Arial" pitchFamily="34" charset="-120"/>
+              </a:rPr>
+              <a:t>Tailwind-style tokens</a:t>
+            </a:r>
+            <a:endParaRPr lang="en-US" sz="1200" dirty="0"/>
+          </a:p>
+        </p:txBody>
+      </p:sp>
+      <p:sp>
+        <p:nvSpPr>
+          <p:cNvPr id="33" name="Shape 31"/>
+          <p:cNvSpPr/>
+          <p:nvPr/>
+        </p:nvSpPr>
+        <p:spPr>
+          <a:xfrm>
+            <a:off x="3527298" y="2377440"/>
+            <a:ext cx="2430018" cy="3200400"/>
           </a:xfrm>
           <a:prstGeom prst="roundRect">
             <a:avLst>
-              <a:gd name="adj" fmla="val 5714"/>
+              <a:gd name="adj" fmla="val 2258"/>
             </a:avLst>
           </a:prstGeom>
           <a:solidFill>
@@ -13165,14 +17780,14 @@
       </p:sp>
       <p:sp>
         <p:nvSpPr>
-          <p:cNvPr id="35" name="Shape 33"/>
-          <p:cNvSpPr/>
-          <p:nvPr/>
-        </p:nvSpPr>
-        <p:spPr>
-          <a:xfrm>
-            <a:off x="6720840" y="3474720"/>
-            <a:ext cx="4416552" cy="27432"/>
+          <p:cNvPr id="34" name="Shape 32"/>
+          <p:cNvSpPr/>
+          <p:nvPr/>
+        </p:nvSpPr>
+        <p:spPr>
+          <a:xfrm>
+            <a:off x="3755898" y="2377440"/>
+            <a:ext cx="1972818" cy="27432"/>
           </a:xfrm>
           <a:prstGeom prst="rect">
             <a:avLst/>
@@ -13185,14 +17800,14 @@
       </p:sp>
       <p:sp>
         <p:nvSpPr>
-          <p:cNvPr id="36" name="Text 34"/>
-          <p:cNvSpPr/>
-          <p:nvPr/>
-        </p:nvSpPr>
-        <p:spPr>
-          <a:xfrm>
-            <a:off x="6766560" y="3584448"/>
-            <a:ext cx="2011680" cy="731520"/>
+          <p:cNvPr id="35" name="Text 33"/>
+          <p:cNvSpPr/>
+          <p:nvPr/>
+        </p:nvSpPr>
+        <p:spPr>
+          <a:xfrm>
+            <a:off x="3755898" y="2633472"/>
+            <a:ext cx="1972818" cy="320040"/>
           </a:xfrm>
           <a:prstGeom prst="rect">
             <a:avLst/>
@@ -13208,73 +17823,290 @@
               <a:buNone/>
             </a:pPr>
             <a:r>
-              <a:rPr lang="en-US" sz="3400" b="1" dirty="0">
-                <a:solidFill>
-                  <a:srgbClr val="FF2D2D"/>
+              <a:rPr lang="en-US" sz="1200" b="1" spc="150" kern="0" dirty="0">
+                <a:solidFill>
+                  <a:srgbClr val="C08457"/>
+                </a:solidFill>
+                <a:latin typeface="Consolas" pitchFamily="34" charset="0"/>
+                <a:ea typeface="Consolas" pitchFamily="34" charset="-122"/>
+                <a:cs typeface="Consolas" pitchFamily="34" charset="-120"/>
+              </a:rPr>
+              <a:t>3D &amp; GRAPHICS</a:t>
+            </a:r>
+            <a:endParaRPr lang="en-US" sz="1200" dirty="0"/>
+          </a:p>
+        </p:txBody>
+      </p:sp>
+      <p:sp>
+        <p:nvSpPr>
+          <p:cNvPr id="36" name="Shape 34"/>
+          <p:cNvSpPr/>
+          <p:nvPr/>
+        </p:nvSpPr>
+        <p:spPr>
+          <a:xfrm>
+            <a:off x="3755898" y="3035808"/>
+            <a:ext cx="457200" cy="27432"/>
+          </a:xfrm>
+          <a:prstGeom prst="rect">
+            <a:avLst/>
+          </a:prstGeom>
+          <a:solidFill>
+            <a:srgbClr val="8A6A4E"/>
+          </a:solidFill>
+          <a:ln/>
+        </p:spPr>
+      </p:sp>
+      <p:sp>
+        <p:nvSpPr>
+          <p:cNvPr id="37" name="Shape 35"/>
+          <p:cNvSpPr/>
+          <p:nvPr/>
+        </p:nvSpPr>
+        <p:spPr>
+          <a:xfrm>
+            <a:off x="3755898" y="3300984"/>
+            <a:ext cx="118872" cy="118872"/>
+          </a:xfrm>
+          <a:prstGeom prst="ellipse">
+            <a:avLst/>
+          </a:prstGeom>
+          <a:solidFill>
+            <a:srgbClr val="C08457"/>
+          </a:solidFill>
+          <a:ln/>
+        </p:spPr>
+      </p:sp>
+      <p:sp>
+        <p:nvSpPr>
+          <p:cNvPr id="38" name="Text 36"/>
+          <p:cNvSpPr/>
+          <p:nvPr/>
+        </p:nvSpPr>
+        <p:spPr>
+          <a:xfrm>
+            <a:off x="3984498" y="3246120"/>
+            <a:ext cx="1789938" cy="457200"/>
+          </a:xfrm>
+          <a:prstGeom prst="rect">
+            <a:avLst/>
+          </a:prstGeom>
+          <a:noFill/>
+          <a:ln/>
+        </p:spPr>
+        <p:txBody>
+          <a:bodyPr wrap="square" rtlCol="0" anchor="t"/>
+          <a:lstStyle/>
+          <a:p>
+            <a:pPr indent="0" marL="0">
+              <a:buNone/>
+            </a:pPr>
+            <a:r>
+              <a:rPr lang="en-US" sz="1200" dirty="0">
+                <a:solidFill>
+                  <a:srgbClr val="F4F6F8"/>
                 </a:solidFill>
                 <a:latin typeface="Arial" pitchFamily="34" charset="0"/>
                 <a:ea typeface="Arial" pitchFamily="34" charset="-122"/>
                 <a:cs typeface="Arial" pitchFamily="34" charset="-120"/>
               </a:rPr>
-              <a:t>0</a:t>
-            </a:r>
-            <a:endParaRPr lang="en-US" sz="3400" dirty="0"/>
-          </a:p>
-        </p:txBody>
-      </p:sp>
-      <p:sp>
-        <p:nvSpPr>
-          <p:cNvPr id="37" name="Text 35"/>
-          <p:cNvSpPr/>
-          <p:nvPr/>
-        </p:nvSpPr>
-        <p:spPr>
-          <a:xfrm>
-            <a:off x="8869680" y="3474720"/>
-            <a:ext cx="2221992" cy="960120"/>
-          </a:xfrm>
-          <a:prstGeom prst="rect">
-            <a:avLst/>
-          </a:prstGeom>
-          <a:noFill/>
-          <a:ln/>
-        </p:spPr>
-        <p:txBody>
-          <a:bodyPr wrap="square" rtlCol="0" anchor="ctr"/>
+              <a:t>React Three Fiber</a:t>
+            </a:r>
+            <a:endParaRPr lang="en-US" sz="1200" dirty="0"/>
+          </a:p>
+        </p:txBody>
+      </p:sp>
+      <p:sp>
+        <p:nvSpPr>
+          <p:cNvPr id="39" name="Shape 37"/>
+          <p:cNvSpPr/>
+          <p:nvPr/>
+        </p:nvSpPr>
+        <p:spPr>
+          <a:xfrm>
+            <a:off x="3755898" y="3849624"/>
+            <a:ext cx="118872" cy="118872"/>
+          </a:xfrm>
+          <a:prstGeom prst="ellipse">
+            <a:avLst/>
+          </a:prstGeom>
+          <a:solidFill>
+            <a:srgbClr val="C08457"/>
+          </a:solidFill>
+          <a:ln/>
+        </p:spPr>
+      </p:sp>
+      <p:sp>
+        <p:nvSpPr>
+          <p:cNvPr id="40" name="Text 38"/>
+          <p:cNvSpPr/>
+          <p:nvPr/>
+        </p:nvSpPr>
+        <p:spPr>
+          <a:xfrm>
+            <a:off x="3984498" y="3794760"/>
+            <a:ext cx="1789938" cy="457200"/>
+          </a:xfrm>
+          <a:prstGeom prst="rect">
+            <a:avLst/>
+          </a:prstGeom>
+          <a:noFill/>
+          <a:ln/>
+        </p:spPr>
+        <p:txBody>
+          <a:bodyPr wrap="square" rtlCol="0" anchor="t"/>
           <a:lstStyle/>
           <a:p>
             <a:pPr indent="0" marL="0">
               <a:buNone/>
             </a:pPr>
             <a:r>
-              <a:rPr lang="en-US" sz="1400" dirty="0">
-                <a:solidFill>
-                  <a:srgbClr val="A9B2BD"/>
+              <a:rPr lang="en-US" sz="1200" dirty="0">
+                <a:solidFill>
+                  <a:srgbClr val="F4F6F8"/>
                 </a:solidFill>
                 <a:latin typeface="Arial" pitchFamily="34" charset="0"/>
                 <a:ea typeface="Arial" pitchFamily="34" charset="-122"/>
                 <a:cs typeface="Arial" pitchFamily="34" charset="-120"/>
               </a:rPr>
-              <a:t>components damaged by mistakes</a:t>
-            </a:r>
-            <a:endParaRPr lang="en-US" sz="1400" dirty="0"/>
-          </a:p>
-        </p:txBody>
-      </p:sp>
-      <p:sp>
-        <p:nvSpPr>
-          <p:cNvPr id="38" name="Shape 36"/>
-          <p:cNvSpPr/>
-          <p:nvPr/>
-        </p:nvSpPr>
-        <p:spPr>
-          <a:xfrm>
-            <a:off x="6492240" y="4617720"/>
-            <a:ext cx="4873752" cy="960120"/>
+              <a:t>Three.js / WebGL</a:t>
+            </a:r>
+            <a:endParaRPr lang="en-US" sz="1200" dirty="0"/>
+          </a:p>
+        </p:txBody>
+      </p:sp>
+      <p:sp>
+        <p:nvSpPr>
+          <p:cNvPr id="41" name="Shape 39"/>
+          <p:cNvSpPr/>
+          <p:nvPr/>
+        </p:nvSpPr>
+        <p:spPr>
+          <a:xfrm>
+            <a:off x="3755898" y="4398264"/>
+            <a:ext cx="118872" cy="118872"/>
+          </a:xfrm>
+          <a:prstGeom prst="ellipse">
+            <a:avLst/>
+          </a:prstGeom>
+          <a:solidFill>
+            <a:srgbClr val="C08457"/>
+          </a:solidFill>
+          <a:ln/>
+        </p:spPr>
+      </p:sp>
+      <p:sp>
+        <p:nvSpPr>
+          <p:cNvPr id="42" name="Text 40"/>
+          <p:cNvSpPr/>
+          <p:nvPr/>
+        </p:nvSpPr>
+        <p:spPr>
+          <a:xfrm>
+            <a:off x="3984498" y="4343400"/>
+            <a:ext cx="1789938" cy="457200"/>
+          </a:xfrm>
+          <a:prstGeom prst="rect">
+            <a:avLst/>
+          </a:prstGeom>
+          <a:noFill/>
+          <a:ln/>
+        </p:spPr>
+        <p:txBody>
+          <a:bodyPr wrap="square" rtlCol="0" anchor="t"/>
+          <a:lstStyle/>
+          <a:p>
+            <a:pPr indent="0" marL="0">
+              <a:buNone/>
+            </a:pPr>
+            <a:r>
+              <a:rPr lang="en-US" sz="1200" dirty="0">
+                <a:solidFill>
+                  <a:srgbClr val="F4F6F8"/>
+                </a:solidFill>
+                <a:latin typeface="Arial" pitchFamily="34" charset="0"/>
+                <a:ea typeface="Arial" pitchFamily="34" charset="-122"/>
+                <a:cs typeface="Arial" pitchFamily="34" charset="-120"/>
+              </a:rPr>
+              <a:t>@react-three/drei</a:t>
+            </a:r>
+            <a:endParaRPr lang="en-US" sz="1200" dirty="0"/>
+          </a:p>
+        </p:txBody>
+      </p:sp>
+      <p:sp>
+        <p:nvSpPr>
+          <p:cNvPr id="43" name="Shape 41"/>
+          <p:cNvSpPr/>
+          <p:nvPr/>
+        </p:nvSpPr>
+        <p:spPr>
+          <a:xfrm>
+            <a:off x="3755898" y="4946904"/>
+            <a:ext cx="118872" cy="118872"/>
+          </a:xfrm>
+          <a:prstGeom prst="ellipse">
+            <a:avLst/>
+          </a:prstGeom>
+          <a:solidFill>
+            <a:srgbClr val="C08457"/>
+          </a:solidFill>
+          <a:ln/>
+        </p:spPr>
+      </p:sp>
+      <p:sp>
+        <p:nvSpPr>
+          <p:cNvPr id="44" name="Text 42"/>
+          <p:cNvSpPr/>
+          <p:nvPr/>
+        </p:nvSpPr>
+        <p:spPr>
+          <a:xfrm>
+            <a:off x="3984498" y="4892040"/>
+            <a:ext cx="1789938" cy="457200"/>
+          </a:xfrm>
+          <a:prstGeom prst="rect">
+            <a:avLst/>
+          </a:prstGeom>
+          <a:noFill/>
+          <a:ln/>
+        </p:spPr>
+        <p:txBody>
+          <a:bodyPr wrap="square" rtlCol="0" anchor="t"/>
+          <a:lstStyle/>
+          <a:p>
+            <a:pPr indent="0" marL="0">
+              <a:buNone/>
+            </a:pPr>
+            <a:r>
+              <a:rPr lang="en-US" sz="1200" dirty="0">
+                <a:solidFill>
+                  <a:srgbClr val="F4F6F8"/>
+                </a:solidFill>
+                <a:latin typeface="Arial" pitchFamily="34" charset="0"/>
+                <a:ea typeface="Arial" pitchFamily="34" charset="-122"/>
+                <a:cs typeface="Arial" pitchFamily="34" charset="-120"/>
+              </a:rPr>
+              <a:t>Single shared GL context</a:t>
+            </a:r>
+            <a:endParaRPr lang="en-US" sz="1200" dirty="0"/>
+          </a:p>
+        </p:txBody>
+      </p:sp>
+      <p:sp>
+        <p:nvSpPr>
+          <p:cNvPr id="45" name="Shape 43"/>
+          <p:cNvSpPr/>
+          <p:nvPr/>
+        </p:nvSpPr>
+        <p:spPr>
+          <a:xfrm>
+            <a:off x="6231636" y="2377440"/>
+            <a:ext cx="2430018" cy="3200400"/>
           </a:xfrm>
           <a:prstGeom prst="roundRect">
             <a:avLst>
-              <a:gd name="adj" fmla="val 5714"/>
+              <a:gd name="adj" fmla="val 2258"/>
             </a:avLst>
           </a:prstGeom>
           <a:solidFill>
@@ -13290,14 +18122,14 @@
       </p:sp>
       <p:sp>
         <p:nvSpPr>
-          <p:cNvPr id="39" name="Shape 37"/>
-          <p:cNvSpPr/>
-          <p:nvPr/>
-        </p:nvSpPr>
-        <p:spPr>
-          <a:xfrm>
-            <a:off x="6720840" y="4617720"/>
-            <a:ext cx="4416552" cy="27432"/>
+          <p:cNvPr id="46" name="Shape 44"/>
+          <p:cNvSpPr/>
+          <p:nvPr/>
+        </p:nvSpPr>
+        <p:spPr>
+          <a:xfrm>
+            <a:off x="6460236" y="2377440"/>
+            <a:ext cx="1972818" cy="27432"/>
           </a:xfrm>
           <a:prstGeom prst="rect">
             <a:avLst/>
@@ -13310,14 +18142,14 @@
       </p:sp>
       <p:sp>
         <p:nvSpPr>
-          <p:cNvPr id="40" name="Text 38"/>
-          <p:cNvSpPr/>
-          <p:nvPr/>
-        </p:nvSpPr>
-        <p:spPr>
-          <a:xfrm>
-            <a:off x="6766560" y="4727448"/>
-            <a:ext cx="2011680" cy="731520"/>
+          <p:cNvPr id="47" name="Text 45"/>
+          <p:cNvSpPr/>
+          <p:nvPr/>
+        </p:nvSpPr>
+        <p:spPr>
+          <a:xfrm>
+            <a:off x="6460236" y="2633472"/>
+            <a:ext cx="1972818" cy="320040"/>
           </a:xfrm>
           <a:prstGeom prst="rect">
             <a:avLst/>
@@ -13333,56 +18165,654 @@
               <a:buNone/>
             </a:pPr>
             <a:r>
-              <a:rPr lang="en-US" sz="3400" b="1" dirty="0">
-                <a:solidFill>
-                  <a:srgbClr val="FF2D2D"/>
+              <a:rPr lang="en-US" sz="1200" b="1" spc="150" kern="0" dirty="0">
+                <a:solidFill>
+                  <a:srgbClr val="FF5C4D"/>
+                </a:solidFill>
+                <a:latin typeface="Consolas" pitchFamily="34" charset="0"/>
+                <a:ea typeface="Consolas" pitchFamily="34" charset="-122"/>
+                <a:cs typeface="Consolas" pitchFamily="34" charset="-120"/>
+              </a:rPr>
+              <a:t>SIMULATION &amp; AI</a:t>
+            </a:r>
+            <a:endParaRPr lang="en-US" sz="1200" dirty="0"/>
+          </a:p>
+        </p:txBody>
+      </p:sp>
+      <p:sp>
+        <p:nvSpPr>
+          <p:cNvPr id="48" name="Shape 46"/>
+          <p:cNvSpPr/>
+          <p:nvPr/>
+        </p:nvSpPr>
+        <p:spPr>
+          <a:xfrm>
+            <a:off x="6460236" y="3035808"/>
+            <a:ext cx="457200" cy="27432"/>
+          </a:xfrm>
+          <a:prstGeom prst="rect">
+            <a:avLst/>
+          </a:prstGeom>
+          <a:solidFill>
+            <a:srgbClr val="8A6A4E"/>
+          </a:solidFill>
+          <a:ln/>
+        </p:spPr>
+      </p:sp>
+      <p:sp>
+        <p:nvSpPr>
+          <p:cNvPr id="49" name="Shape 47"/>
+          <p:cNvSpPr/>
+          <p:nvPr/>
+        </p:nvSpPr>
+        <p:spPr>
+          <a:xfrm>
+            <a:off x="6460236" y="3300984"/>
+            <a:ext cx="118872" cy="118872"/>
+          </a:xfrm>
+          <a:prstGeom prst="ellipse">
+            <a:avLst/>
+          </a:prstGeom>
+          <a:solidFill>
+            <a:srgbClr val="FF5C4D"/>
+          </a:solidFill>
+          <a:ln/>
+        </p:spPr>
+      </p:sp>
+      <p:sp>
+        <p:nvSpPr>
+          <p:cNvPr id="50" name="Text 48"/>
+          <p:cNvSpPr/>
+          <p:nvPr/>
+        </p:nvSpPr>
+        <p:spPr>
+          <a:xfrm>
+            <a:off x="6688836" y="3246120"/>
+            <a:ext cx="1789938" cy="457200"/>
+          </a:xfrm>
+          <a:prstGeom prst="rect">
+            <a:avLst/>
+          </a:prstGeom>
+          <a:noFill/>
+          <a:ln/>
+        </p:spPr>
+        <p:txBody>
+          <a:bodyPr wrap="square" rtlCol="0" anchor="t"/>
+          <a:lstStyle/>
+          <a:p>
+            <a:pPr indent="0" marL="0">
+              <a:buNone/>
+            </a:pPr>
+            <a:r>
+              <a:rPr lang="en-US" sz="1200" dirty="0">
+                <a:solidFill>
+                  <a:srgbClr val="F4F6F8"/>
                 </a:solidFill>
                 <a:latin typeface="Arial" pitchFamily="34" charset="0"/>
                 <a:ea typeface="Arial" pitchFamily="34" charset="-122"/>
                 <a:cs typeface="Arial" pitchFamily="34" charset="-120"/>
               </a:rPr>
-              <a:t>Instant</a:t>
-            </a:r>
-            <a:endParaRPr lang="en-US" sz="3400" dirty="0"/>
-          </a:p>
-        </p:txBody>
-      </p:sp>
-      <p:sp>
-        <p:nvSpPr>
-          <p:cNvPr id="41" name="Text 39"/>
-          <p:cNvSpPr/>
-          <p:nvPr/>
-        </p:nvSpPr>
-        <p:spPr>
-          <a:xfrm>
-            <a:off x="8869680" y="4617720"/>
-            <a:ext cx="2221992" cy="960120"/>
-          </a:xfrm>
-          <a:prstGeom prst="rect">
-            <a:avLst/>
-          </a:prstGeom>
-          <a:noFill/>
-          <a:ln/>
-        </p:spPr>
-        <p:txBody>
-          <a:bodyPr wrap="square" rtlCol="0" anchor="ctr"/>
+              <a:t>Custom circuit engine</a:t>
+            </a:r>
+            <a:endParaRPr lang="en-US" sz="1200" dirty="0"/>
+          </a:p>
+        </p:txBody>
+      </p:sp>
+      <p:sp>
+        <p:nvSpPr>
+          <p:cNvPr id="51" name="Shape 49"/>
+          <p:cNvSpPr/>
+          <p:nvPr/>
+        </p:nvSpPr>
+        <p:spPr>
+          <a:xfrm>
+            <a:off x="6460236" y="3849624"/>
+            <a:ext cx="118872" cy="118872"/>
+          </a:xfrm>
+          <a:prstGeom prst="ellipse">
+            <a:avLst/>
+          </a:prstGeom>
+          <a:solidFill>
+            <a:srgbClr val="FF5C4D"/>
+          </a:solidFill>
+          <a:ln/>
+        </p:spPr>
+      </p:sp>
+      <p:sp>
+        <p:nvSpPr>
+          <p:cNvPr id="52" name="Text 50"/>
+          <p:cNvSpPr/>
+          <p:nvPr/>
+        </p:nvSpPr>
+        <p:spPr>
+          <a:xfrm>
+            <a:off x="6688836" y="3794760"/>
+            <a:ext cx="1789938" cy="457200"/>
+          </a:xfrm>
+          <a:prstGeom prst="rect">
+            <a:avLst/>
+          </a:prstGeom>
+          <a:noFill/>
+          <a:ln/>
+        </p:spPr>
+        <p:txBody>
+          <a:bodyPr wrap="square" rtlCol="0" anchor="t"/>
           <a:lstStyle/>
           <a:p>
             <a:pPr indent="0" marL="0">
               <a:buNone/>
             </a:pPr>
             <a:r>
-              <a:rPr lang="en-US" sz="1400" dirty="0">
-                <a:solidFill>
-                  <a:srgbClr val="A9B2BD"/>
+              <a:rPr lang="en-US" sz="1200" dirty="0">
+                <a:solidFill>
+                  <a:srgbClr val="F4F6F8"/>
                 </a:solidFill>
                 <a:latin typeface="Arial" pitchFamily="34" charset="0"/>
                 <a:ea typeface="Arial" pitchFamily="34" charset="-122"/>
                 <a:cs typeface="Arial" pitchFamily="34" charset="-120"/>
               </a:rPr>
-              <a:t>feedback the moment you wire</a:t>
-            </a:r>
-            <a:endParaRPr lang="en-US" sz="1400" dirty="0"/>
+              <a:t>Vercel AI SDK</a:t>
+            </a:r>
+            <a:endParaRPr lang="en-US" sz="1200" dirty="0"/>
+          </a:p>
+        </p:txBody>
+      </p:sp>
+      <p:sp>
+        <p:nvSpPr>
+          <p:cNvPr id="53" name="Shape 51"/>
+          <p:cNvSpPr/>
+          <p:nvPr/>
+        </p:nvSpPr>
+        <p:spPr>
+          <a:xfrm>
+            <a:off x="6460236" y="4398264"/>
+            <a:ext cx="118872" cy="118872"/>
+          </a:xfrm>
+          <a:prstGeom prst="ellipse">
+            <a:avLst/>
+          </a:prstGeom>
+          <a:solidFill>
+            <a:srgbClr val="FF5C4D"/>
+          </a:solidFill>
+          <a:ln/>
+        </p:spPr>
+      </p:sp>
+      <p:sp>
+        <p:nvSpPr>
+          <p:cNvPr id="54" name="Text 52"/>
+          <p:cNvSpPr/>
+          <p:nvPr/>
+        </p:nvSpPr>
+        <p:spPr>
+          <a:xfrm>
+            <a:off x="6688836" y="4343400"/>
+            <a:ext cx="1789938" cy="457200"/>
+          </a:xfrm>
+          <a:prstGeom prst="rect">
+            <a:avLst/>
+          </a:prstGeom>
+          <a:noFill/>
+          <a:ln/>
+        </p:spPr>
+        <p:txBody>
+          <a:bodyPr wrap="square" rtlCol="0" anchor="t"/>
+          <a:lstStyle/>
+          <a:p>
+            <a:pPr indent="0" marL="0">
+              <a:buNone/>
+            </a:pPr>
+            <a:r>
+              <a:rPr lang="en-US" sz="1200" dirty="0">
+                <a:solidFill>
+                  <a:srgbClr val="F4F6F8"/>
+                </a:solidFill>
+                <a:latin typeface="Arial" pitchFamily="34" charset="0"/>
+                <a:ea typeface="Arial" pitchFamily="34" charset="-122"/>
+                <a:cs typeface="Arial" pitchFamily="34" charset="-120"/>
+              </a:rPr>
+              <a:t>Groq LLM (streaming)</a:t>
+            </a:r>
+            <a:endParaRPr lang="en-US" sz="1200" dirty="0"/>
+          </a:p>
+        </p:txBody>
+      </p:sp>
+      <p:sp>
+        <p:nvSpPr>
+          <p:cNvPr id="55" name="Shape 53"/>
+          <p:cNvSpPr/>
+          <p:nvPr/>
+        </p:nvSpPr>
+        <p:spPr>
+          <a:xfrm>
+            <a:off x="6460236" y="4946904"/>
+            <a:ext cx="118872" cy="118872"/>
+          </a:xfrm>
+          <a:prstGeom prst="ellipse">
+            <a:avLst/>
+          </a:prstGeom>
+          <a:solidFill>
+            <a:srgbClr val="FF5C4D"/>
+          </a:solidFill>
+          <a:ln/>
+        </p:spPr>
+      </p:sp>
+      <p:sp>
+        <p:nvSpPr>
+          <p:cNvPr id="56" name="Text 54"/>
+          <p:cNvSpPr/>
+          <p:nvPr/>
+        </p:nvSpPr>
+        <p:spPr>
+          <a:xfrm>
+            <a:off x="6688836" y="4892040"/>
+            <a:ext cx="1789938" cy="457200"/>
+          </a:xfrm>
+          <a:prstGeom prst="rect">
+            <a:avLst/>
+          </a:prstGeom>
+          <a:noFill/>
+          <a:ln/>
+        </p:spPr>
+        <p:txBody>
+          <a:bodyPr wrap="square" rtlCol="0" anchor="t"/>
+          <a:lstStyle/>
+          <a:p>
+            <a:pPr indent="0" marL="0">
+              <a:buNone/>
+            </a:pPr>
+            <a:r>
+              <a:rPr lang="en-US" sz="1200" dirty="0">
+                <a:solidFill>
+                  <a:srgbClr val="F4F6F8"/>
+                </a:solidFill>
+                <a:latin typeface="Arial" pitchFamily="34" charset="0"/>
+                <a:ea typeface="Arial" pitchFamily="34" charset="-122"/>
+                <a:cs typeface="Arial" pitchFamily="34" charset="-120"/>
+              </a:rPr>
+              <a:t>MediaPipe hand tracking</a:t>
+            </a:r>
+            <a:endParaRPr lang="en-US" sz="1200" dirty="0"/>
+          </a:p>
+        </p:txBody>
+      </p:sp>
+      <p:sp>
+        <p:nvSpPr>
+          <p:cNvPr id="57" name="Shape 55"/>
+          <p:cNvSpPr/>
+          <p:nvPr/>
+        </p:nvSpPr>
+        <p:spPr>
+          <a:xfrm>
+            <a:off x="8935974" y="2377440"/>
+            <a:ext cx="2430018" cy="3200400"/>
+          </a:xfrm>
+          <a:prstGeom prst="roundRect">
+            <a:avLst>
+              <a:gd name="adj" fmla="val 2258"/>
+            </a:avLst>
+          </a:prstGeom>
+          <a:solidFill>
+            <a:srgbClr val="121417"/>
+          </a:solidFill>
+          <a:ln w="12700">
+            <a:solidFill>
+              <a:srgbClr val="2A2D33"/>
+            </a:solidFill>
+            <a:prstDash val="solid"/>
+          </a:ln>
+        </p:spPr>
+      </p:sp>
+      <p:sp>
+        <p:nvSpPr>
+          <p:cNvPr id="58" name="Shape 56"/>
+          <p:cNvSpPr/>
+          <p:nvPr/>
+        </p:nvSpPr>
+        <p:spPr>
+          <a:xfrm>
+            <a:off x="9164574" y="2377440"/>
+            <a:ext cx="1972818" cy="27432"/>
+          </a:xfrm>
+          <a:prstGeom prst="rect">
+            <a:avLst/>
+          </a:prstGeom>
+          <a:solidFill>
+            <a:srgbClr val="8A6A4E"/>
+          </a:solidFill>
+          <a:ln/>
+        </p:spPr>
+      </p:sp>
+      <p:sp>
+        <p:nvSpPr>
+          <p:cNvPr id="59" name="Text 57"/>
+          <p:cNvSpPr/>
+          <p:nvPr/>
+        </p:nvSpPr>
+        <p:spPr>
+          <a:xfrm>
+            <a:off x="9164574" y="2633472"/>
+            <a:ext cx="1972818" cy="320040"/>
+          </a:xfrm>
+          <a:prstGeom prst="rect">
+            <a:avLst/>
+          </a:prstGeom>
+          <a:noFill/>
+          <a:ln/>
+        </p:spPr>
+        <p:txBody>
+          <a:bodyPr wrap="square" rtlCol="0" anchor="ctr"/>
+          <a:lstStyle/>
+          <a:p>
+            <a:pPr indent="0" marL="0">
+              <a:buNone/>
+            </a:pPr>
+            <a:r>
+              <a:rPr lang="en-US" sz="1200" b="1" spc="150" kern="0" dirty="0">
+                <a:solidFill>
+                  <a:srgbClr val="2ECC71"/>
+                </a:solidFill>
+                <a:latin typeface="Consolas" pitchFamily="34" charset="0"/>
+                <a:ea typeface="Consolas" pitchFamily="34" charset="-122"/>
+                <a:cs typeface="Consolas" pitchFamily="34" charset="-120"/>
+              </a:rPr>
+              <a:t>PLATFORM</a:t>
+            </a:r>
+            <a:endParaRPr lang="en-US" sz="1200" dirty="0"/>
+          </a:p>
+        </p:txBody>
+      </p:sp>
+      <p:sp>
+        <p:nvSpPr>
+          <p:cNvPr id="60" name="Shape 58"/>
+          <p:cNvSpPr/>
+          <p:nvPr/>
+        </p:nvSpPr>
+        <p:spPr>
+          <a:xfrm>
+            <a:off x="9164574" y="3035808"/>
+            <a:ext cx="457200" cy="27432"/>
+          </a:xfrm>
+          <a:prstGeom prst="rect">
+            <a:avLst/>
+          </a:prstGeom>
+          <a:solidFill>
+            <a:srgbClr val="8A6A4E"/>
+          </a:solidFill>
+          <a:ln/>
+        </p:spPr>
+      </p:sp>
+      <p:sp>
+        <p:nvSpPr>
+          <p:cNvPr id="61" name="Shape 59"/>
+          <p:cNvSpPr/>
+          <p:nvPr/>
+        </p:nvSpPr>
+        <p:spPr>
+          <a:xfrm>
+            <a:off x="9164574" y="3300984"/>
+            <a:ext cx="118872" cy="118872"/>
+          </a:xfrm>
+          <a:prstGeom prst="ellipse">
+            <a:avLst/>
+          </a:prstGeom>
+          <a:solidFill>
+            <a:srgbClr val="2ECC71"/>
+          </a:solidFill>
+          <a:ln/>
+        </p:spPr>
+      </p:sp>
+      <p:sp>
+        <p:nvSpPr>
+          <p:cNvPr id="62" name="Text 60"/>
+          <p:cNvSpPr/>
+          <p:nvPr/>
+        </p:nvSpPr>
+        <p:spPr>
+          <a:xfrm>
+            <a:off x="9393174" y="3246120"/>
+            <a:ext cx="1789938" cy="457200"/>
+          </a:xfrm>
+          <a:prstGeom prst="rect">
+            <a:avLst/>
+          </a:prstGeom>
+          <a:noFill/>
+          <a:ln/>
+        </p:spPr>
+        <p:txBody>
+          <a:bodyPr wrap="square" rtlCol="0" anchor="t"/>
+          <a:lstStyle/>
+          <a:p>
+            <a:pPr indent="0" marL="0">
+              <a:buNone/>
+            </a:pPr>
+            <a:r>
+              <a:rPr lang="en-US" sz="1200" dirty="0">
+                <a:solidFill>
+                  <a:srgbClr val="F4F6F8"/>
+                </a:solidFill>
+                <a:latin typeface="Arial" pitchFamily="34" charset="0"/>
+                <a:ea typeface="Arial" pitchFamily="34" charset="-122"/>
+                <a:cs typeface="Arial" pitchFamily="34" charset="-120"/>
+              </a:rPr>
+              <a:t>Vercel hosting</a:t>
+            </a:r>
+            <a:endParaRPr lang="en-US" sz="1200" dirty="0"/>
+          </a:p>
+        </p:txBody>
+      </p:sp>
+      <p:sp>
+        <p:nvSpPr>
+          <p:cNvPr id="63" name="Shape 61"/>
+          <p:cNvSpPr/>
+          <p:nvPr/>
+        </p:nvSpPr>
+        <p:spPr>
+          <a:xfrm>
+            <a:off x="9164574" y="3849624"/>
+            <a:ext cx="118872" cy="118872"/>
+          </a:xfrm>
+          <a:prstGeom prst="ellipse">
+            <a:avLst/>
+          </a:prstGeom>
+          <a:solidFill>
+            <a:srgbClr val="2ECC71"/>
+          </a:solidFill>
+          <a:ln/>
+        </p:spPr>
+      </p:sp>
+      <p:sp>
+        <p:nvSpPr>
+          <p:cNvPr id="64" name="Text 62"/>
+          <p:cNvSpPr/>
+          <p:nvPr/>
+        </p:nvSpPr>
+        <p:spPr>
+          <a:xfrm>
+            <a:off x="9393174" y="3794760"/>
+            <a:ext cx="1789938" cy="457200"/>
+          </a:xfrm>
+          <a:prstGeom prst="rect">
+            <a:avLst/>
+          </a:prstGeom>
+          <a:noFill/>
+          <a:ln/>
+        </p:spPr>
+        <p:txBody>
+          <a:bodyPr wrap="square" rtlCol="0" anchor="t"/>
+          <a:lstStyle/>
+          <a:p>
+            <a:pPr indent="0" marL="0">
+              <a:buNone/>
+            </a:pPr>
+            <a:r>
+              <a:rPr lang="en-US" sz="1200" dirty="0">
+                <a:solidFill>
+                  <a:srgbClr val="F4F6F8"/>
+                </a:solidFill>
+                <a:latin typeface="Arial" pitchFamily="34" charset="0"/>
+                <a:ea typeface="Arial" pitchFamily="34" charset="-122"/>
+                <a:cs typeface="Arial" pitchFamily="34" charset="-120"/>
+              </a:rPr>
+              <a:t>Supabase (auth ready)</a:t>
+            </a:r>
+            <a:endParaRPr lang="en-US" sz="1200" dirty="0"/>
+          </a:p>
+        </p:txBody>
+      </p:sp>
+      <p:sp>
+        <p:nvSpPr>
+          <p:cNvPr id="65" name="Shape 63"/>
+          <p:cNvSpPr/>
+          <p:nvPr/>
+        </p:nvSpPr>
+        <p:spPr>
+          <a:xfrm>
+            <a:off x="9164574" y="4398264"/>
+            <a:ext cx="118872" cy="118872"/>
+          </a:xfrm>
+          <a:prstGeom prst="ellipse">
+            <a:avLst/>
+          </a:prstGeom>
+          <a:solidFill>
+            <a:srgbClr val="2ECC71"/>
+          </a:solidFill>
+          <a:ln/>
+        </p:spPr>
+      </p:sp>
+      <p:sp>
+        <p:nvSpPr>
+          <p:cNvPr id="66" name="Text 64"/>
+          <p:cNvSpPr/>
+          <p:nvPr/>
+        </p:nvSpPr>
+        <p:spPr>
+          <a:xfrm>
+            <a:off x="9393174" y="4343400"/>
+            <a:ext cx="1789938" cy="457200"/>
+          </a:xfrm>
+          <a:prstGeom prst="rect">
+            <a:avLst/>
+          </a:prstGeom>
+          <a:noFill/>
+          <a:ln/>
+        </p:spPr>
+        <p:txBody>
+          <a:bodyPr wrap="square" rtlCol="0" anchor="t"/>
+          <a:lstStyle/>
+          <a:p>
+            <a:pPr indent="0" marL="0">
+              <a:buNone/>
+            </a:pPr>
+            <a:r>
+              <a:rPr lang="en-US" sz="1200" dirty="0">
+                <a:solidFill>
+                  <a:srgbClr val="F4F6F8"/>
+                </a:solidFill>
+                <a:latin typeface="Arial" pitchFamily="34" charset="0"/>
+                <a:ea typeface="Arial" pitchFamily="34" charset="-122"/>
+                <a:cs typeface="Arial" pitchFamily="34" charset="-120"/>
+              </a:rPr>
+              <a:t>Client-side persistence</a:t>
+            </a:r>
+            <a:endParaRPr lang="en-US" sz="1200" dirty="0"/>
+          </a:p>
+        </p:txBody>
+      </p:sp>
+      <p:sp>
+        <p:nvSpPr>
+          <p:cNvPr id="67" name="Shape 65"/>
+          <p:cNvSpPr/>
+          <p:nvPr/>
+        </p:nvSpPr>
+        <p:spPr>
+          <a:xfrm>
+            <a:off x="9164574" y="4946904"/>
+            <a:ext cx="118872" cy="118872"/>
+          </a:xfrm>
+          <a:prstGeom prst="ellipse">
+            <a:avLst/>
+          </a:prstGeom>
+          <a:solidFill>
+            <a:srgbClr val="2ECC71"/>
+          </a:solidFill>
+          <a:ln/>
+        </p:spPr>
+      </p:sp>
+      <p:sp>
+        <p:nvSpPr>
+          <p:cNvPr id="68" name="Text 66"/>
+          <p:cNvSpPr/>
+          <p:nvPr/>
+        </p:nvSpPr>
+        <p:spPr>
+          <a:xfrm>
+            <a:off x="9393174" y="4892040"/>
+            <a:ext cx="1789938" cy="457200"/>
+          </a:xfrm>
+          <a:prstGeom prst="rect">
+            <a:avLst/>
+          </a:prstGeom>
+          <a:noFill/>
+          <a:ln/>
+        </p:spPr>
+        <p:txBody>
+          <a:bodyPr wrap="square" rtlCol="0" anchor="t"/>
+          <a:lstStyle/>
+          <a:p>
+            <a:pPr indent="0" marL="0">
+              <a:buNone/>
+            </a:pPr>
+            <a:r>
+              <a:rPr lang="en-US" sz="1200" dirty="0">
+                <a:solidFill>
+                  <a:srgbClr val="F4F6F8"/>
+                </a:solidFill>
+                <a:latin typeface="Arial" pitchFamily="34" charset="0"/>
+                <a:ea typeface="Arial" pitchFamily="34" charset="-122"/>
+                <a:cs typeface="Arial" pitchFamily="34" charset="-120"/>
+              </a:rPr>
+              <a:t>Zero-install PWA-ready</a:t>
+            </a:r>
+            <a:endParaRPr lang="en-US" sz="1200" dirty="0"/>
+          </a:p>
+        </p:txBody>
+      </p:sp>
+      <p:sp>
+        <p:nvSpPr>
+          <p:cNvPr id="69" name="Text 67"/>
+          <p:cNvSpPr/>
+          <p:nvPr/>
+        </p:nvSpPr>
+        <p:spPr>
+          <a:xfrm>
+            <a:off x="822960" y="5806440"/>
+            <a:ext cx="10543032" cy="320040"/>
+          </a:xfrm>
+          <a:prstGeom prst="rect">
+            <a:avLst/>
+          </a:prstGeom>
+          <a:noFill/>
+          <a:ln/>
+        </p:spPr>
+        <p:txBody>
+          <a:bodyPr wrap="square" rtlCol="0" anchor="ctr"/>
+          <a:lstStyle/>
+          <a:p>
+            <a:pPr algn="ctr" indent="0" marL="0">
+              <a:buNone/>
+            </a:pPr>
+            <a:r>
+              <a:rPr lang="en-US" sz="1100" spc="100" kern="0" dirty="0">
+                <a:solidFill>
+                  <a:srgbClr val="6B7480"/>
+                </a:solidFill>
+                <a:latin typeface="Consolas" pitchFamily="34" charset="0"/>
+                <a:ea typeface="Consolas" pitchFamily="34" charset="-122"/>
+                <a:cs typeface="Consolas" pitchFamily="34" charset="-120"/>
+              </a:rPr>
+              <a:t>Everything runs in the browser — no native app, no hardware drivers, no setup.</a:t>
+            </a:r>
+            <a:endParaRPr lang="en-US" sz="1100" dirty="0"/>
           </a:p>
         </p:txBody>
       </p:sp>

--- a/public/yantraa-hackathon-deck.pptx
+++ b/public/yantraa-hackathon-deck.pptx
@@ -3265,7 +3265,7 @@
                 <a:ea typeface="Arial" pitchFamily="34" charset="-122"/>
                 <a:cs typeface="Arial" pitchFamily="34" charset="-120"/>
               </a:rPr>
-              <a:t>1st &amp; 2nd year engineering students</a:t>
+              <a:t>Engineering students &amp; beginners</a:t>
             </a:r>
             <a:endParaRPr lang="en-US" sz="1500" dirty="0"/>
           </a:p>
@@ -11000,7 +11000,7 @@
                 <a:ea typeface="Arial" pitchFamily="34" charset="-122"/>
                 <a:cs typeface="Arial" pitchFamily="34" charset="-120"/>
               </a:rPr>
-              <a:t>  onto a spatial breadboard.
+              <a:t>  onto a spatial breadboard — or just say what you want.
 </a:t>
             </a:r>
             <a:pPr indent="0" marL="0">
@@ -11035,7 +11035,7 @@
                 <a:ea typeface="Arial" pitchFamily="34" charset="-122"/>
                 <a:cs typeface="Arial" pitchFamily="34" charset="-120"/>
               </a:rPr>
-              <a:t>  with real, snapping jumper wires.
+              <a:t>  with real jumper wires that magnetically snap to the nearest pin.
 </a:t>
             </a:r>
             <a:pPr indent="0" marL="0">
@@ -12026,11 +12026,11 @@
         <p:spPr>
           <a:xfrm>
             <a:off x="822960" y="2286000"/>
-            <a:ext cx="5042916" cy="3291840"/>
+            <a:ext cx="5042916" cy="3566160"/>
           </a:xfrm>
           <a:prstGeom prst="roundRect">
             <a:avLst>
-              <a:gd name="adj" fmla="val 1667"/>
+              <a:gd name="adj" fmla="val 1538"/>
             </a:avLst>
           </a:prstGeom>
           <a:solidFill>
@@ -12281,11 +12281,11 @@
         <p:spPr>
           <a:xfrm>
             <a:off x="6323076" y="2286000"/>
-            <a:ext cx="5042916" cy="3291840"/>
+            <a:ext cx="5042916" cy="3566160"/>
           </a:xfrm>
           <a:prstGeom prst="roundRect">
             <a:avLst>
-              <a:gd name="adj" fmla="val 1667"/>
+              <a:gd name="adj" fmla="val 1538"/>
             </a:avLst>
           </a:prstGeom>
           <a:solidFill>
@@ -12327,7 +12327,7 @@
         </p:nvSpPr>
         <p:spPr>
           <a:xfrm>
-            <a:off x="6597396" y="2514600"/>
+            <a:off x="6597396" y="2487168"/>
             <a:ext cx="4494276" cy="320040"/>
           </a:xfrm>
           <a:prstGeom prst="rect">
@@ -12366,7 +12366,7 @@
         </p:nvSpPr>
         <p:spPr>
           <a:xfrm>
-            <a:off x="6597396" y="3017520"/>
+            <a:off x="6597396" y="2926080"/>
             <a:ext cx="146304" cy="146304"/>
           </a:xfrm>
           <a:prstGeom prst="ellipse">
@@ -12386,7 +12386,7 @@
         </p:nvSpPr>
         <p:spPr>
           <a:xfrm>
-            <a:off x="6890004" y="2971800"/>
+            <a:off x="6890004" y="2880360"/>
             <a:ext cx="4219956" cy="274320"/>
           </a:xfrm>
           <a:prstGeom prst="rect">
@@ -12403,7 +12403,7 @@
               <a:buNone/>
             </a:pPr>
             <a:r>
-              <a:rPr lang="en-US" sz="1500" b="1" dirty="0">
+              <a:rPr lang="en-US" sz="1450" b="1" dirty="0">
                 <a:solidFill>
                   <a:srgbClr val="F4F6F8"/>
                 </a:solidFill>
@@ -12411,9 +12411,9 @@
                 <a:ea typeface="Arial" pitchFamily="34" charset="-122"/>
                 <a:cs typeface="Arial" pitchFamily="34" charset="-120"/>
               </a:rPr>
-              <a:t>Hand-tracking control</a:t>
-            </a:r>
-            <a:endParaRPr lang="en-US" sz="1500" dirty="0"/>
+              <a:t>Voice assistant</a:t>
+            </a:r>
+            <a:endParaRPr lang="en-US" sz="1450" dirty="0"/>
           </a:p>
         </p:txBody>
       </p:sp>
@@ -12425,8 +12425,8 @@
         </p:nvSpPr>
         <p:spPr>
           <a:xfrm>
-            <a:off x="6890004" y="3264408"/>
-            <a:ext cx="4219956" cy="502920"/>
+            <a:off x="6890004" y="3154680"/>
+            <a:ext cx="4219956" cy="457200"/>
           </a:xfrm>
           <a:prstGeom prst="rect">
             <a:avLst/>
@@ -12440,12 +12440,12 @@
           <a:p>
             <a:pPr indent="0" marL="0">
               <a:lnSpc>
-                <a:spcPct val="110000"/>
+                <a:spcPct val="105000"/>
               </a:lnSpc>
               <a:buNone/>
             </a:pPr>
             <a:r>
-              <a:rPr lang="en-US" sz="1250" dirty="0">
+              <a:rPr lang="en-US" sz="1150" dirty="0">
                 <a:solidFill>
                   <a:srgbClr val="A9B2BD"/>
                 </a:solidFill>
@@ -12453,9 +12453,9 @@
                 <a:ea typeface="Arial" pitchFamily="34" charset="-122"/>
                 <a:cs typeface="Arial" pitchFamily="34" charset="-120"/>
               </a:rPr>
-              <a:t>Pinch, grab, and zoom the 3D lab with your webcam — no mouse required.</a:t>
-            </a:r>
-            <a:endParaRPr lang="en-US" sz="1250" dirty="0"/>
+              <a:t>Say “Hey Circuit, add a resistor and wire it to the LED” — it places, connects, and runs it for you.</a:t>
+            </a:r>
+            <a:endParaRPr lang="en-US" sz="1150" dirty="0"/>
           </a:p>
         </p:txBody>
       </p:sp>
@@ -12467,7 +12467,7 @@
         </p:nvSpPr>
         <p:spPr>
           <a:xfrm>
-            <a:off x="6597396" y="3858768"/>
+            <a:off x="6597396" y="3639312"/>
             <a:ext cx="146304" cy="146304"/>
           </a:xfrm>
           <a:prstGeom prst="ellipse">
@@ -12487,7 +12487,7 @@
         </p:nvSpPr>
         <p:spPr>
           <a:xfrm>
-            <a:off x="6890004" y="3813048"/>
+            <a:off x="6890004" y="3593592"/>
             <a:ext cx="4219956" cy="274320"/>
           </a:xfrm>
           <a:prstGeom prst="rect">
@@ -12504,7 +12504,7 @@
               <a:buNone/>
             </a:pPr>
             <a:r>
-              <a:rPr lang="en-US" sz="1500" b="1" dirty="0">
+              <a:rPr lang="en-US" sz="1450" b="1" dirty="0">
                 <a:solidFill>
                   <a:srgbClr val="F4F6F8"/>
                 </a:solidFill>
@@ -12512,9 +12512,9 @@
                 <a:ea typeface="Arial" pitchFamily="34" charset="-122"/>
                 <a:cs typeface="Arial" pitchFamily="34" charset="-120"/>
               </a:rPr>
-              <a:t>Living-schematic UI</a:t>
-            </a:r>
-            <a:endParaRPr lang="en-US" sz="1500" dirty="0"/>
+              <a:t>Hand-tracking control</a:t>
+            </a:r>
+            <a:endParaRPr lang="en-US" sz="1450" dirty="0"/>
           </a:p>
         </p:txBody>
       </p:sp>
@@ -12526,8 +12526,8 @@
         </p:nvSpPr>
         <p:spPr>
           <a:xfrm>
-            <a:off x="6890004" y="4105656"/>
-            <a:ext cx="4219956" cy="502920"/>
+            <a:off x="6890004" y="3867912"/>
+            <a:ext cx="4219956" cy="457200"/>
           </a:xfrm>
           <a:prstGeom prst="rect">
             <a:avLst/>
@@ -12541,12 +12541,12 @@
           <a:p>
             <a:pPr indent="0" marL="0">
               <a:lnSpc>
-                <a:spcPct val="110000"/>
+                <a:spcPct val="105000"/>
               </a:lnSpc>
               <a:buNone/>
             </a:pPr>
             <a:r>
-              <a:rPr lang="en-US" sz="1250" dirty="0">
+              <a:rPr lang="en-US" sz="1150" dirty="0">
                 <a:solidFill>
                   <a:srgbClr val="A9B2BD"/>
                 </a:solidFill>
@@ -12554,9 +12554,9 @@
                 <a:ea typeface="Arial" pitchFamily="34" charset="-122"/>
                 <a:cs typeface="Arial" pitchFamily="34" charset="-120"/>
               </a:rPr>
-              <a:t>The whole app is a powered PCB: glow always means current is flowing.</a:t>
-            </a:r>
-            <a:endParaRPr lang="en-US" sz="1250" dirty="0"/>
+              <a:t>Make a fist to orbit, two fingers to zoom, pinch to grab parts and snap wires — no mouse.</a:t>
+            </a:r>
+            <a:endParaRPr lang="en-US" sz="1150" dirty="0"/>
           </a:p>
         </p:txBody>
       </p:sp>
@@ -12568,7 +12568,7 @@
         </p:nvSpPr>
         <p:spPr>
           <a:xfrm>
-            <a:off x="6597396" y="4700016"/>
+            <a:off x="6597396" y="4352544"/>
             <a:ext cx="146304" cy="146304"/>
           </a:xfrm>
           <a:prstGeom prst="ellipse">
@@ -12588,7 +12588,7 @@
         </p:nvSpPr>
         <p:spPr>
           <a:xfrm>
-            <a:off x="6890004" y="4654296"/>
+            <a:off x="6890004" y="4306824"/>
             <a:ext cx="4219956" cy="274320"/>
           </a:xfrm>
           <a:prstGeom prst="rect">
@@ -12605,7 +12605,7 @@
               <a:buNone/>
             </a:pPr>
             <a:r>
-              <a:rPr lang="en-US" sz="1500" b="1" dirty="0">
+              <a:rPr lang="en-US" sz="1450" b="1" dirty="0">
                 <a:solidFill>
                   <a:srgbClr val="F4F6F8"/>
                 </a:solidFill>
@@ -12613,9 +12613,9 @@
                 <a:ea typeface="Arial" pitchFamily="34" charset="-122"/>
                 <a:cs typeface="Arial" pitchFamily="34" charset="-120"/>
               </a:rPr>
-              <a:t>Runs in the browser</a:t>
-            </a:r>
-            <a:endParaRPr lang="en-US" sz="1500" dirty="0"/>
+              <a:t>Living-schematic UI</a:t>
+            </a:r>
+            <a:endParaRPr lang="en-US" sz="1450" dirty="0"/>
           </a:p>
         </p:txBody>
       </p:sp>
@@ -12627,8 +12627,8 @@
         </p:nvSpPr>
         <p:spPr>
           <a:xfrm>
-            <a:off x="6890004" y="4946904"/>
-            <a:ext cx="4219956" cy="502920"/>
+            <a:off x="6890004" y="4581144"/>
+            <a:ext cx="4219956" cy="457200"/>
           </a:xfrm>
           <a:prstGeom prst="rect">
             <a:avLst/>
@@ -12642,12 +12642,12 @@
           <a:p>
             <a:pPr indent="0" marL="0">
               <a:lnSpc>
-                <a:spcPct val="110000"/>
+                <a:spcPct val="105000"/>
               </a:lnSpc>
               <a:buNone/>
             </a:pPr>
             <a:r>
-              <a:rPr lang="en-US" sz="1250" dirty="0">
+              <a:rPr lang="en-US" sz="1150" dirty="0">
                 <a:solidFill>
                   <a:srgbClr val="A9B2BD"/>
                 </a:solidFill>
@@ -12655,9 +12655,110 @@
                 <a:ea typeface="Arial" pitchFamily="34" charset="-122"/>
                 <a:cs typeface="Arial" pitchFamily="34" charset="-120"/>
               </a:rPr>
+              <a:t>The whole app is a powered PCB: glow always means current is flowing.</a:t>
+            </a:r>
+            <a:endParaRPr lang="en-US" sz="1150" dirty="0"/>
+          </a:p>
+        </p:txBody>
+      </p:sp>
+      <p:sp>
+        <p:nvSpPr>
+          <p:cNvPr id="41" name="Shape 39"/>
+          <p:cNvSpPr/>
+          <p:nvPr/>
+        </p:nvSpPr>
+        <p:spPr>
+          <a:xfrm>
+            <a:off x="6597396" y="5065776"/>
+            <a:ext cx="146304" cy="146304"/>
+          </a:xfrm>
+          <a:prstGeom prst="ellipse">
+            <a:avLst/>
+          </a:prstGeom>
+          <a:solidFill>
+            <a:srgbClr val="2ECC71"/>
+          </a:solidFill>
+          <a:ln/>
+        </p:spPr>
+      </p:sp>
+      <p:sp>
+        <p:nvSpPr>
+          <p:cNvPr id="42" name="Text 40"/>
+          <p:cNvSpPr/>
+          <p:nvPr/>
+        </p:nvSpPr>
+        <p:spPr>
+          <a:xfrm>
+            <a:off x="6890004" y="5020056"/>
+            <a:ext cx="4219956" cy="274320"/>
+          </a:xfrm>
+          <a:prstGeom prst="rect">
+            <a:avLst/>
+          </a:prstGeom>
+          <a:noFill/>
+          <a:ln/>
+        </p:spPr>
+        <p:txBody>
+          <a:bodyPr wrap="square" rtlCol="0" anchor="ctr"/>
+          <a:lstStyle/>
+          <a:p>
+            <a:pPr indent="0" marL="0">
+              <a:buNone/>
+            </a:pPr>
+            <a:r>
+              <a:rPr lang="en-US" sz="1450" b="1" dirty="0">
+                <a:solidFill>
+                  <a:srgbClr val="F4F6F8"/>
+                </a:solidFill>
+                <a:latin typeface="Arial" pitchFamily="34" charset="0"/>
+                <a:ea typeface="Arial" pitchFamily="34" charset="-122"/>
+                <a:cs typeface="Arial" pitchFamily="34" charset="-120"/>
+              </a:rPr>
+              <a:t>Runs in the browser</a:t>
+            </a:r>
+            <a:endParaRPr lang="en-US" sz="1450" dirty="0"/>
+          </a:p>
+        </p:txBody>
+      </p:sp>
+      <p:sp>
+        <p:nvSpPr>
+          <p:cNvPr id="43" name="Text 41"/>
+          <p:cNvSpPr/>
+          <p:nvPr/>
+        </p:nvSpPr>
+        <p:spPr>
+          <a:xfrm>
+            <a:off x="6890004" y="5294376"/>
+            <a:ext cx="4219956" cy="457200"/>
+          </a:xfrm>
+          <a:prstGeom prst="rect">
+            <a:avLst/>
+          </a:prstGeom>
+          <a:noFill/>
+          <a:ln/>
+        </p:spPr>
+        <p:txBody>
+          <a:bodyPr wrap="square" rtlCol="0" anchor="ctr"/>
+          <a:lstStyle/>
+          <a:p>
+            <a:pPr indent="0" marL="0">
+              <a:lnSpc>
+                <a:spcPct val="105000"/>
+              </a:lnSpc>
+              <a:buNone/>
+            </a:pPr>
+            <a:r>
+              <a:rPr lang="en-US" sz="1150" dirty="0">
+                <a:solidFill>
+                  <a:srgbClr val="A9B2BD"/>
+                </a:solidFill>
+                <a:latin typeface="Arial" pitchFamily="34" charset="0"/>
+                <a:ea typeface="Arial" pitchFamily="34" charset="-122"/>
+                <a:cs typeface="Arial" pitchFamily="34" charset="-120"/>
+              </a:rPr>
               <a:t>WebGL 3D + real-time simulation, zero installs, works on a laptop.</a:t>
             </a:r>
-            <a:endParaRPr lang="en-US" sz="1250" dirty="0"/>
+            <a:endParaRPr lang="en-US" sz="1150" dirty="0"/>
           </a:p>
         </p:txBody>
       </p:sp>
@@ -16562,7 +16663,7 @@
                 <a:ea typeface="Consolas" pitchFamily="34" charset="-122"/>
                 <a:cs typeface="Consolas" pitchFamily="34" charset="-120"/>
               </a:rPr>
-              <a:t>HAND TRACKING</a:t>
+              <a:t>GESTURE &amp; VOICE</a:t>
             </a:r>
             <a:endParaRPr lang="en-US" sz="1200" dirty="0"/>
           </a:p>
@@ -16604,7 +16705,7 @@
                 <a:ea typeface="Arial" pitchFamily="34" charset="-122"/>
                 <a:cs typeface="Arial" pitchFamily="34" charset="-120"/>
               </a:rPr>
-              <a:t>Webcam gesture recognition drives pinch / grab / zoom — a natural, mouse-free interface.</a:t>
+              <a:t>Webcam gestures (fist-orbit, pinch-to-wire) and a “Hey Circuit” voice assistant drive the lab hands-free.</a:t>
             </a:r>
             <a:endParaRPr lang="en-US" sz="1200" dirty="0"/>
           </a:p>
@@ -18311,7 +18412,7 @@
                 <a:ea typeface="Arial" pitchFamily="34" charset="-122"/>
                 <a:cs typeface="Arial" pitchFamily="34" charset="-120"/>
               </a:rPr>
-              <a:t>Vercel AI SDK</a:t>
+              <a:t>Vercel AI SDK + Groq</a:t>
             </a:r>
             <a:endParaRPr lang="en-US" sz="1200" dirty="0"/>
           </a:p>
@@ -18370,7 +18471,7 @@
                 <a:ea typeface="Arial" pitchFamily="34" charset="-122"/>
                 <a:cs typeface="Arial" pitchFamily="34" charset="-120"/>
               </a:rPr>
-              <a:t>Groq LLM (streaming)</a:t>
+              <a:t>MediaPipe hand tracking</a:t>
             </a:r>
             <a:endParaRPr lang="en-US" sz="1200" dirty="0"/>
           </a:p>
@@ -18429,7 +18530,7 @@
                 <a:ea typeface="Arial" pitchFamily="34" charset="-122"/>
                 <a:cs typeface="Arial" pitchFamily="34" charset="-120"/>
               </a:rPr>
-              <a:t>MediaPipe hand tracking</a:t>
+              <a:t>Web Speech voice control</a:t>
             </a:r>
             <a:endParaRPr lang="en-US" sz="1200" dirty="0"/>
           </a:p>
